--- a/output/Module02_Visualizations.pptx
+++ b/output/Module02_Visualizations.pptx
@@ -3135,7 +3135,7 @@
                 <a:solidFill>
                   <a:srgbClr val="1F3B5C"/>
                 </a:solidFill>
-                <a:latin typeface="Calibri"/>
+                <a:latin typeface="Arial"/>
               </a:rPr>
               <a:t>خريطة المسار / Track Roadmap</a:t>
             </a:r>
@@ -3190,20 +3190,20 @@
                 <a:solidFill>
                   <a:srgbClr val="333333"/>
                 </a:solidFill>
+                <a:latin typeface="Arial"/>
+              </a:rPr>
+              <a:t>البيانات</a:t>
+            </a:r>
+          </a:p>
+          <a:p>
+            <a:pPr algn="ctr" rtl="0"/>
+            <a:r>
+              <a:rPr sz="1000">
+                <a:solidFill>
+                  <a:srgbClr val="666666"/>
+                </a:solidFill>
                 <a:latin typeface="Calibri"/>
               </a:rPr>
-              <a:t>البيانات</a:t>
-            </a:r>
-          </a:p>
-          <a:p>
-            <a:pPr algn="ctr" rtl="0"/>
-            <a:r>
-              <a:rPr sz="1000">
-                <a:solidFill>
-                  <a:srgbClr val="666666"/>
-                </a:solidFill>
-                <a:latin typeface="Calibri"/>
-              </a:rPr>
               <a:t>Data</a:t>
             </a:r>
           </a:p>
@@ -3211,7 +3211,7 @@
       </p:sp>
       <p:sp>
         <p:nvSpPr>
-          <p:cNvPr id="4" name="Right Arrow 3"/>
+          <p:cNvPr id="4" name="Left Arrow 3"/>
           <p:cNvSpPr/>
           <p:nvPr/>
         </p:nvSpPr>
@@ -3220,7 +3220,7 @@
             <a:off x="1746504" y="2926080"/>
             <a:ext cx="128016" cy="274320"/>
           </a:xfrm>
-          <a:prstGeom prst="rightArrow">
+          <a:prstGeom prst="leftArrow">
             <a:avLst/>
           </a:prstGeom>
           <a:solidFill>
@@ -3301,20 +3301,20 @@
                 <a:solidFill>
                   <a:srgbClr val="333333"/>
                 </a:solidFill>
+                <a:latin typeface="Arial"/>
+              </a:rPr>
+              <a:t>التخزين</a:t>
+            </a:r>
+          </a:p>
+          <a:p>
+            <a:pPr algn="ctr" rtl="0"/>
+            <a:r>
+              <a:rPr sz="1000">
+                <a:solidFill>
+                  <a:srgbClr val="666666"/>
+                </a:solidFill>
                 <a:latin typeface="Calibri"/>
               </a:rPr>
-              <a:t>التخزين</a:t>
-            </a:r>
-          </a:p>
-          <a:p>
-            <a:pPr algn="ctr" rtl="0"/>
-            <a:r>
-              <a:rPr sz="1000">
-                <a:solidFill>
-                  <a:srgbClr val="666666"/>
-                </a:solidFill>
-                <a:latin typeface="Calibri"/>
-              </a:rPr>
               <a:t>Storage</a:t>
             </a:r>
           </a:p>
@@ -3322,7 +3322,7 @@
       </p:sp>
       <p:sp>
         <p:nvSpPr>
-          <p:cNvPr id="6" name="Right Arrow 5"/>
+          <p:cNvPr id="6" name="Left Arrow 5"/>
           <p:cNvSpPr/>
           <p:nvPr/>
         </p:nvSpPr>
@@ -3331,7 +3331,7 @@
             <a:off x="3127248" y="2926080"/>
             <a:ext cx="128016" cy="274320"/>
           </a:xfrm>
-          <a:prstGeom prst="rightArrow">
+          <a:prstGeom prst="leftArrow">
             <a:avLst/>
           </a:prstGeom>
           <a:solidFill>
@@ -3412,20 +3412,20 @@
                 <a:solidFill>
                   <a:srgbClr val="333333"/>
                 </a:solidFill>
+                <a:latin typeface="Arial"/>
+              </a:rPr>
+              <a:t>الخصائص</a:t>
+            </a:r>
+          </a:p>
+          <a:p>
+            <a:pPr algn="ctr" rtl="0"/>
+            <a:r>
+              <a:rPr sz="1000">
+                <a:solidFill>
+                  <a:srgbClr val="666666"/>
+                </a:solidFill>
                 <a:latin typeface="Calibri"/>
               </a:rPr>
-              <a:t>الخصائص</a:t>
-            </a:r>
-          </a:p>
-          <a:p>
-            <a:pPr algn="ctr" rtl="0"/>
-            <a:r>
-              <a:rPr sz="1000">
-                <a:solidFill>
-                  <a:srgbClr val="666666"/>
-                </a:solidFill>
-                <a:latin typeface="Calibri"/>
-              </a:rPr>
               <a:t>Features</a:t>
             </a:r>
           </a:p>
@@ -3433,7 +3433,7 @@
       </p:sp>
       <p:sp>
         <p:nvSpPr>
-          <p:cNvPr id="8" name="Right Arrow 7"/>
+          <p:cNvPr id="8" name="Left Arrow 7"/>
           <p:cNvSpPr/>
           <p:nvPr/>
         </p:nvSpPr>
@@ -3442,7 +3442,7 @@
             <a:off x="4507992" y="2926080"/>
             <a:ext cx="128016" cy="274320"/>
           </a:xfrm>
-          <a:prstGeom prst="rightArrow">
+          <a:prstGeom prst="leftArrow">
             <a:avLst/>
           </a:prstGeom>
           <a:solidFill>
@@ -3523,20 +3523,20 @@
                 <a:solidFill>
                   <a:srgbClr val="333333"/>
                 </a:solidFill>
+                <a:latin typeface="Arial"/>
+              </a:rPr>
+              <a:t>الفهارس المتجهية</a:t>
+            </a:r>
+          </a:p>
+          <a:p>
+            <a:pPr algn="ctr" rtl="0"/>
+            <a:r>
+              <a:rPr sz="1000">
+                <a:solidFill>
+                  <a:srgbClr val="666666"/>
+                </a:solidFill>
                 <a:latin typeface="Calibri"/>
               </a:rPr>
-              <a:t>الفهارس المتجهية</a:t>
-            </a:r>
-          </a:p>
-          <a:p>
-            <a:pPr algn="ctr" rtl="0"/>
-            <a:r>
-              <a:rPr sz="1000">
-                <a:solidFill>
-                  <a:srgbClr val="666666"/>
-                </a:solidFill>
-                <a:latin typeface="Calibri"/>
-              </a:rPr>
               <a:t>Vector Indexes</a:t>
             </a:r>
           </a:p>
@@ -3544,7 +3544,7 @@
       </p:sp>
       <p:sp>
         <p:nvSpPr>
-          <p:cNvPr id="10" name="Right Arrow 9"/>
+          <p:cNvPr id="10" name="Left Arrow 9"/>
           <p:cNvSpPr/>
           <p:nvPr/>
         </p:nvSpPr>
@@ -3553,7 +3553,7 @@
             <a:off x="5888736" y="2926080"/>
             <a:ext cx="128016" cy="274320"/>
           </a:xfrm>
-          <a:prstGeom prst="rightArrow">
+          <a:prstGeom prst="leftArrow">
             <a:avLst/>
           </a:prstGeom>
           <a:solidFill>
@@ -3634,20 +3634,20 @@
                 <a:solidFill>
                   <a:srgbClr val="333333"/>
                 </a:solidFill>
+                <a:latin typeface="Arial"/>
+              </a:rPr>
+              <a:t>التصنيف</a:t>
+            </a:r>
+          </a:p>
+          <a:p>
+            <a:pPr algn="ctr" rtl="0"/>
+            <a:r>
+              <a:rPr sz="1000">
+                <a:solidFill>
+                  <a:srgbClr val="666666"/>
+                </a:solidFill>
                 <a:latin typeface="Calibri"/>
               </a:rPr>
-              <a:t>التصنيف</a:t>
-            </a:r>
-          </a:p>
-          <a:p>
-            <a:pPr algn="ctr" rtl="0"/>
-            <a:r>
-              <a:rPr sz="1000">
-                <a:solidFill>
-                  <a:srgbClr val="666666"/>
-                </a:solidFill>
-                <a:latin typeface="Calibri"/>
-              </a:rPr>
               <a:t>Labeling</a:t>
             </a:r>
           </a:p>
@@ -3655,7 +3655,7 @@
       </p:sp>
       <p:sp>
         <p:nvSpPr>
-          <p:cNvPr id="12" name="Right Arrow 11"/>
+          <p:cNvPr id="12" name="Left Arrow 11"/>
           <p:cNvSpPr/>
           <p:nvPr/>
         </p:nvSpPr>
@@ -3664,7 +3664,7 @@
             <a:off x="7269480" y="2926080"/>
             <a:ext cx="128016" cy="274320"/>
           </a:xfrm>
-          <a:prstGeom prst="rightArrow">
+          <a:prstGeom prst="leftArrow">
             <a:avLst/>
           </a:prstGeom>
           <a:solidFill>
@@ -3745,20 +3745,20 @@
                 <a:solidFill>
                   <a:srgbClr val="333333"/>
                 </a:solidFill>
+                <a:latin typeface="Arial"/>
+              </a:rPr>
+              <a:t>الحوكمة</a:t>
+            </a:r>
+          </a:p>
+          <a:p>
+            <a:pPr algn="ctr" rtl="0"/>
+            <a:r>
+              <a:rPr sz="1000">
+                <a:solidFill>
+                  <a:srgbClr val="666666"/>
+                </a:solidFill>
                 <a:latin typeface="Calibri"/>
               </a:rPr>
-              <a:t>الحوكمة</a:t>
-            </a:r>
-          </a:p>
-          <a:p>
-            <a:pPr algn="ctr" rtl="0"/>
-            <a:r>
-              <a:rPr sz="1000">
-                <a:solidFill>
-                  <a:srgbClr val="666666"/>
-                </a:solidFill>
-                <a:latin typeface="Calibri"/>
-              </a:rPr>
               <a:t>Governance</a:t>
             </a:r>
           </a:p>
@@ -3766,7 +3766,7 @@
       </p:sp>
       <p:sp>
         <p:nvSpPr>
-          <p:cNvPr id="14" name="Right Arrow 13"/>
+          <p:cNvPr id="14" name="Left Arrow 13"/>
           <p:cNvSpPr/>
           <p:nvPr/>
         </p:nvSpPr>
@@ -3775,7 +3775,7 @@
             <a:off x="8650224" y="2926080"/>
             <a:ext cx="128016" cy="274320"/>
           </a:xfrm>
-          <a:prstGeom prst="rightArrow">
+          <a:prstGeom prst="leftArrow">
             <a:avLst/>
           </a:prstGeom>
           <a:solidFill>
@@ -3856,28 +3856,28 @@
                 <a:solidFill>
                   <a:srgbClr val="333333"/>
                 </a:solidFill>
+                <a:latin typeface="Arial"/>
+              </a:rPr>
+              <a:t>MLOps</a:t>
+            </a:r>
+          </a:p>
+          <a:p>
+            <a:pPr algn="ctr" rtl="0"/>
+            <a:r>
+              <a:rPr sz="1000">
+                <a:solidFill>
+                  <a:srgbClr val="666666"/>
+                </a:solidFill>
                 <a:latin typeface="Calibri"/>
               </a:rPr>
               <a:t>MLOps</a:t>
             </a:r>
           </a:p>
-          <a:p>
-            <a:pPr algn="ctr" rtl="0"/>
-            <a:r>
-              <a:rPr sz="1000">
-                <a:solidFill>
-                  <a:srgbClr val="666666"/>
-                </a:solidFill>
-                <a:latin typeface="Calibri"/>
-              </a:rPr>
-              <a:t>MLOps</a:t>
-            </a:r>
-          </a:p>
-        </p:txBody>
-      </p:sp>
-      <p:sp>
-        <p:nvSpPr>
-          <p:cNvPr id="16" name="Right Arrow 15"/>
+        </p:txBody>
+      </p:sp>
+      <p:sp>
+        <p:nvSpPr>
+          <p:cNvPr id="16" name="Left Arrow 15"/>
           <p:cNvSpPr/>
           <p:nvPr/>
         </p:nvSpPr>
@@ -3886,7 +3886,7 @@
             <a:off x="10030968" y="2926080"/>
             <a:ext cx="128016" cy="274320"/>
           </a:xfrm>
-          <a:prstGeom prst="rightArrow">
+          <a:prstGeom prst="leftArrow">
             <a:avLst/>
           </a:prstGeom>
           <a:solidFill>
@@ -3967,7 +3967,7 @@
                 <a:solidFill>
                   <a:srgbClr val="333333"/>
                 </a:solidFill>
-                <a:latin typeface="Calibri"/>
+                <a:latin typeface="Arial"/>
               </a:rPr>
               <a:t>المختبر</a:t>
             </a:r>
@@ -4014,7 +4014,7 @@
                 <a:solidFill>
                   <a:srgbClr val="666666"/>
                 </a:solidFill>
-                <a:latin typeface="Calibri"/>
+                <a:latin typeface="Arial"/>
               </a:rPr>
               <a:t>رحلة الوحدة الثانية من البيانات الخام إلى نقطة نهاية RAG.</a:t>
             </a:r>
@@ -4081,7 +4081,7 @@
                 <a:solidFill>
                   <a:srgbClr val="1F3B5C"/>
                 </a:solidFill>
-                <a:latin typeface="Calibri"/>
+                <a:latin typeface="Arial"/>
               </a:rPr>
               <a:t>من LLM إلى الأنظمة الوكيلة / From LLM to Agentic AI</a:t>
             </a:r>
@@ -4136,7 +4136,7 @@
                 <a:solidFill>
                   <a:srgbClr val="333333"/>
                 </a:solidFill>
-                <a:latin typeface="Calibri"/>
+                <a:latin typeface="Arial"/>
               </a:rPr>
               <a:t>LLM</a:t>
             </a:r>
@@ -4191,20 +4191,20 @@
                 <a:solidFill>
                   <a:srgbClr val="333333"/>
                 </a:solidFill>
+                <a:latin typeface="Arial"/>
+              </a:rPr>
+              <a:t>تنبؤ بالرموز التالية</a:t>
+            </a:r>
+          </a:p>
+          <a:p>
+            <a:pPr algn="ctr" rtl="0"/>
+            <a:r>
+              <a:rPr sz="1100">
+                <a:solidFill>
+                  <a:srgbClr val="666666"/>
+                </a:solidFill>
                 <a:latin typeface="Calibri"/>
               </a:rPr>
-              <a:t>تنبؤ بالرموز التالية</a:t>
-            </a:r>
-          </a:p>
-          <a:p>
-            <a:pPr algn="ctr" rtl="0"/>
-            <a:r>
-              <a:rPr sz="1100">
-                <a:solidFill>
-                  <a:srgbClr val="666666"/>
-                </a:solidFill>
-                <a:latin typeface="Calibri"/>
-              </a:rPr>
               <a:t>Predicts next tokens</a:t>
             </a:r>
           </a:p>
@@ -4212,7 +4212,7 @@
       </p:sp>
       <p:sp>
         <p:nvSpPr>
-          <p:cNvPr id="5" name="Right Arrow 4"/>
+          <p:cNvPr id="5" name="Left Arrow 4"/>
           <p:cNvSpPr/>
           <p:nvPr/>
         </p:nvSpPr>
@@ -4221,7 +4221,7 @@
             <a:off x="3072384" y="1965960"/>
             <a:ext cx="347472" cy="274320"/>
           </a:xfrm>
-          <a:prstGeom prst="rightArrow">
+          <a:prstGeom prst="leftArrow">
             <a:avLst/>
           </a:prstGeom>
           <a:solidFill>
@@ -4302,7 +4302,7 @@
                 <a:solidFill>
                   <a:srgbClr val="333333"/>
                 </a:solidFill>
-                <a:latin typeface="Calibri"/>
+                <a:latin typeface="Arial"/>
               </a:rPr>
               <a:t>الذكاء التوليدي</a:t>
             </a:r>
@@ -4357,20 +4357,20 @@
                 <a:solidFill>
                   <a:srgbClr val="333333"/>
                 </a:solidFill>
+                <a:latin typeface="Arial"/>
+              </a:rPr>
+              <a:t>يولّد محتوى جديدًا</a:t>
+            </a:r>
+          </a:p>
+          <a:p>
+            <a:pPr algn="ctr" rtl="0"/>
+            <a:r>
+              <a:rPr sz="1100">
+                <a:solidFill>
+                  <a:srgbClr val="666666"/>
+                </a:solidFill>
                 <a:latin typeface="Calibri"/>
               </a:rPr>
-              <a:t>يولّد محتوى جديدًا</a:t>
-            </a:r>
-          </a:p>
-          <a:p>
-            <a:pPr algn="ctr" rtl="0"/>
-            <a:r>
-              <a:rPr sz="1100">
-                <a:solidFill>
-                  <a:srgbClr val="666666"/>
-                </a:solidFill>
-                <a:latin typeface="Calibri"/>
-              </a:rPr>
               <a:t>Generates new content</a:t>
             </a:r>
           </a:p>
@@ -4378,7 +4378,7 @@
       </p:sp>
       <p:sp>
         <p:nvSpPr>
-          <p:cNvPr id="8" name="Right Arrow 7"/>
+          <p:cNvPr id="8" name="Left Arrow 7"/>
           <p:cNvSpPr/>
           <p:nvPr/>
         </p:nvSpPr>
@@ -4387,7 +4387,7 @@
             <a:off x="5907024" y="1965960"/>
             <a:ext cx="347472" cy="274320"/>
           </a:xfrm>
-          <a:prstGeom prst="rightArrow">
+          <a:prstGeom prst="leftArrow">
             <a:avLst/>
           </a:prstGeom>
           <a:solidFill>
@@ -4468,7 +4468,7 @@
                 <a:solidFill>
                   <a:srgbClr val="333333"/>
                 </a:solidFill>
-                <a:latin typeface="Calibri"/>
+                <a:latin typeface="Arial"/>
               </a:rPr>
               <a:t>الوكلاء Agents</a:t>
             </a:r>
@@ -4523,20 +4523,20 @@
                 <a:solidFill>
                   <a:srgbClr val="333333"/>
                 </a:solidFill>
+                <a:latin typeface="Arial"/>
+              </a:rPr>
+              <a:t>نية + استدعاء أدوات</a:t>
+            </a:r>
+          </a:p>
+          <a:p>
+            <a:pPr algn="ctr" rtl="0"/>
+            <a:r>
+              <a:rPr sz="1100">
+                <a:solidFill>
+                  <a:srgbClr val="666666"/>
+                </a:solidFill>
                 <a:latin typeface="Calibri"/>
               </a:rPr>
-              <a:t>نية + استدعاء أدوات</a:t>
-            </a:r>
-          </a:p>
-          <a:p>
-            <a:pPr algn="ctr" rtl="0"/>
-            <a:r>
-              <a:rPr sz="1100">
-                <a:solidFill>
-                  <a:srgbClr val="666666"/>
-                </a:solidFill>
-                <a:latin typeface="Calibri"/>
-              </a:rPr>
               <a:t>Intent + tool calls</a:t>
             </a:r>
           </a:p>
@@ -4544,7 +4544,7 @@
       </p:sp>
       <p:sp>
         <p:nvSpPr>
-          <p:cNvPr id="11" name="Right Arrow 10"/>
+          <p:cNvPr id="11" name="Left Arrow 10"/>
           <p:cNvSpPr/>
           <p:nvPr/>
         </p:nvSpPr>
@@ -4553,7 +4553,7 @@
             <a:off x="8741664" y="1965960"/>
             <a:ext cx="347472" cy="274320"/>
           </a:xfrm>
-          <a:prstGeom prst="rightArrow">
+          <a:prstGeom prst="leftArrow">
             <a:avLst/>
           </a:prstGeom>
           <a:solidFill>
@@ -4634,7 +4634,7 @@
                 <a:solidFill>
                   <a:srgbClr val="333333"/>
                 </a:solidFill>
-                <a:latin typeface="Calibri"/>
+                <a:latin typeface="Arial"/>
               </a:rPr>
               <a:t>الأنظمة الوكيلة</a:t>
             </a:r>
@@ -4689,7 +4689,7 @@
                 <a:solidFill>
                   <a:srgbClr val="333333"/>
                 </a:solidFill>
-                <a:latin typeface="Calibri"/>
+                <a:latin typeface="Arial"/>
               </a:rPr>
               <a:t>تخطيط وتنفيذ متعدد الخطوات</a:t>
             </a:r>
@@ -4736,7 +4736,7 @@
                 <a:solidFill>
                   <a:srgbClr val="666666"/>
                 </a:solidFill>
-                <a:latin typeface="Calibri"/>
+                <a:latin typeface="Arial"/>
               </a:rPr>
               <a:t>Agentic RAG = بحث متجهي + جلب عبر الواجهات بذاكرة متجددة وتحقق قبل التسليم.</a:t>
             </a:r>
@@ -4803,7 +4803,7 @@
                 <a:solidFill>
                   <a:srgbClr val="1F3B5C"/>
                 </a:solidFill>
-                <a:latin typeface="Calibri"/>
+                <a:latin typeface="Arial"/>
               </a:rPr>
               <a:t>معمارية مخزن الخصائص / Feature Store Architecture</a:t>
             </a:r>
@@ -4858,20 +4858,20 @@
                 <a:solidFill>
                   <a:srgbClr val="333333"/>
                 </a:solidFill>
+                <a:latin typeface="Arial"/>
+              </a:rPr>
+              <a:t>مصادر البيانات</a:t>
+            </a:r>
+          </a:p>
+          <a:p>
+            <a:pPr algn="ctr" rtl="0"/>
+            <a:r>
+              <a:rPr sz="1100">
+                <a:solidFill>
+                  <a:srgbClr val="666666"/>
+                </a:solidFill>
                 <a:latin typeface="Calibri"/>
               </a:rPr>
-              <a:t>مصادر البيانات</a:t>
-            </a:r>
-          </a:p>
-          <a:p>
-            <a:pPr algn="ctr" rtl="0"/>
-            <a:r>
-              <a:rPr sz="1100">
-                <a:solidFill>
-                  <a:srgbClr val="666666"/>
-                </a:solidFill>
-                <a:latin typeface="Calibri"/>
-              </a:rPr>
               <a:t>Data Sources</a:t>
             </a:r>
           </a:p>
@@ -4879,7 +4879,7 @@
       </p:sp>
       <p:sp>
         <p:nvSpPr>
-          <p:cNvPr id="4" name="Right Arrow 3"/>
+          <p:cNvPr id="4" name="Left Arrow 3"/>
           <p:cNvSpPr/>
           <p:nvPr/>
         </p:nvSpPr>
@@ -4888,7 +4888,7 @@
             <a:off x="2724912" y="3017520"/>
             <a:ext cx="411480" cy="274320"/>
           </a:xfrm>
-          <a:prstGeom prst="rightArrow">
+          <a:prstGeom prst="leftArrow">
             <a:avLst/>
           </a:prstGeom>
           <a:solidFill>
@@ -4969,7 +4969,7 @@
                 <a:solidFill>
                   <a:srgbClr val="333333"/>
                 </a:solidFill>
-                <a:latin typeface="Calibri"/>
+                <a:latin typeface="Arial"/>
               </a:rPr>
               <a:t>خط الخصائص</a:t>
             </a:r>
@@ -4991,7 +4991,7 @@
       </p:sp>
       <p:sp>
         <p:nvSpPr>
-          <p:cNvPr id="6" name="Right Arrow 5"/>
+          <p:cNvPr id="6" name="Left Arrow 5"/>
           <p:cNvSpPr/>
           <p:nvPr/>
         </p:nvSpPr>
@@ -5000,7 +5000,7 @@
             <a:off x="5468112" y="2331720"/>
             <a:ext cx="411480" cy="274320"/>
           </a:xfrm>
-          <a:prstGeom prst="rightArrow">
+          <a:prstGeom prst="leftArrow">
             <a:avLst/>
           </a:prstGeom>
           <a:solidFill>
@@ -5035,7 +5035,7 @@
       </p:sp>
       <p:sp>
         <p:nvSpPr>
-          <p:cNvPr id="7" name="Right Arrow 6"/>
+          <p:cNvPr id="7" name="Left Arrow 6"/>
           <p:cNvSpPr/>
           <p:nvPr/>
         </p:nvSpPr>
@@ -5044,7 +5044,7 @@
             <a:off x="5468112" y="3611880"/>
             <a:ext cx="411480" cy="274320"/>
           </a:xfrm>
-          <a:prstGeom prst="rightArrow">
+          <a:prstGeom prst="leftArrow">
             <a:avLst/>
           </a:prstGeom>
           <a:solidFill>
@@ -5125,7 +5125,7 @@
                 <a:solidFill>
                   <a:srgbClr val="333333"/>
                 </a:solidFill>
-                <a:latin typeface="Calibri"/>
+                <a:latin typeface="Arial"/>
               </a:rPr>
               <a:t>المخزن غير المتصل</a:t>
             </a:r>
@@ -5193,7 +5193,7 @@
                 <a:solidFill>
                   <a:srgbClr val="333333"/>
                 </a:solidFill>
-                <a:latin typeface="Calibri"/>
+                <a:latin typeface="Arial"/>
               </a:rPr>
               <a:t>المخزن المتصل</a:t>
             </a:r>
@@ -5261,7 +5261,7 @@
                 <a:solidFill>
                   <a:srgbClr val="333333"/>
                 </a:solidFill>
-                <a:latin typeface="Calibri"/>
+                <a:latin typeface="Arial"/>
               </a:rPr>
               <a:t>التدريب</a:t>
             </a:r>
@@ -5328,20 +5328,20 @@
                 <a:solidFill>
                   <a:srgbClr val="333333"/>
                 </a:solidFill>
+                <a:latin typeface="Arial"/>
+              </a:rPr>
+              <a:t>الاستدلال</a:t>
+            </a:r>
+          </a:p>
+          <a:p>
+            <a:pPr algn="ctr" rtl="0"/>
+            <a:r>
+              <a:rPr sz="1100">
+                <a:solidFill>
+                  <a:srgbClr val="666666"/>
+                </a:solidFill>
                 <a:latin typeface="Calibri"/>
               </a:rPr>
-              <a:t>الاستدلال</a:t>
-            </a:r>
-          </a:p>
-          <a:p>
-            <a:pPr algn="ctr" rtl="0"/>
-            <a:r>
-              <a:rPr sz="1100">
-                <a:solidFill>
-                  <a:srgbClr val="666666"/>
-                </a:solidFill>
-                <a:latin typeface="Calibri"/>
-              </a:rPr>
               <a:t>Serving</a:t>
             </a:r>
           </a:p>
@@ -5349,7 +5349,7 @@
       </p:sp>
       <p:sp>
         <p:nvSpPr>
-          <p:cNvPr id="12" name="Right Arrow 11"/>
+          <p:cNvPr id="12" name="Left Arrow 11"/>
           <p:cNvSpPr/>
           <p:nvPr/>
         </p:nvSpPr>
@@ -5358,7 +5358,7 @@
             <a:off x="8449056" y="2011680"/>
             <a:ext cx="658368" cy="274320"/>
           </a:xfrm>
-          <a:prstGeom prst="rightArrow">
+          <a:prstGeom prst="leftArrow">
             <a:avLst/>
           </a:prstGeom>
           <a:solidFill>
@@ -5393,7 +5393,7 @@
       </p:sp>
       <p:sp>
         <p:nvSpPr>
-          <p:cNvPr id="13" name="Right Arrow 12"/>
+          <p:cNvPr id="13" name="Left Arrow 12"/>
           <p:cNvSpPr/>
           <p:nvPr/>
         </p:nvSpPr>
@@ -5402,7 +5402,7 @@
             <a:off x="8449056" y="4023360"/>
             <a:ext cx="658368" cy="274320"/>
           </a:xfrm>
-          <a:prstGeom prst="rightArrow">
+          <a:prstGeom prst="leftArrow">
             <a:avLst/>
           </a:prstGeom>
           <a:solidFill>
@@ -5463,7 +5463,7 @@
                 <a:solidFill>
                   <a:srgbClr val="666666"/>
                 </a:solidFill>
-                <a:latin typeface="Calibri"/>
+                <a:latin typeface="Arial"/>
               </a:rPr>
               <a:t>قيمة مخزن الخصائص: نفس تعريف الخصائص للتدريب والاستدلال — لا انحراف.</a:t>
             </a:r>
@@ -5530,7 +5530,7 @@
                 <a:solidFill>
                   <a:srgbClr val="1F3B5C"/>
                 </a:solidFill>
-                <a:latin typeface="Calibri"/>
+                <a:latin typeface="Arial"/>
               </a:rPr>
               <a:t>سير عمل التصنيف بمساعدة LLM / LLM-assisted Labeling Workflow</a:t>
             </a:r>
@@ -5585,20 +5585,20 @@
                 <a:solidFill>
                   <a:srgbClr val="333333"/>
                 </a:solidFill>
+                <a:latin typeface="Arial"/>
+              </a:rPr>
+              <a:t>بيانات خام</a:t>
+            </a:r>
+          </a:p>
+          <a:p>
+            <a:pPr algn="ctr" rtl="0"/>
+            <a:r>
+              <a:rPr sz="1200">
+                <a:solidFill>
+                  <a:srgbClr val="666666"/>
+                </a:solidFill>
                 <a:latin typeface="Calibri"/>
               </a:rPr>
-              <a:t>بيانات خام</a:t>
-            </a:r>
-          </a:p>
-          <a:p>
-            <a:pPr algn="ctr" rtl="0"/>
-            <a:r>
-              <a:rPr sz="1200">
-                <a:solidFill>
-                  <a:srgbClr val="666666"/>
-                </a:solidFill>
-                <a:latin typeface="Calibri"/>
-              </a:rPr>
               <a:t>Raw data</a:t>
             </a:r>
           </a:p>
@@ -5606,7 +5606,7 @@
       </p:sp>
       <p:sp>
         <p:nvSpPr>
-          <p:cNvPr id="4" name="Right Arrow 3"/>
+          <p:cNvPr id="4" name="Left Arrow 3"/>
           <p:cNvSpPr/>
           <p:nvPr/>
         </p:nvSpPr>
@@ -5615,7 +5615,7 @@
             <a:off x="2624328" y="2606040"/>
             <a:ext cx="274320" cy="274320"/>
           </a:xfrm>
-          <a:prstGeom prst="rightArrow">
+          <a:prstGeom prst="leftArrow">
             <a:avLst/>
           </a:prstGeom>
           <a:solidFill>
@@ -5696,20 +5696,20 @@
                 <a:solidFill>
                   <a:srgbClr val="333333"/>
                 </a:solidFill>
+                <a:latin typeface="Arial"/>
+              </a:rPr>
+              <a:t>تسمية مبدئية بالـ LLM</a:t>
+            </a:r>
+          </a:p>
+          <a:p>
+            <a:pPr algn="ctr" rtl="0"/>
+            <a:r>
+              <a:rPr sz="1200">
+                <a:solidFill>
+                  <a:srgbClr val="666666"/>
+                </a:solidFill>
                 <a:latin typeface="Calibri"/>
               </a:rPr>
-              <a:t>تسمية مبدئية بالـ LLM</a:t>
-            </a:r>
-          </a:p>
-          <a:p>
-            <a:pPr algn="ctr" rtl="0"/>
-            <a:r>
-              <a:rPr sz="1200">
-                <a:solidFill>
-                  <a:srgbClr val="666666"/>
-                </a:solidFill>
-                <a:latin typeface="Calibri"/>
-              </a:rPr>
               <a:t>LLM pre-labeling</a:t>
             </a:r>
           </a:p>
@@ -5717,7 +5717,7 @@
       </p:sp>
       <p:sp>
         <p:nvSpPr>
-          <p:cNvPr id="6" name="Right Arrow 5"/>
+          <p:cNvPr id="6" name="Left Arrow 5"/>
           <p:cNvSpPr/>
           <p:nvPr/>
         </p:nvSpPr>
@@ -5726,7 +5726,7 @@
             <a:off x="4910328" y="2606040"/>
             <a:ext cx="274320" cy="274320"/>
           </a:xfrm>
-          <a:prstGeom prst="rightArrow">
+          <a:prstGeom prst="leftArrow">
             <a:avLst/>
           </a:prstGeom>
           <a:solidFill>
@@ -5807,20 +5807,20 @@
                 <a:solidFill>
                   <a:srgbClr val="333333"/>
                 </a:solidFill>
+                <a:latin typeface="Arial"/>
+              </a:rPr>
+              <a:t>مراجعة وتصحيح بشري</a:t>
+            </a:r>
+          </a:p>
+          <a:p>
+            <a:pPr algn="ctr" rtl="0"/>
+            <a:r>
+              <a:rPr sz="1200">
+                <a:solidFill>
+                  <a:srgbClr val="666666"/>
+                </a:solidFill>
                 <a:latin typeface="Calibri"/>
               </a:rPr>
-              <a:t>مراجعة وتصحيح بشري</a:t>
-            </a:r>
-          </a:p>
-          <a:p>
-            <a:pPr algn="ctr" rtl="0"/>
-            <a:r>
-              <a:rPr sz="1200">
-                <a:solidFill>
-                  <a:srgbClr val="666666"/>
-                </a:solidFill>
-                <a:latin typeface="Calibri"/>
-              </a:rPr>
               <a:t>Human review (HITL)</a:t>
             </a:r>
           </a:p>
@@ -5828,7 +5828,7 @@
       </p:sp>
       <p:sp>
         <p:nvSpPr>
-          <p:cNvPr id="8" name="Right Arrow 7"/>
+          <p:cNvPr id="8" name="Left Arrow 7"/>
           <p:cNvSpPr/>
           <p:nvPr/>
         </p:nvSpPr>
@@ -5837,7 +5837,7 @@
             <a:off x="7196328" y="2606040"/>
             <a:ext cx="274320" cy="274320"/>
           </a:xfrm>
-          <a:prstGeom prst="rightArrow">
+          <a:prstGeom prst="leftArrow">
             <a:avLst/>
           </a:prstGeom>
           <a:solidFill>
@@ -5918,20 +5918,20 @@
                 <a:solidFill>
                   <a:srgbClr val="333333"/>
                 </a:solidFill>
+                <a:latin typeface="Arial"/>
+              </a:rPr>
+              <a:t>تسميات معتمدة</a:t>
+            </a:r>
+          </a:p>
+          <a:p>
+            <a:pPr algn="ctr" rtl="0"/>
+            <a:r>
+              <a:rPr sz="1200">
+                <a:solidFill>
+                  <a:srgbClr val="666666"/>
+                </a:solidFill>
                 <a:latin typeface="Calibri"/>
               </a:rPr>
-              <a:t>تسميات معتمدة</a:t>
-            </a:r>
-          </a:p>
-          <a:p>
-            <a:pPr algn="ctr" rtl="0"/>
-            <a:r>
-              <a:rPr sz="1200">
-                <a:solidFill>
-                  <a:srgbClr val="666666"/>
-                </a:solidFill>
-                <a:latin typeface="Calibri"/>
-              </a:rPr>
               <a:t>Approved labels</a:t>
             </a:r>
           </a:p>
@@ -5939,7 +5939,7 @@
       </p:sp>
       <p:sp>
         <p:nvSpPr>
-          <p:cNvPr id="10" name="Right Arrow 9"/>
+          <p:cNvPr id="10" name="Left Arrow 9"/>
           <p:cNvSpPr/>
           <p:nvPr/>
         </p:nvSpPr>
@@ -5948,7 +5948,7 @@
             <a:off x="9482328" y="2606040"/>
             <a:ext cx="274320" cy="274320"/>
           </a:xfrm>
-          <a:prstGeom prst="rightArrow">
+          <a:prstGeom prst="leftArrow">
             <a:avLst/>
           </a:prstGeom>
           <a:solidFill>
@@ -6029,7 +6029,7 @@
                 <a:solidFill>
                   <a:srgbClr val="333333"/>
                 </a:solidFill>
-                <a:latin typeface="Calibri"/>
+                <a:latin typeface="Arial"/>
               </a:rPr>
               <a:t>تدريب النموذج</a:t>
             </a:r>
@@ -6096,7 +6096,7 @@
                 <a:solidFill>
                   <a:srgbClr val="333333"/>
                 </a:solidFill>
-                <a:latin typeface="Calibri"/>
+                <a:latin typeface="Arial"/>
               </a:rPr>
               <a:t>حلقة تغذية راجعة: تصحيحات البشر تُحسِّن موجِّهات الـ LLM</a:t>
             </a:r>
@@ -6143,7 +6143,7 @@
                 <a:solidFill>
                   <a:srgbClr val="666666"/>
                 </a:solidFill>
-                <a:latin typeface="Calibri"/>
+                <a:latin typeface="Arial"/>
               </a:rPr>
               <a:t>الـ LLM يسرّع التسمية والبشر يضمنون الجودة — أفضل الممارسات الحديثة.</a:t>
             </a:r>
@@ -6210,7 +6210,7 @@
                 <a:solidFill>
                   <a:srgbClr val="1F3B5C"/>
                 </a:solidFill>
-                <a:latin typeface="Calibri"/>
+                <a:latin typeface="Arial"/>
               </a:rPr>
               <a:t>المعمارية المتدرِّجة Medallion / Medallion Layers</a:t>
             </a:r>
@@ -6265,7 +6265,7 @@
                 <a:solidFill>
                   <a:srgbClr val="333333"/>
                 </a:solidFill>
-                <a:latin typeface="Calibri"/>
+                <a:latin typeface="Arial"/>
               </a:rPr>
               <a:t>Bronze — بيانات خام غير قابلة للتغيير</a:t>
             </a:r>
@@ -6332,7 +6332,7 @@
                 <a:solidFill>
                   <a:srgbClr val="333333"/>
                 </a:solidFill>
-                <a:latin typeface="Calibri"/>
+                <a:latin typeface="Arial"/>
               </a:rPr>
               <a:t>Silver — بيانات منقَّاة ومنظَّمة</a:t>
             </a:r>
@@ -6399,20 +6399,20 @@
                 <a:solidFill>
                   <a:srgbClr val="333333"/>
                 </a:solidFill>
+                <a:latin typeface="Arial"/>
+              </a:rPr>
+              <a:t>Gold — تجميعات جاهزة للتحليل</a:t>
+            </a:r>
+          </a:p>
+          <a:p>
+            <a:pPr algn="ctr" rtl="0"/>
+            <a:r>
+              <a:rPr sz="1300">
+                <a:solidFill>
+                  <a:srgbClr val="666666"/>
+                </a:solidFill>
                 <a:latin typeface="Calibri"/>
               </a:rPr>
-              <a:t>Gold — تجميعات جاهزة للتحليل</a:t>
-            </a:r>
-          </a:p>
-          <a:p>
-            <a:pPr algn="ctr" rtl="0"/>
-            <a:r>
-              <a:rPr sz="1300">
-                <a:solidFill>
-                  <a:srgbClr val="666666"/>
-                </a:solidFill>
-                <a:latin typeface="Calibri"/>
-              </a:rPr>
               <a:t>Analytics-ready aggregates</a:t>
             </a:r>
           </a:p>
@@ -6420,7 +6420,7 @@
       </p:sp>
       <p:sp>
         <p:nvSpPr>
-          <p:cNvPr id="6" name="Right Arrow 5"/>
+          <p:cNvPr id="6" name="Left Arrow 5"/>
           <p:cNvSpPr/>
           <p:nvPr/>
         </p:nvSpPr>
@@ -6429,7 +6429,7 @@
             <a:off x="5897880" y="2450592"/>
             <a:ext cx="365760" cy="274320"/>
           </a:xfrm>
-          <a:prstGeom prst="rightArrow">
+          <a:prstGeom prst="leftArrow">
             <a:avLst/>
           </a:prstGeom>
           <a:solidFill>
@@ -6464,7 +6464,7 @@
       </p:sp>
       <p:sp>
         <p:nvSpPr>
-          <p:cNvPr id="7" name="Right Arrow 6"/>
+          <p:cNvPr id="7" name="Left Arrow 6"/>
           <p:cNvSpPr/>
           <p:nvPr/>
         </p:nvSpPr>
@@ -6473,7 +6473,7 @@
             <a:off x="5897880" y="3959352"/>
             <a:ext cx="365760" cy="274320"/>
           </a:xfrm>
-          <a:prstGeom prst="rightArrow">
+          <a:prstGeom prst="leftArrow">
             <a:avLst/>
           </a:prstGeom>
           <a:solidFill>
@@ -6534,7 +6534,7 @@
                 <a:solidFill>
                   <a:srgbClr val="666666"/>
                 </a:solidFill>
-                <a:latin typeface="Calibri"/>
+                <a:latin typeface="Arial"/>
               </a:rPr>
               <a:t>الحوكمة عبر تحسين الجودة بين الطبقات — إدارة مركزية.</a:t>
             </a:r>
@@ -6601,7 +6601,7 @@
                 <a:solidFill>
                   <a:srgbClr val="1F3B5C"/>
                 </a:solidFill>
-                <a:latin typeface="Calibri"/>
+                <a:latin typeface="Arial"/>
               </a:rPr>
               <a:t>أنماط معالجة البيانات الثلاثة / Three Data Patterns</a:t>
             </a:r>
@@ -6656,7 +6656,7 @@
                 <a:solidFill>
                   <a:srgbClr val="333333"/>
                 </a:solidFill>
-                <a:latin typeface="Calibri"/>
+                <a:latin typeface="Arial"/>
               </a:rPr>
               <a:t>المعمارية المتدرِّجة</a:t>
             </a:r>
@@ -6723,7 +6723,7 @@
                 <a:solidFill>
                   <a:srgbClr val="333333"/>
                 </a:solidFill>
-                <a:latin typeface="Calibri"/>
+                <a:latin typeface="Arial"/>
               </a:rPr>
               <a:t>فريق مركزي — تحليلات وAI/ML/RAG</a:t>
             </a:r>
@@ -6778,7 +6778,7 @@
                 <a:solidFill>
                   <a:srgbClr val="333333"/>
                 </a:solidFill>
-                <a:latin typeface="Calibri"/>
+                <a:latin typeface="Arial"/>
               </a:rPr>
               <a:t>مستودع البيانات</a:t>
             </a:r>
@@ -6845,7 +6845,7 @@
                 <a:solidFill>
                   <a:srgbClr val="333333"/>
                 </a:solidFill>
-                <a:latin typeface="Calibri"/>
+                <a:latin typeface="Arial"/>
               </a:rPr>
               <a:t>فرق BI — تقارير وذكاء أعمال</a:t>
             </a:r>
@@ -6900,7 +6900,7 @@
                 <a:solidFill>
                   <a:srgbClr val="333333"/>
                 </a:solidFill>
-                <a:latin typeface="Calibri"/>
+                <a:latin typeface="Arial"/>
               </a:rPr>
               <a:t>شبكة البيانات</a:t>
             </a:r>
@@ -6967,7 +6967,7 @@
                 <a:solidFill>
                   <a:srgbClr val="333333"/>
                 </a:solidFill>
-                <a:latin typeface="Calibri"/>
+                <a:latin typeface="Arial"/>
               </a:rPr>
               <a:t>فرق المجالات — مؤسسات كبيرة</a:t>
             </a:r>
@@ -7002,7 +7002,7 @@
                 <a:solidFill>
                   <a:srgbClr val="666666"/>
                 </a:solidFill>
-                <a:latin typeface="Calibri"/>
+                <a:latin typeface="Arial"/>
               </a:rPr>
               <a:t>المعايير: الفكرة الجوهرية / المالك / الحوكمة / حالة الاستخدام المثلى.</a:t>
             </a:r>
@@ -7069,7 +7069,7 @@
                 <a:solidFill>
                   <a:srgbClr val="1F3B5C"/>
                 </a:solidFill>
-                <a:latin typeface="Calibri"/>
+                <a:latin typeface="Arial"/>
               </a:rPr>
               <a:t>منتج البيانات وعقد البيانات / Data Product &amp; Contract</a:t>
             </a:r>
@@ -7124,7 +7124,7 @@
                 <a:solidFill>
                   <a:srgbClr val="333333"/>
                 </a:solidFill>
-                <a:latin typeface="Calibri"/>
+                <a:latin typeface="Arial"/>
               </a:rPr>
               <a:t>منتج البيانات</a:t>
             </a:r>
@@ -7191,7 +7191,7 @@
                 <a:solidFill>
                   <a:srgbClr val="333333"/>
                 </a:solidFill>
-                <a:latin typeface="Calibri"/>
+                <a:latin typeface="Arial"/>
               </a:rPr>
               <a:t>عقد البيانات</a:t>
             </a:r>
@@ -7258,7 +7258,7 @@
                 <a:solidFill>
                   <a:srgbClr val="333333"/>
                 </a:solidFill>
-                <a:latin typeface="Calibri"/>
+                <a:latin typeface="Arial"/>
               </a:rPr>
               <a:t>المخطط / Schema</a:t>
             </a:r>
@@ -7313,7 +7313,7 @@
                 <a:solidFill>
                   <a:srgbClr val="333333"/>
                 </a:solidFill>
-                <a:latin typeface="Calibri"/>
+                <a:latin typeface="Arial"/>
               </a:rPr>
               <a:t>الأمان / Security</a:t>
             </a:r>
@@ -7368,7 +7368,7 @@
                 <a:solidFill>
                   <a:srgbClr val="333333"/>
                 </a:solidFill>
-                <a:latin typeface="Calibri"/>
+                <a:latin typeface="Arial"/>
               </a:rPr>
               <a:t>مستوى الخدمة / SLA</a:t>
             </a:r>
@@ -7377,7 +7377,7 @@
       </p:sp>
       <p:sp>
         <p:nvSpPr>
-          <p:cNvPr id="8" name="Right Arrow 7"/>
+          <p:cNvPr id="8" name="Left Arrow 7"/>
           <p:cNvSpPr/>
           <p:nvPr/>
         </p:nvSpPr>
@@ -7386,7 +7386,7 @@
             <a:off x="5257800" y="3017520"/>
             <a:ext cx="1737360" cy="365760"/>
           </a:xfrm>
-          <a:prstGeom prst="rightArrow">
+          <a:prstGeom prst="leftArrow">
             <a:avLst/>
           </a:prstGeom>
           <a:solidFill>
@@ -7447,7 +7447,7 @@
                 <a:solidFill>
                   <a:srgbClr val="666666"/>
                 </a:solidFill>
-                <a:latin typeface="Calibri"/>
+                <a:latin typeface="Arial"/>
               </a:rPr>
               <a:t>وحدة التسليم الحديثة في هندسة البيانات.</a:t>
             </a:r>
@@ -7514,7 +7514,7 @@
                 <a:solidFill>
                   <a:srgbClr val="1F3B5C"/>
                 </a:solidFill>
-                <a:latin typeface="Calibri"/>
+                <a:latin typeface="Arial"/>
               </a:rPr>
               <a:t>خط أنابيب RAG / RAG Pipeline</a:t>
             </a:r>
@@ -7569,20 +7569,20 @@
                 <a:solidFill>
                   <a:srgbClr val="333333"/>
                 </a:solidFill>
+                <a:latin typeface="Arial"/>
+              </a:rPr>
+              <a:t>1) الفهرسة</a:t>
+            </a:r>
+          </a:p>
+          <a:p>
+            <a:pPr algn="ctr" rtl="0"/>
+            <a:r>
+              <a:rPr sz="1200">
+                <a:solidFill>
+                  <a:srgbClr val="666666"/>
+                </a:solidFill>
                 <a:latin typeface="Calibri"/>
               </a:rPr>
-              <a:t>1) الفهرسة</a:t>
-            </a:r>
-          </a:p>
-          <a:p>
-            <a:pPr algn="ctr" rtl="0"/>
-            <a:r>
-              <a:rPr sz="1200">
-                <a:solidFill>
-                  <a:srgbClr val="666666"/>
-                </a:solidFill>
-                <a:latin typeface="Calibri"/>
-              </a:rPr>
               <a:t>Indexing</a:t>
             </a:r>
           </a:p>
@@ -7590,7 +7590,7 @@
       </p:sp>
       <p:sp>
         <p:nvSpPr>
-          <p:cNvPr id="4" name="Right Arrow 3"/>
+          <p:cNvPr id="4" name="Left Arrow 3"/>
           <p:cNvSpPr/>
           <p:nvPr/>
         </p:nvSpPr>
@@ -7599,7 +7599,7 @@
             <a:off x="2532888" y="2514600"/>
             <a:ext cx="219456" cy="274320"/>
           </a:xfrm>
-          <a:prstGeom prst="rightArrow">
+          <a:prstGeom prst="leftArrow">
             <a:avLst/>
           </a:prstGeom>
           <a:solidFill>
@@ -7680,20 +7680,20 @@
                 <a:solidFill>
                   <a:srgbClr val="333333"/>
                 </a:solidFill>
+                <a:latin typeface="Arial"/>
+              </a:rPr>
+              <a:t>2) الاسترجاع</a:t>
+            </a:r>
+          </a:p>
+          <a:p>
+            <a:pPr algn="ctr" rtl="0"/>
+            <a:r>
+              <a:rPr sz="1200">
+                <a:solidFill>
+                  <a:srgbClr val="666666"/>
+                </a:solidFill>
                 <a:latin typeface="Calibri"/>
               </a:rPr>
-              <a:t>2) الاسترجاع</a:t>
-            </a:r>
-          </a:p>
-          <a:p>
-            <a:pPr algn="ctr" rtl="0"/>
-            <a:r>
-              <a:rPr sz="1200">
-                <a:solidFill>
-                  <a:srgbClr val="666666"/>
-                </a:solidFill>
-                <a:latin typeface="Calibri"/>
-              </a:rPr>
               <a:t>Retrieval</a:t>
             </a:r>
           </a:p>
@@ -7701,7 +7701,7 @@
       </p:sp>
       <p:sp>
         <p:nvSpPr>
-          <p:cNvPr id="6" name="Right Arrow 5"/>
+          <p:cNvPr id="6" name="Left Arrow 5"/>
           <p:cNvSpPr/>
           <p:nvPr/>
         </p:nvSpPr>
@@ -7710,7 +7710,7 @@
             <a:off x="4754880" y="2514600"/>
             <a:ext cx="219456" cy="274320"/>
           </a:xfrm>
-          <a:prstGeom prst="rightArrow">
+          <a:prstGeom prst="leftArrow">
             <a:avLst/>
           </a:prstGeom>
           <a:solidFill>
@@ -7791,20 +7791,20 @@
                 <a:solidFill>
                   <a:srgbClr val="333333"/>
                 </a:solidFill>
+                <a:latin typeface="Arial"/>
+              </a:rPr>
+              <a:t>3) التوليد</a:t>
+            </a:r>
+          </a:p>
+          <a:p>
+            <a:pPr algn="ctr" rtl="0"/>
+            <a:r>
+              <a:rPr sz="1200">
+                <a:solidFill>
+                  <a:srgbClr val="666666"/>
+                </a:solidFill>
                 <a:latin typeface="Calibri"/>
               </a:rPr>
-              <a:t>3) التوليد</a:t>
-            </a:r>
-          </a:p>
-          <a:p>
-            <a:pPr algn="ctr" rtl="0"/>
-            <a:r>
-              <a:rPr sz="1200">
-                <a:solidFill>
-                  <a:srgbClr val="666666"/>
-                </a:solidFill>
-                <a:latin typeface="Calibri"/>
-              </a:rPr>
               <a:t>Generation</a:t>
             </a:r>
           </a:p>
@@ -7812,7 +7812,7 @@
       </p:sp>
       <p:sp>
         <p:nvSpPr>
-          <p:cNvPr id="8" name="Right Arrow 7"/>
+          <p:cNvPr id="8" name="Left Arrow 7"/>
           <p:cNvSpPr/>
           <p:nvPr/>
         </p:nvSpPr>
@@ -7821,7 +7821,7 @@
             <a:off x="6976872" y="2514600"/>
             <a:ext cx="219456" cy="274320"/>
           </a:xfrm>
-          <a:prstGeom prst="rightArrow">
+          <a:prstGeom prst="leftArrow">
             <a:avLst/>
           </a:prstGeom>
           <a:solidFill>
@@ -7902,20 +7902,20 @@
                 <a:solidFill>
                   <a:srgbClr val="333333"/>
                 </a:solidFill>
+                <a:latin typeface="Arial"/>
+              </a:rPr>
+              <a:t>4) التقييم</a:t>
+            </a:r>
+          </a:p>
+          <a:p>
+            <a:pPr algn="ctr" rtl="0"/>
+            <a:r>
+              <a:rPr sz="1200">
+                <a:solidFill>
+                  <a:srgbClr val="666666"/>
+                </a:solidFill>
                 <a:latin typeface="Calibri"/>
               </a:rPr>
-              <a:t>4) التقييم</a:t>
-            </a:r>
-          </a:p>
-          <a:p>
-            <a:pPr algn="ctr" rtl="0"/>
-            <a:r>
-              <a:rPr sz="1200">
-                <a:solidFill>
-                  <a:srgbClr val="666666"/>
-                </a:solidFill>
-                <a:latin typeface="Calibri"/>
-              </a:rPr>
               <a:t>Evaluation</a:t>
             </a:r>
           </a:p>
@@ -7923,7 +7923,7 @@
       </p:sp>
       <p:sp>
         <p:nvSpPr>
-          <p:cNvPr id="10" name="Right Arrow 9"/>
+          <p:cNvPr id="10" name="Left Arrow 9"/>
           <p:cNvSpPr/>
           <p:nvPr/>
         </p:nvSpPr>
@@ -7932,7 +7932,7 @@
             <a:off x="9198864" y="2514600"/>
             <a:ext cx="219456" cy="274320"/>
           </a:xfrm>
-          <a:prstGeom prst="rightArrow">
+          <a:prstGeom prst="leftArrow">
             <a:avLst/>
           </a:prstGeom>
           <a:solidFill>
@@ -8013,7 +8013,7 @@
                 <a:solidFill>
                   <a:srgbClr val="333333"/>
                 </a:solidFill>
-                <a:latin typeface="Calibri"/>
+                <a:latin typeface="Arial"/>
               </a:rPr>
               <a:t>5) التحسين</a:t>
             </a:r>
@@ -8080,7 +8080,7 @@
                 <a:solidFill>
                   <a:srgbClr val="333333"/>
                 </a:solidFill>
-                <a:latin typeface="Calibri"/>
+                <a:latin typeface="Arial"/>
               </a:rPr>
               <a:t>تقسيم تكراري + HNSW</a:t>
             </a:r>
@@ -8135,7 +8135,7 @@
                 <a:solidFill>
                   <a:srgbClr val="333333"/>
                 </a:solidFill>
-                <a:latin typeface="Calibri"/>
+                <a:latin typeface="Arial"/>
               </a:rPr>
               <a:t>بحث هجين + إعادة ترتيب</a:t>
             </a:r>
@@ -8190,7 +8190,7 @@
                 <a:solidFill>
                   <a:srgbClr val="333333"/>
                 </a:solidFill>
-                <a:latin typeface="Calibri"/>
+                <a:latin typeface="Arial"/>
               </a:rPr>
               <a:t>موجِّه مقيَّد بالمصادر</a:t>
             </a:r>
@@ -8245,7 +8245,7 @@
                 <a:solidFill>
                   <a:srgbClr val="333333"/>
                 </a:solidFill>
-                <a:latin typeface="Calibri"/>
+                <a:latin typeface="Arial"/>
               </a:rPr>
               <a:t>مثلث RAG (RAGAS)</a:t>
             </a:r>
@@ -8300,7 +8300,7 @@
                 <a:solidFill>
                   <a:srgbClr val="333333"/>
                 </a:solidFill>
-                <a:latin typeface="Calibri"/>
+                <a:latin typeface="Arial"/>
               </a:rPr>
               <a:t>تخزين مؤقت + توجيه</a:t>
             </a:r>
@@ -8335,7 +8335,7 @@
                 <a:solidFill>
                   <a:srgbClr val="666666"/>
                 </a:solidFill>
-                <a:latin typeface="Calibri"/>
+                <a:latin typeface="Arial"/>
               </a:rPr>
               <a:t>من الفهرسة إلى التقييم — المسار التطبيقي في مختبر L03.</a:t>
             </a:r>
@@ -8402,7 +8402,7 @@
                 <a:solidFill>
                   <a:srgbClr val="1F3B5C"/>
                 </a:solidFill>
-                <a:latin typeface="Calibri"/>
+                <a:latin typeface="Arial"/>
               </a:rPr>
               <a:t>استراتيجيات تقسيم النصوص / Chunking Strategies</a:t>
             </a:r>
@@ -8457,7 +8457,7 @@
                 <a:solidFill>
                   <a:srgbClr val="333333"/>
                 </a:solidFill>
-                <a:latin typeface="Calibri"/>
+                <a:latin typeface="Arial"/>
               </a:rPr>
               <a:t>ثابت الحجم</a:t>
             </a:r>
@@ -8524,7 +8524,7 @@
                 <a:solidFill>
                   <a:srgbClr val="333333"/>
                 </a:solidFill>
-                <a:latin typeface="Calibri"/>
+                <a:latin typeface="Arial"/>
               </a:rPr>
               <a:t>أبسطها — يقطع الجُمل</a:t>
             </a:r>
@@ -8579,7 +8579,7 @@
                 <a:solidFill>
                   <a:srgbClr val="333333"/>
                 </a:solidFill>
-                <a:latin typeface="Calibri"/>
+                <a:latin typeface="Arial"/>
               </a:rPr>
               <a:t>دلالي</a:t>
             </a:r>
@@ -8646,7 +8646,7 @@
                 <a:solidFill>
                   <a:srgbClr val="333333"/>
                 </a:solidFill>
-                <a:latin typeface="Calibri"/>
+                <a:latin typeface="Arial"/>
               </a:rPr>
               <a:t>تماسك أفضل — حساس للعتبة</a:t>
             </a:r>
@@ -8701,7 +8701,7 @@
                 <a:solidFill>
                   <a:srgbClr val="333333"/>
                 </a:solidFill>
-                <a:latin typeface="Calibri"/>
+                <a:latin typeface="Arial"/>
               </a:rPr>
               <a:t>تكراري ★</a:t>
             </a:r>
@@ -8768,7 +8768,7 @@
                 <a:solidFill>
                   <a:srgbClr val="333333"/>
                 </a:solidFill>
-                <a:latin typeface="Calibri"/>
+                <a:latin typeface="Arial"/>
               </a:rPr>
               <a:t>الموصى به افتراضيًا</a:t>
             </a:r>
@@ -8823,7 +8823,7 @@
                 <a:solidFill>
                   <a:srgbClr val="333333"/>
                 </a:solidFill>
-                <a:latin typeface="Calibri"/>
+                <a:latin typeface="Arial"/>
               </a:rPr>
               <a:t>بحسب البنية</a:t>
             </a:r>
@@ -8890,7 +8890,7 @@
                 <a:solidFill>
                   <a:srgbClr val="333333"/>
                 </a:solidFill>
-                <a:latin typeface="Calibri"/>
+                <a:latin typeface="Arial"/>
               </a:rPr>
               <a:t>عناوين وأقسام — يُدمج مع التكراري</a:t>
             </a:r>
@@ -8945,7 +8945,7 @@
                 <a:solidFill>
                   <a:srgbClr val="333333"/>
                 </a:solidFill>
-                <a:latin typeface="Calibri"/>
+                <a:latin typeface="Arial"/>
               </a:rPr>
               <a:t>بالنموذج اللغوي</a:t>
             </a:r>
@@ -9012,7 +9012,7 @@
                 <a:solidFill>
                   <a:srgbClr val="333333"/>
                 </a:solidFill>
-                <a:latin typeface="Calibri"/>
+                <a:latin typeface="Arial"/>
               </a:rPr>
               <a:t>الأدق — الأغلى حسابيًا</a:t>
             </a:r>
@@ -9047,7 +9047,7 @@
                 <a:solidFill>
                   <a:srgbClr val="666666"/>
                 </a:solidFill>
-                <a:latin typeface="Calibri"/>
+                <a:latin typeface="Arial"/>
               </a:rPr>
               <a:t>★ التقسيم التكراري: فصل بالفقرات ثم تقسيم ما تجاوز الحد الأقصى.</a:t>
             </a:r>
@@ -9114,7 +9114,7 @@
                 <a:solidFill>
                   <a:srgbClr val="1F3B5C"/>
                 </a:solidFill>
-                <a:latin typeface="Calibri"/>
+                <a:latin typeface="Arial"/>
               </a:rPr>
               <a:t>مثلث تقييم RAG / RAG Evaluation Triad</a:t>
             </a:r>
@@ -9215,7 +9215,7 @@
                 <a:solidFill>
                   <a:srgbClr val="333333"/>
                 </a:solidFill>
-                <a:latin typeface="Calibri"/>
+                <a:latin typeface="Arial"/>
               </a:rPr>
               <a:t>الوفاء بالمصدر</a:t>
             </a:r>
@@ -9282,7 +9282,7 @@
                 <a:solidFill>
                   <a:srgbClr val="333333"/>
                 </a:solidFill>
-                <a:latin typeface="Calibri"/>
+                <a:latin typeface="Arial"/>
               </a:rPr>
               <a:t>ملاءمة الإجابة</a:t>
             </a:r>
@@ -9349,7 +9349,7 @@
                 <a:solidFill>
                   <a:srgbClr val="333333"/>
                 </a:solidFill>
-                <a:latin typeface="Calibri"/>
+                <a:latin typeface="Arial"/>
               </a:rPr>
               <a:t>دقة السياق</a:t>
             </a:r>
@@ -9396,7 +9396,7 @@
                 <a:solidFill>
                   <a:srgbClr val="666666"/>
                 </a:solidFill>
-                <a:latin typeface="Calibri"/>
+                <a:latin typeface="Arial"/>
               </a:rPr>
               <a:t>يُقاس بإطار RAGAS — الوفاء يمنع الهلوسة والملاءمة تجعل الإجابة نافعة.</a:t>
             </a:r>
@@ -9463,7 +9463,7 @@
                 <a:solidFill>
                   <a:srgbClr val="1F3B5C"/>
                 </a:solidFill>
-                <a:latin typeface="Calibri"/>
+                <a:latin typeface="Arial"/>
               </a:rPr>
               <a:t>المعمارية المرجعية للذكاء التوليدي / GenAI Reference Architecture</a:t>
             </a:r>
@@ -9518,7 +9518,7 @@
                 <a:solidFill>
                   <a:srgbClr val="333333"/>
                 </a:solidFill>
-                <a:latin typeface="Calibri"/>
+                <a:latin typeface="Arial"/>
               </a:rPr>
               <a:t>أ. بوابة منصة GenAI</a:t>
             </a:r>
@@ -9585,7 +9585,7 @@
                 <a:solidFill>
                   <a:srgbClr val="333333"/>
                 </a:solidFill>
-                <a:latin typeface="Calibri"/>
+                <a:latin typeface="Arial"/>
               </a:rPr>
               <a:t>ب. الأتمتة والامتثال</a:t>
             </a:r>
@@ -9652,7 +9652,7 @@
                 <a:solidFill>
                   <a:srgbClr val="333333"/>
                 </a:solidFill>
-                <a:latin typeface="Calibri"/>
+                <a:latin typeface="Arial"/>
               </a:rPr>
               <a:t>ج. الخدمات المشتركة</a:t>
             </a:r>
@@ -9719,7 +9719,7 @@
                 <a:solidFill>
                   <a:srgbClr val="333333"/>
                 </a:solidFill>
-                <a:latin typeface="Calibri"/>
+                <a:latin typeface="Arial"/>
               </a:rPr>
               <a:t>د. الحوكمة والمراقبة</a:t>
             </a:r>
@@ -9766,7 +9766,7 @@
                 <a:solidFill>
                   <a:srgbClr val="666666"/>
                 </a:solidFill>
-                <a:latin typeface="Calibri"/>
+                <a:latin typeface="Arial"/>
               </a:rPr>
               <a:t>النمط المرجعي المؤسسي (McKinsey) — نافذة موحدة فوق خدمات مشتركة محكومة.</a:t>
             </a:r>
@@ -9833,7 +9833,7 @@
                 <a:solidFill>
                   <a:srgbClr val="1F3B5C"/>
                 </a:solidFill>
-                <a:latin typeface="Calibri"/>
+                <a:latin typeface="Arial"/>
               </a:rPr>
               <a:t>التكلفة عمليًا: التضمين مقابل التوليد / Cost: Embedding vs Generation</a:t>
             </a:r>
@@ -9888,7 +9888,7 @@
                 <a:solidFill>
                   <a:srgbClr val="333333"/>
                 </a:solidFill>
-                <a:latin typeface="Calibri"/>
+                <a:latin typeface="Arial"/>
               </a:rPr>
               <a:t>التضمين 1x</a:t>
             </a:r>
@@ -9955,7 +9955,7 @@
                 <a:solidFill>
                   <a:srgbClr val="333333"/>
                 </a:solidFill>
-                <a:latin typeface="Calibri"/>
+                <a:latin typeface="Arial"/>
               </a:rPr>
               <a:t>التوليد ~10x</a:t>
             </a:r>
@@ -10022,7 +10022,7 @@
                 <a:solidFill>
                   <a:srgbClr val="333333"/>
                 </a:solidFill>
-                <a:latin typeface="Calibri"/>
+                <a:latin typeface="Arial"/>
               </a:rPr>
               <a:t>الحل: تخزين مؤقت + توجيه</a:t>
             </a:r>
@@ -10069,7 +10069,7 @@
                 <a:solidFill>
                   <a:srgbClr val="666666"/>
                 </a:solidFill>
-                <a:latin typeface="Calibri"/>
+                <a:latin typeface="Arial"/>
               </a:rPr>
               <a:t>قاعدة FinOps: قِس التكلفة لكل طلب قبل التوسع.</a:t>
             </a:r>

--- a/output/Module02_Visualizations.pptx
+++ b/output/Module02_Visualizations.pptx
@@ -3136,6 +3136,8 @@
                   <a:srgbClr val="1F3B5C"/>
                 </a:solidFill>
                 <a:latin typeface="Arial"/>
+                <a:cs typeface="Arial"/>
+                <a:ea typeface="Calibri"/>
               </a:rPr>
               <a:t>خريطة المسار / Track Roadmap</a:t>
             </a:r>
@@ -3191,6 +3193,8 @@
                   <a:srgbClr val="333333"/>
                 </a:solidFill>
                 <a:latin typeface="Arial"/>
+                <a:cs typeface="Arial"/>
+                <a:ea typeface="Calibri"/>
               </a:rPr>
               <a:t>البيانات</a:t>
             </a:r>
@@ -3203,6 +3207,8 @@
                   <a:srgbClr val="666666"/>
                 </a:solidFill>
                 <a:latin typeface="Calibri"/>
+                <a:cs typeface="Arial"/>
+                <a:ea typeface="Calibri"/>
               </a:rPr>
               <a:t>Data</a:t>
             </a:r>
@@ -3302,6 +3308,8 @@
                   <a:srgbClr val="333333"/>
                 </a:solidFill>
                 <a:latin typeface="Arial"/>
+                <a:cs typeface="Arial"/>
+                <a:ea typeface="Calibri"/>
               </a:rPr>
               <a:t>التخزين</a:t>
             </a:r>
@@ -3314,6 +3322,8 @@
                   <a:srgbClr val="666666"/>
                 </a:solidFill>
                 <a:latin typeface="Calibri"/>
+                <a:cs typeface="Arial"/>
+                <a:ea typeface="Calibri"/>
               </a:rPr>
               <a:t>Storage</a:t>
             </a:r>
@@ -3413,6 +3423,8 @@
                   <a:srgbClr val="333333"/>
                 </a:solidFill>
                 <a:latin typeface="Arial"/>
+                <a:cs typeface="Arial"/>
+                <a:ea typeface="Calibri"/>
               </a:rPr>
               <a:t>الخصائص</a:t>
             </a:r>
@@ -3425,6 +3437,8 @@
                   <a:srgbClr val="666666"/>
                 </a:solidFill>
                 <a:latin typeface="Calibri"/>
+                <a:cs typeface="Arial"/>
+                <a:ea typeface="Calibri"/>
               </a:rPr>
               <a:t>Features</a:t>
             </a:r>
@@ -3524,6 +3538,8 @@
                   <a:srgbClr val="333333"/>
                 </a:solidFill>
                 <a:latin typeface="Arial"/>
+                <a:cs typeface="Arial"/>
+                <a:ea typeface="Calibri"/>
               </a:rPr>
               <a:t>الفهارس المتجهية</a:t>
             </a:r>
@@ -3536,6 +3552,8 @@
                   <a:srgbClr val="666666"/>
                 </a:solidFill>
                 <a:latin typeface="Calibri"/>
+                <a:cs typeface="Arial"/>
+                <a:ea typeface="Calibri"/>
               </a:rPr>
               <a:t>Vector Indexes</a:t>
             </a:r>
@@ -3635,6 +3653,8 @@
                   <a:srgbClr val="333333"/>
                 </a:solidFill>
                 <a:latin typeface="Arial"/>
+                <a:cs typeface="Arial"/>
+                <a:ea typeface="Calibri"/>
               </a:rPr>
               <a:t>التصنيف</a:t>
             </a:r>
@@ -3647,6 +3667,8 @@
                   <a:srgbClr val="666666"/>
                 </a:solidFill>
                 <a:latin typeface="Calibri"/>
+                <a:cs typeface="Arial"/>
+                <a:ea typeface="Calibri"/>
               </a:rPr>
               <a:t>Labeling</a:t>
             </a:r>
@@ -3746,6 +3768,8 @@
                   <a:srgbClr val="333333"/>
                 </a:solidFill>
                 <a:latin typeface="Arial"/>
+                <a:cs typeface="Arial"/>
+                <a:ea typeface="Calibri"/>
               </a:rPr>
               <a:t>الحوكمة</a:t>
             </a:r>
@@ -3758,6 +3782,8 @@
                   <a:srgbClr val="666666"/>
                 </a:solidFill>
                 <a:latin typeface="Calibri"/>
+                <a:cs typeface="Arial"/>
+                <a:ea typeface="Calibri"/>
               </a:rPr>
               <a:t>Governance</a:t>
             </a:r>
@@ -3850,13 +3876,15 @@
           <a:bodyPr rtlCol="0" anchor="ctr" wrap="square"/>
           <a:lstStyle/>
           <a:p>
-            <a:pPr algn="ctr" rtl="1"/>
+            <a:pPr algn="ctr" rtl="0"/>
             <a:r>
               <a:rPr sz="1400" b="1">
                 <a:solidFill>
                   <a:srgbClr val="333333"/>
                 </a:solidFill>
-                <a:latin typeface="Arial"/>
+                <a:latin typeface="Calibri"/>
+                <a:cs typeface="Arial"/>
+                <a:ea typeface="Calibri"/>
               </a:rPr>
               <a:t>MLOps</a:t>
             </a:r>
@@ -3869,6 +3897,8 @@
                   <a:srgbClr val="666666"/>
                 </a:solidFill>
                 <a:latin typeface="Calibri"/>
+                <a:cs typeface="Arial"/>
+                <a:ea typeface="Calibri"/>
               </a:rPr>
               <a:t>MLOps</a:t>
             </a:r>
@@ -3968,6 +3998,8 @@
                   <a:srgbClr val="333333"/>
                 </a:solidFill>
                 <a:latin typeface="Arial"/>
+                <a:cs typeface="Arial"/>
+                <a:ea typeface="Calibri"/>
               </a:rPr>
               <a:t>المختبر</a:t>
             </a:r>
@@ -3980,6 +4012,8 @@
                   <a:srgbClr val="666666"/>
                 </a:solidFill>
                 <a:latin typeface="Calibri"/>
+                <a:cs typeface="Arial"/>
+                <a:ea typeface="Calibri"/>
               </a:rPr>
               <a:t>Lab</a:t>
             </a:r>
@@ -4015,6 +4049,8 @@
                   <a:srgbClr val="666666"/>
                 </a:solidFill>
                 <a:latin typeface="Arial"/>
+                <a:cs typeface="Arial"/>
+                <a:ea typeface="Calibri"/>
               </a:rPr>
               <a:t>رحلة الوحدة الثانية من البيانات الخام إلى نقطة نهاية RAG.</a:t>
             </a:r>
@@ -4022,6 +4058,11 @@
           <a:p>
             <a:pPr algn="r" rtl="0"/>
             <a:r>
+              <a:rPr>
+                <a:latin typeface="Calibri"/>
+                <a:cs typeface="Arial"/>
+                <a:ea typeface="Calibri"/>
+              </a:rPr>
               <a:t>Module 02 journey: from raw data to a RAG endpoint.</a:t>
             </a:r>
           </a:p>
@@ -4082,6 +4123,8 @@
                   <a:srgbClr val="1F3B5C"/>
                 </a:solidFill>
                 <a:latin typeface="Arial"/>
+                <a:cs typeface="Arial"/>
+                <a:ea typeface="Calibri"/>
               </a:rPr>
               <a:t>من LLM إلى الأنظمة الوكيلة / From LLM to Agentic AI</a:t>
             </a:r>
@@ -4130,13 +4173,15 @@
           <a:bodyPr rtlCol="0" anchor="ctr" wrap="square"/>
           <a:lstStyle/>
           <a:p>
-            <a:pPr algn="ctr" rtl="1"/>
+            <a:pPr algn="ctr" rtl="0"/>
             <a:r>
               <a:rPr sz="1800" b="1">
                 <a:solidFill>
                   <a:srgbClr val="333333"/>
                 </a:solidFill>
-                <a:latin typeface="Arial"/>
+                <a:latin typeface="Calibri"/>
+                <a:cs typeface="Arial"/>
+                <a:ea typeface="Calibri"/>
               </a:rPr>
               <a:t>LLM</a:t>
             </a:r>
@@ -4192,6 +4237,8 @@
                   <a:srgbClr val="333333"/>
                 </a:solidFill>
                 <a:latin typeface="Arial"/>
+                <a:cs typeface="Arial"/>
+                <a:ea typeface="Calibri"/>
               </a:rPr>
               <a:t>تنبؤ بالرموز التالية</a:t>
             </a:r>
@@ -4204,6 +4251,8 @@
                   <a:srgbClr val="666666"/>
                 </a:solidFill>
                 <a:latin typeface="Calibri"/>
+                <a:cs typeface="Arial"/>
+                <a:ea typeface="Calibri"/>
               </a:rPr>
               <a:t>Predicts next tokens</a:t>
             </a:r>
@@ -4303,6 +4352,8 @@
                   <a:srgbClr val="333333"/>
                 </a:solidFill>
                 <a:latin typeface="Arial"/>
+                <a:cs typeface="Arial"/>
+                <a:ea typeface="Calibri"/>
               </a:rPr>
               <a:t>الذكاء التوليدي</a:t>
             </a:r>
@@ -4358,6 +4409,8 @@
                   <a:srgbClr val="333333"/>
                 </a:solidFill>
                 <a:latin typeface="Arial"/>
+                <a:cs typeface="Arial"/>
+                <a:ea typeface="Calibri"/>
               </a:rPr>
               <a:t>يولّد محتوى جديدًا</a:t>
             </a:r>
@@ -4370,6 +4423,8 @@
                   <a:srgbClr val="666666"/>
                 </a:solidFill>
                 <a:latin typeface="Calibri"/>
+                <a:cs typeface="Arial"/>
+                <a:ea typeface="Calibri"/>
               </a:rPr>
               <a:t>Generates new content</a:t>
             </a:r>
@@ -4469,6 +4524,8 @@
                   <a:srgbClr val="333333"/>
                 </a:solidFill>
                 <a:latin typeface="Arial"/>
+                <a:cs typeface="Arial"/>
+                <a:ea typeface="Calibri"/>
               </a:rPr>
               <a:t>الوكلاء Agents</a:t>
             </a:r>
@@ -4524,6 +4581,8 @@
                   <a:srgbClr val="333333"/>
                 </a:solidFill>
                 <a:latin typeface="Arial"/>
+                <a:cs typeface="Arial"/>
+                <a:ea typeface="Calibri"/>
               </a:rPr>
               <a:t>نية + استدعاء أدوات</a:t>
             </a:r>
@@ -4536,6 +4595,8 @@
                   <a:srgbClr val="666666"/>
                 </a:solidFill>
                 <a:latin typeface="Calibri"/>
+                <a:cs typeface="Arial"/>
+                <a:ea typeface="Calibri"/>
               </a:rPr>
               <a:t>Intent + tool calls</a:t>
             </a:r>
@@ -4635,6 +4696,8 @@
                   <a:srgbClr val="333333"/>
                 </a:solidFill>
                 <a:latin typeface="Arial"/>
+                <a:cs typeface="Arial"/>
+                <a:ea typeface="Calibri"/>
               </a:rPr>
               <a:t>الأنظمة الوكيلة</a:t>
             </a:r>
@@ -4690,6 +4753,8 @@
                   <a:srgbClr val="333333"/>
                 </a:solidFill>
                 <a:latin typeface="Arial"/>
+                <a:cs typeface="Arial"/>
+                <a:ea typeface="Calibri"/>
               </a:rPr>
               <a:t>تخطيط وتنفيذ متعدد الخطوات</a:t>
             </a:r>
@@ -4702,6 +4767,8 @@
                   <a:srgbClr val="666666"/>
                 </a:solidFill>
                 <a:latin typeface="Calibri"/>
+                <a:cs typeface="Arial"/>
+                <a:ea typeface="Calibri"/>
               </a:rPr>
               <a:t>Multi-step planning</a:t>
             </a:r>
@@ -4737,6 +4804,8 @@
                   <a:srgbClr val="666666"/>
                 </a:solidFill>
                 <a:latin typeface="Arial"/>
+                <a:cs typeface="Arial"/>
+                <a:ea typeface="Calibri"/>
               </a:rPr>
               <a:t>Agentic RAG = بحث متجهي + جلب عبر الواجهات بذاكرة متجددة وتحقق قبل التسليم.</a:t>
             </a:r>
@@ -4744,6 +4813,11 @@
           <a:p>
             <a:pPr algn="r" rtl="0"/>
             <a:r>
+              <a:rPr>
+                <a:latin typeface="Calibri"/>
+                <a:cs typeface="Arial"/>
+                <a:ea typeface="Calibri"/>
+              </a:rPr>
               <a:t>Agentic RAG = vector search + API fetching with refreshed memory and verification.</a:t>
             </a:r>
           </a:p>
@@ -4804,6 +4878,8 @@
                   <a:srgbClr val="1F3B5C"/>
                 </a:solidFill>
                 <a:latin typeface="Arial"/>
+                <a:cs typeface="Arial"/>
+                <a:ea typeface="Calibri"/>
               </a:rPr>
               <a:t>معمارية مخزن الخصائص / Feature Store Architecture</a:t>
             </a:r>
@@ -4859,6 +4935,8 @@
                   <a:srgbClr val="333333"/>
                 </a:solidFill>
                 <a:latin typeface="Arial"/>
+                <a:cs typeface="Arial"/>
+                <a:ea typeface="Calibri"/>
               </a:rPr>
               <a:t>مصادر البيانات</a:t>
             </a:r>
@@ -4871,6 +4949,8 @@
                   <a:srgbClr val="666666"/>
                 </a:solidFill>
                 <a:latin typeface="Calibri"/>
+                <a:cs typeface="Arial"/>
+                <a:ea typeface="Calibri"/>
               </a:rPr>
               <a:t>Data Sources</a:t>
             </a:r>
@@ -4970,18 +5050,22 @@
                   <a:srgbClr val="333333"/>
                 </a:solidFill>
                 <a:latin typeface="Arial"/>
+                <a:cs typeface="Arial"/>
+                <a:ea typeface="Calibri"/>
               </a:rPr>
               <a:t>خط الخصائص</a:t>
             </a:r>
           </a:p>
           <a:p>
-            <a:pPr algn="ctr" rtl="0"/>
+            <a:pPr algn="ctr" rtl="1"/>
             <a:r>
               <a:rPr sz="1100">
                 <a:solidFill>
                   <a:srgbClr val="666666"/>
                 </a:solidFill>
-                <a:latin typeface="Calibri"/>
+                <a:latin typeface="Arial"/>
+                <a:cs typeface="Arial"/>
+                <a:ea typeface="Calibri"/>
               </a:rPr>
               <a:t>Feature Pipeline
 هندسة + تحويل</a:t>
@@ -5126,18 +5210,22 @@
                   <a:srgbClr val="333333"/>
                 </a:solidFill>
                 <a:latin typeface="Arial"/>
+                <a:cs typeface="Arial"/>
+                <a:ea typeface="Calibri"/>
               </a:rPr>
               <a:t>المخزن غير المتصل</a:t>
             </a:r>
           </a:p>
           <a:p>
-            <a:pPr algn="ctr" rtl="0"/>
+            <a:pPr algn="ctr" rtl="1"/>
             <a:r>
               <a:rPr sz="1100">
                 <a:solidFill>
                   <a:srgbClr val="666666"/>
                 </a:solidFill>
-                <a:latin typeface="Calibri"/>
+                <a:latin typeface="Arial"/>
+                <a:cs typeface="Arial"/>
+                <a:ea typeface="Calibri"/>
               </a:rPr>
               <a:t>Offline Store
 تدريب النماذج</a:t>
@@ -5194,18 +5282,22 @@
                   <a:srgbClr val="333333"/>
                 </a:solidFill>
                 <a:latin typeface="Arial"/>
+                <a:cs typeface="Arial"/>
+                <a:ea typeface="Calibri"/>
               </a:rPr>
               <a:t>المخزن المتصل</a:t>
             </a:r>
           </a:p>
           <a:p>
-            <a:pPr algn="ctr" rtl="0"/>
+            <a:pPr algn="ctr" rtl="1"/>
             <a:r>
               <a:rPr sz="1100">
                 <a:solidFill>
                   <a:srgbClr val="666666"/>
                 </a:solidFill>
-                <a:latin typeface="Calibri"/>
+                <a:latin typeface="Arial"/>
+                <a:cs typeface="Arial"/>
+                <a:ea typeface="Calibri"/>
               </a:rPr>
               <a:t>Online Store
 استدلال منخفض زمن الاستجابة</a:t>
@@ -5262,6 +5354,8 @@
                   <a:srgbClr val="333333"/>
                 </a:solidFill>
                 <a:latin typeface="Arial"/>
+                <a:cs typeface="Arial"/>
+                <a:ea typeface="Calibri"/>
               </a:rPr>
               <a:t>التدريب</a:t>
             </a:r>
@@ -5274,6 +5368,8 @@
                   <a:srgbClr val="666666"/>
                 </a:solidFill>
                 <a:latin typeface="Calibri"/>
+                <a:cs typeface="Arial"/>
+                <a:ea typeface="Calibri"/>
               </a:rPr>
               <a:t>Training</a:t>
             </a:r>
@@ -5329,6 +5425,8 @@
                   <a:srgbClr val="333333"/>
                 </a:solidFill>
                 <a:latin typeface="Arial"/>
+                <a:cs typeface="Arial"/>
+                <a:ea typeface="Calibri"/>
               </a:rPr>
               <a:t>الاستدلال</a:t>
             </a:r>
@@ -5341,6 +5439,8 @@
                   <a:srgbClr val="666666"/>
                 </a:solidFill>
                 <a:latin typeface="Calibri"/>
+                <a:cs typeface="Arial"/>
+                <a:ea typeface="Calibri"/>
               </a:rPr>
               <a:t>Serving</a:t>
             </a:r>
@@ -5464,6 +5564,8 @@
                   <a:srgbClr val="666666"/>
                 </a:solidFill>
                 <a:latin typeface="Arial"/>
+                <a:cs typeface="Arial"/>
+                <a:ea typeface="Calibri"/>
               </a:rPr>
               <a:t>قيمة مخزن الخصائص: نفس تعريف الخصائص للتدريب والاستدلال — لا انحراف.</a:t>
             </a:r>
@@ -5471,6 +5573,11 @@
           <a:p>
             <a:pPr algn="r" rtl="0"/>
             <a:r>
+              <a:rPr>
+                <a:latin typeface="Calibri"/>
+                <a:cs typeface="Arial"/>
+                <a:ea typeface="Calibri"/>
+              </a:rPr>
               <a:t>Core value: one feature definition for training and serving — no skew.</a:t>
             </a:r>
           </a:p>
@@ -5531,6 +5638,8 @@
                   <a:srgbClr val="1F3B5C"/>
                 </a:solidFill>
                 <a:latin typeface="Arial"/>
+                <a:cs typeface="Arial"/>
+                <a:ea typeface="Calibri"/>
               </a:rPr>
               <a:t>سير عمل التصنيف بمساعدة LLM / LLM-assisted Labeling Workflow</a:t>
             </a:r>
@@ -5586,6 +5695,8 @@
                   <a:srgbClr val="333333"/>
                 </a:solidFill>
                 <a:latin typeface="Arial"/>
+                <a:cs typeface="Arial"/>
+                <a:ea typeface="Calibri"/>
               </a:rPr>
               <a:t>بيانات خام</a:t>
             </a:r>
@@ -5598,6 +5709,8 @@
                   <a:srgbClr val="666666"/>
                 </a:solidFill>
                 <a:latin typeface="Calibri"/>
+                <a:cs typeface="Arial"/>
+                <a:ea typeface="Calibri"/>
               </a:rPr>
               <a:t>Raw data</a:t>
             </a:r>
@@ -5697,6 +5810,8 @@
                   <a:srgbClr val="333333"/>
                 </a:solidFill>
                 <a:latin typeface="Arial"/>
+                <a:cs typeface="Arial"/>
+                <a:ea typeface="Calibri"/>
               </a:rPr>
               <a:t>تسمية مبدئية بالـ LLM</a:t>
             </a:r>
@@ -5709,6 +5824,8 @@
                   <a:srgbClr val="666666"/>
                 </a:solidFill>
                 <a:latin typeface="Calibri"/>
+                <a:cs typeface="Arial"/>
+                <a:ea typeface="Calibri"/>
               </a:rPr>
               <a:t>LLM pre-labeling</a:t>
             </a:r>
@@ -5808,6 +5925,8 @@
                   <a:srgbClr val="333333"/>
                 </a:solidFill>
                 <a:latin typeface="Arial"/>
+                <a:cs typeface="Arial"/>
+                <a:ea typeface="Calibri"/>
               </a:rPr>
               <a:t>مراجعة وتصحيح بشري</a:t>
             </a:r>
@@ -5820,6 +5939,8 @@
                   <a:srgbClr val="666666"/>
                 </a:solidFill>
                 <a:latin typeface="Calibri"/>
+                <a:cs typeface="Arial"/>
+                <a:ea typeface="Calibri"/>
               </a:rPr>
               <a:t>Human review (HITL)</a:t>
             </a:r>
@@ -5919,6 +6040,8 @@
                   <a:srgbClr val="333333"/>
                 </a:solidFill>
                 <a:latin typeface="Arial"/>
+                <a:cs typeface="Arial"/>
+                <a:ea typeface="Calibri"/>
               </a:rPr>
               <a:t>تسميات معتمدة</a:t>
             </a:r>
@@ -5931,6 +6054,8 @@
                   <a:srgbClr val="666666"/>
                 </a:solidFill>
                 <a:latin typeface="Calibri"/>
+                <a:cs typeface="Arial"/>
+                <a:ea typeface="Calibri"/>
               </a:rPr>
               <a:t>Approved labels</a:t>
             </a:r>
@@ -6030,6 +6155,8 @@
                   <a:srgbClr val="333333"/>
                 </a:solidFill>
                 <a:latin typeface="Arial"/>
+                <a:cs typeface="Arial"/>
+                <a:ea typeface="Calibri"/>
               </a:rPr>
               <a:t>تدريب النموذج</a:t>
             </a:r>
@@ -6042,6 +6169,8 @@
                   <a:srgbClr val="666666"/>
                 </a:solidFill>
                 <a:latin typeface="Calibri"/>
+                <a:cs typeface="Arial"/>
+                <a:ea typeface="Calibri"/>
               </a:rPr>
               <a:t>Model training</a:t>
             </a:r>
@@ -6097,6 +6226,8 @@
                   <a:srgbClr val="333333"/>
                 </a:solidFill>
                 <a:latin typeface="Arial"/>
+                <a:cs typeface="Arial"/>
+                <a:ea typeface="Calibri"/>
               </a:rPr>
               <a:t>حلقة تغذية راجعة: تصحيحات البشر تُحسِّن موجِّهات الـ LLM</a:t>
             </a:r>
@@ -6109,6 +6240,8 @@
                   <a:srgbClr val="666666"/>
                 </a:solidFill>
                 <a:latin typeface="Calibri"/>
+                <a:cs typeface="Arial"/>
+                <a:ea typeface="Calibri"/>
               </a:rPr>
               <a:t>Feedback loop: human corrections improve LLM prompts</a:t>
             </a:r>
@@ -6144,6 +6277,8 @@
                   <a:srgbClr val="666666"/>
                 </a:solidFill>
                 <a:latin typeface="Arial"/>
+                <a:cs typeface="Arial"/>
+                <a:ea typeface="Calibri"/>
               </a:rPr>
               <a:t>الـ LLM يسرّع التسمية والبشر يضمنون الجودة — أفضل الممارسات الحديثة.</a:t>
             </a:r>
@@ -6151,6 +6286,11 @@
           <a:p>
             <a:pPr algn="r" rtl="0"/>
             <a:r>
+              <a:rPr>
+                <a:latin typeface="Calibri"/>
+                <a:cs typeface="Arial"/>
+                <a:ea typeface="Calibri"/>
+              </a:rPr>
               <a:t>LLM accelerates labeling; humans guarantee quality — modern best practice.</a:t>
             </a:r>
           </a:p>
@@ -6211,6 +6351,8 @@
                   <a:srgbClr val="1F3B5C"/>
                 </a:solidFill>
                 <a:latin typeface="Arial"/>
+                <a:cs typeface="Arial"/>
+                <a:ea typeface="Calibri"/>
               </a:rPr>
               <a:t>المعمارية المتدرِّجة Medallion / Medallion Layers</a:t>
             </a:r>
@@ -6266,6 +6408,8 @@
                   <a:srgbClr val="333333"/>
                 </a:solidFill>
                 <a:latin typeface="Arial"/>
+                <a:cs typeface="Arial"/>
+                <a:ea typeface="Calibri"/>
               </a:rPr>
               <a:t>Bronze — بيانات خام غير قابلة للتغيير</a:t>
             </a:r>
@@ -6278,6 +6422,8 @@
                   <a:srgbClr val="666666"/>
                 </a:solidFill>
                 <a:latin typeface="Calibri"/>
+                <a:cs typeface="Arial"/>
+                <a:ea typeface="Calibri"/>
               </a:rPr>
               <a:t>Raw immutable data</a:t>
             </a:r>
@@ -6333,6 +6479,8 @@
                   <a:srgbClr val="333333"/>
                 </a:solidFill>
                 <a:latin typeface="Arial"/>
+                <a:cs typeface="Arial"/>
+                <a:ea typeface="Calibri"/>
               </a:rPr>
               <a:t>Silver — بيانات منقَّاة ومنظَّمة</a:t>
             </a:r>
@@ -6345,6 +6493,8 @@
                   <a:srgbClr val="666666"/>
                 </a:solidFill>
                 <a:latin typeface="Calibri"/>
+                <a:cs typeface="Arial"/>
+                <a:ea typeface="Calibri"/>
               </a:rPr>
               <a:t>Cleansed &amp; structured data</a:t>
             </a:r>
@@ -6400,6 +6550,8 @@
                   <a:srgbClr val="333333"/>
                 </a:solidFill>
                 <a:latin typeface="Arial"/>
+                <a:cs typeface="Arial"/>
+                <a:ea typeface="Calibri"/>
               </a:rPr>
               <a:t>Gold — تجميعات جاهزة للتحليل</a:t>
             </a:r>
@@ -6412,6 +6564,8 @@
                   <a:srgbClr val="666666"/>
                 </a:solidFill>
                 <a:latin typeface="Calibri"/>
+                <a:cs typeface="Arial"/>
+                <a:ea typeface="Calibri"/>
               </a:rPr>
               <a:t>Analytics-ready aggregates</a:t>
             </a:r>
@@ -6535,6 +6689,8 @@
                   <a:srgbClr val="666666"/>
                 </a:solidFill>
                 <a:latin typeface="Arial"/>
+                <a:cs typeface="Arial"/>
+                <a:ea typeface="Calibri"/>
               </a:rPr>
               <a:t>الحوكمة عبر تحسين الجودة بين الطبقات — إدارة مركزية.</a:t>
             </a:r>
@@ -6542,6 +6698,11 @@
           <a:p>
             <a:pPr algn="r" rtl="0"/>
             <a:r>
+              <a:rPr>
+                <a:latin typeface="Calibri"/>
+                <a:cs typeface="Arial"/>
+                <a:ea typeface="Calibri"/>
+              </a:rPr>
               <a:t>Governance via quality improvement between layers — central ownership.</a:t>
             </a:r>
           </a:p>
@@ -6602,6 +6763,8 @@
                   <a:srgbClr val="1F3B5C"/>
                 </a:solidFill>
                 <a:latin typeface="Arial"/>
+                <a:cs typeface="Arial"/>
+                <a:ea typeface="Calibri"/>
               </a:rPr>
               <a:t>أنماط معالجة البيانات الثلاثة / Three Data Patterns</a:t>
             </a:r>
@@ -6657,6 +6820,8 @@
                   <a:srgbClr val="333333"/>
                 </a:solidFill>
                 <a:latin typeface="Arial"/>
+                <a:cs typeface="Arial"/>
+                <a:ea typeface="Calibri"/>
               </a:rPr>
               <a:t>المعمارية المتدرِّجة</a:t>
             </a:r>
@@ -6669,6 +6834,8 @@
                   <a:srgbClr val="666666"/>
                 </a:solidFill>
                 <a:latin typeface="Calibri"/>
+                <a:cs typeface="Arial"/>
+                <a:ea typeface="Calibri"/>
               </a:rPr>
               <a:t>Medallion</a:t>
             </a:r>
@@ -6724,6 +6891,8 @@
                   <a:srgbClr val="333333"/>
                 </a:solidFill>
                 <a:latin typeface="Arial"/>
+                <a:cs typeface="Arial"/>
+                <a:ea typeface="Calibri"/>
               </a:rPr>
               <a:t>فريق مركزي — تحليلات وAI/ML/RAG</a:t>
             </a:r>
@@ -6779,6 +6948,8 @@
                   <a:srgbClr val="333333"/>
                 </a:solidFill>
                 <a:latin typeface="Arial"/>
+                <a:cs typeface="Arial"/>
+                <a:ea typeface="Calibri"/>
               </a:rPr>
               <a:t>مستودع البيانات</a:t>
             </a:r>
@@ -6791,6 +6962,8 @@
                   <a:srgbClr val="666666"/>
                 </a:solidFill>
                 <a:latin typeface="Calibri"/>
+                <a:cs typeface="Arial"/>
+                <a:ea typeface="Calibri"/>
               </a:rPr>
               <a:t>Data Warehouse</a:t>
             </a:r>
@@ -6846,6 +7019,8 @@
                   <a:srgbClr val="333333"/>
                 </a:solidFill>
                 <a:latin typeface="Arial"/>
+                <a:cs typeface="Arial"/>
+                <a:ea typeface="Calibri"/>
               </a:rPr>
               <a:t>فرق BI — تقارير وذكاء أعمال</a:t>
             </a:r>
@@ -6901,6 +7076,8 @@
                   <a:srgbClr val="333333"/>
                 </a:solidFill>
                 <a:latin typeface="Arial"/>
+                <a:cs typeface="Arial"/>
+                <a:ea typeface="Calibri"/>
               </a:rPr>
               <a:t>شبكة البيانات</a:t>
             </a:r>
@@ -6913,6 +7090,8 @@
                   <a:srgbClr val="666666"/>
                 </a:solidFill>
                 <a:latin typeface="Calibri"/>
+                <a:cs typeface="Arial"/>
+                <a:ea typeface="Calibri"/>
               </a:rPr>
               <a:t>Data Mesh</a:t>
             </a:r>
@@ -6968,6 +7147,8 @@
                   <a:srgbClr val="333333"/>
                 </a:solidFill>
                 <a:latin typeface="Arial"/>
+                <a:cs typeface="Arial"/>
+                <a:ea typeface="Calibri"/>
               </a:rPr>
               <a:t>فرق المجالات — مؤسسات كبيرة</a:t>
             </a:r>
@@ -7003,6 +7184,8 @@
                   <a:srgbClr val="666666"/>
                 </a:solidFill>
                 <a:latin typeface="Arial"/>
+                <a:cs typeface="Arial"/>
+                <a:ea typeface="Calibri"/>
               </a:rPr>
               <a:t>المعايير: الفكرة الجوهرية / المالك / الحوكمة / حالة الاستخدام المثلى.</a:t>
             </a:r>
@@ -7010,6 +7193,11 @@
           <a:p>
             <a:pPr algn="r" rtl="0"/>
             <a:r>
+              <a:rPr>
+                <a:latin typeface="Calibri"/>
+                <a:cs typeface="Arial"/>
+                <a:ea typeface="Calibri"/>
+              </a:rPr>
               <a:t>Criteria: core idea / ownership / governance / best use case.</a:t>
             </a:r>
           </a:p>
@@ -7070,6 +7258,8 @@
                   <a:srgbClr val="1F3B5C"/>
                 </a:solidFill>
                 <a:latin typeface="Arial"/>
+                <a:cs typeface="Arial"/>
+                <a:ea typeface="Calibri"/>
               </a:rPr>
               <a:t>منتج البيانات وعقد البيانات / Data Product &amp; Contract</a:t>
             </a:r>
@@ -7125,18 +7315,22 @@
                   <a:srgbClr val="333333"/>
                 </a:solidFill>
                 <a:latin typeface="Arial"/>
+                <a:cs typeface="Arial"/>
+                <a:ea typeface="Calibri"/>
               </a:rPr>
               <a:t>منتج البيانات</a:t>
             </a:r>
           </a:p>
           <a:p>
-            <a:pPr algn="ctr" rtl="0"/>
+            <a:pPr algn="ctr" rtl="1"/>
             <a:r>
               <a:rPr sz="1400">
                 <a:solidFill>
                   <a:srgbClr val="666666"/>
                 </a:solidFill>
-                <a:latin typeface="Calibri"/>
+                <a:latin typeface="Arial"/>
+                <a:cs typeface="Arial"/>
+                <a:ea typeface="Calibri"/>
               </a:rPr>
               <a:t>Data Product — موثوق • موثّق • قابل للاكتشاف</a:t>
             </a:r>
@@ -7192,6 +7386,8 @@
                   <a:srgbClr val="333333"/>
                 </a:solidFill>
                 <a:latin typeface="Arial"/>
+                <a:cs typeface="Arial"/>
+                <a:ea typeface="Calibri"/>
               </a:rPr>
               <a:t>عقد البيانات</a:t>
             </a:r>
@@ -7204,6 +7400,8 @@
                   <a:srgbClr val="666666"/>
                 </a:solidFill>
                 <a:latin typeface="Calibri"/>
+                <a:cs typeface="Arial"/>
+                <a:ea typeface="Calibri"/>
               </a:rPr>
               <a:t>Data Contract</a:t>
             </a:r>
@@ -7259,6 +7457,8 @@
                   <a:srgbClr val="333333"/>
                 </a:solidFill>
                 <a:latin typeface="Arial"/>
+                <a:cs typeface="Arial"/>
+                <a:ea typeface="Calibri"/>
               </a:rPr>
               <a:t>المخطط / Schema</a:t>
             </a:r>
@@ -7314,6 +7514,8 @@
                   <a:srgbClr val="333333"/>
                 </a:solidFill>
                 <a:latin typeface="Arial"/>
+                <a:cs typeface="Arial"/>
+                <a:ea typeface="Calibri"/>
               </a:rPr>
               <a:t>الأمان / Security</a:t>
             </a:r>
@@ -7369,6 +7571,8 @@
                   <a:srgbClr val="333333"/>
                 </a:solidFill>
                 <a:latin typeface="Arial"/>
+                <a:cs typeface="Arial"/>
+                <a:ea typeface="Calibri"/>
               </a:rPr>
               <a:t>مستوى الخدمة / SLA</a:t>
             </a:r>
@@ -7448,6 +7652,8 @@
                   <a:srgbClr val="666666"/>
                 </a:solidFill>
                 <a:latin typeface="Arial"/>
+                <a:cs typeface="Arial"/>
+                <a:ea typeface="Calibri"/>
               </a:rPr>
               <a:t>وحدة التسليم الحديثة في هندسة البيانات.</a:t>
             </a:r>
@@ -7455,6 +7661,11 @@
           <a:p>
             <a:pPr algn="r" rtl="0"/>
             <a:r>
+              <a:rPr>
+                <a:latin typeface="Calibri"/>
+                <a:cs typeface="Arial"/>
+                <a:ea typeface="Calibri"/>
+              </a:rPr>
               <a:t>The modern delivery unit in data engineering.</a:t>
             </a:r>
           </a:p>
@@ -7515,6 +7726,8 @@
                   <a:srgbClr val="1F3B5C"/>
                 </a:solidFill>
                 <a:latin typeface="Arial"/>
+                <a:cs typeface="Arial"/>
+                <a:ea typeface="Calibri"/>
               </a:rPr>
               <a:t>خط أنابيب RAG / RAG Pipeline</a:t>
             </a:r>
@@ -7570,6 +7783,8 @@
                   <a:srgbClr val="333333"/>
                 </a:solidFill>
                 <a:latin typeface="Arial"/>
+                <a:cs typeface="Arial"/>
+                <a:ea typeface="Calibri"/>
               </a:rPr>
               <a:t>1) الفهرسة</a:t>
             </a:r>
@@ -7582,6 +7797,8 @@
                   <a:srgbClr val="666666"/>
                 </a:solidFill>
                 <a:latin typeface="Calibri"/>
+                <a:cs typeface="Arial"/>
+                <a:ea typeface="Calibri"/>
               </a:rPr>
               <a:t>Indexing</a:t>
             </a:r>
@@ -7681,6 +7898,8 @@
                   <a:srgbClr val="333333"/>
                 </a:solidFill>
                 <a:latin typeface="Arial"/>
+                <a:cs typeface="Arial"/>
+                <a:ea typeface="Calibri"/>
               </a:rPr>
               <a:t>2) الاسترجاع</a:t>
             </a:r>
@@ -7693,6 +7912,8 @@
                   <a:srgbClr val="666666"/>
                 </a:solidFill>
                 <a:latin typeface="Calibri"/>
+                <a:cs typeface="Arial"/>
+                <a:ea typeface="Calibri"/>
               </a:rPr>
               <a:t>Retrieval</a:t>
             </a:r>
@@ -7792,6 +8013,8 @@
                   <a:srgbClr val="333333"/>
                 </a:solidFill>
                 <a:latin typeface="Arial"/>
+                <a:cs typeface="Arial"/>
+                <a:ea typeface="Calibri"/>
               </a:rPr>
               <a:t>3) التوليد</a:t>
             </a:r>
@@ -7804,6 +8027,8 @@
                   <a:srgbClr val="666666"/>
                 </a:solidFill>
                 <a:latin typeface="Calibri"/>
+                <a:cs typeface="Arial"/>
+                <a:ea typeface="Calibri"/>
               </a:rPr>
               <a:t>Generation</a:t>
             </a:r>
@@ -7903,6 +8128,8 @@
                   <a:srgbClr val="333333"/>
                 </a:solidFill>
                 <a:latin typeface="Arial"/>
+                <a:cs typeface="Arial"/>
+                <a:ea typeface="Calibri"/>
               </a:rPr>
               <a:t>4) التقييم</a:t>
             </a:r>
@@ -7915,6 +8142,8 @@
                   <a:srgbClr val="666666"/>
                 </a:solidFill>
                 <a:latin typeface="Calibri"/>
+                <a:cs typeface="Arial"/>
+                <a:ea typeface="Calibri"/>
               </a:rPr>
               <a:t>Evaluation</a:t>
             </a:r>
@@ -8014,6 +8243,8 @@
                   <a:srgbClr val="333333"/>
                 </a:solidFill>
                 <a:latin typeface="Arial"/>
+                <a:cs typeface="Arial"/>
+                <a:ea typeface="Calibri"/>
               </a:rPr>
               <a:t>5) التحسين</a:t>
             </a:r>
@@ -8026,6 +8257,8 @@
                   <a:srgbClr val="666666"/>
                 </a:solidFill>
                 <a:latin typeface="Calibri"/>
+                <a:cs typeface="Arial"/>
+                <a:ea typeface="Calibri"/>
               </a:rPr>
               <a:t>Optimization</a:t>
             </a:r>
@@ -8081,6 +8314,8 @@
                   <a:srgbClr val="333333"/>
                 </a:solidFill>
                 <a:latin typeface="Arial"/>
+                <a:cs typeface="Arial"/>
+                <a:ea typeface="Calibri"/>
               </a:rPr>
               <a:t>تقسيم تكراري + HNSW</a:t>
             </a:r>
@@ -8136,6 +8371,8 @@
                   <a:srgbClr val="333333"/>
                 </a:solidFill>
                 <a:latin typeface="Arial"/>
+                <a:cs typeface="Arial"/>
+                <a:ea typeface="Calibri"/>
               </a:rPr>
               <a:t>بحث هجين + إعادة ترتيب</a:t>
             </a:r>
@@ -8191,6 +8428,8 @@
                   <a:srgbClr val="333333"/>
                 </a:solidFill>
                 <a:latin typeface="Arial"/>
+                <a:cs typeface="Arial"/>
+                <a:ea typeface="Calibri"/>
               </a:rPr>
               <a:t>موجِّه مقيَّد بالمصادر</a:t>
             </a:r>
@@ -8246,6 +8485,8 @@
                   <a:srgbClr val="333333"/>
                 </a:solidFill>
                 <a:latin typeface="Arial"/>
+                <a:cs typeface="Arial"/>
+                <a:ea typeface="Calibri"/>
               </a:rPr>
               <a:t>مثلث RAG (RAGAS)</a:t>
             </a:r>
@@ -8301,6 +8542,8 @@
                   <a:srgbClr val="333333"/>
                 </a:solidFill>
                 <a:latin typeface="Arial"/>
+                <a:cs typeface="Arial"/>
+                <a:ea typeface="Calibri"/>
               </a:rPr>
               <a:t>تخزين مؤقت + توجيه</a:t>
             </a:r>
@@ -8336,6 +8579,8 @@
                   <a:srgbClr val="666666"/>
                 </a:solidFill>
                 <a:latin typeface="Arial"/>
+                <a:cs typeface="Arial"/>
+                <a:ea typeface="Calibri"/>
               </a:rPr>
               <a:t>من الفهرسة إلى التقييم — المسار التطبيقي في مختبر L03.</a:t>
             </a:r>
@@ -8343,6 +8588,11 @@
           <a:p>
             <a:pPr algn="r" rtl="0"/>
             <a:r>
+              <a:rPr>
+                <a:latin typeface="Calibri"/>
+                <a:cs typeface="Arial"/>
+                <a:ea typeface="Calibri"/>
+              </a:rPr>
               <a:t>From indexing to evaluation — applied in lab L03.</a:t>
             </a:r>
           </a:p>
@@ -8403,6 +8653,8 @@
                   <a:srgbClr val="1F3B5C"/>
                 </a:solidFill>
                 <a:latin typeface="Arial"/>
+                <a:cs typeface="Arial"/>
+                <a:ea typeface="Calibri"/>
               </a:rPr>
               <a:t>استراتيجيات تقسيم النصوص / Chunking Strategies</a:t>
             </a:r>
@@ -8458,6 +8710,8 @@
                   <a:srgbClr val="333333"/>
                 </a:solidFill>
                 <a:latin typeface="Arial"/>
+                <a:cs typeface="Arial"/>
+                <a:ea typeface="Calibri"/>
               </a:rPr>
               <a:t>ثابت الحجم</a:t>
             </a:r>
@@ -8470,6 +8724,8 @@
                   <a:srgbClr val="666666"/>
                 </a:solidFill>
                 <a:latin typeface="Calibri"/>
+                <a:cs typeface="Arial"/>
+                <a:ea typeface="Calibri"/>
               </a:rPr>
               <a:t>Fixed-size</a:t>
             </a:r>
@@ -8525,6 +8781,8 @@
                   <a:srgbClr val="333333"/>
                 </a:solidFill>
                 <a:latin typeface="Arial"/>
+                <a:cs typeface="Arial"/>
+                <a:ea typeface="Calibri"/>
               </a:rPr>
               <a:t>أبسطها — يقطع الجُمل</a:t>
             </a:r>
@@ -8580,6 +8838,8 @@
                   <a:srgbClr val="333333"/>
                 </a:solidFill>
                 <a:latin typeface="Arial"/>
+                <a:cs typeface="Arial"/>
+                <a:ea typeface="Calibri"/>
               </a:rPr>
               <a:t>دلالي</a:t>
             </a:r>
@@ -8592,6 +8852,8 @@
                   <a:srgbClr val="666666"/>
                 </a:solidFill>
                 <a:latin typeface="Calibri"/>
+                <a:cs typeface="Arial"/>
+                <a:ea typeface="Calibri"/>
               </a:rPr>
               <a:t>Semantic</a:t>
             </a:r>
@@ -8647,6 +8909,8 @@
                   <a:srgbClr val="333333"/>
                 </a:solidFill>
                 <a:latin typeface="Arial"/>
+                <a:cs typeface="Arial"/>
+                <a:ea typeface="Calibri"/>
               </a:rPr>
               <a:t>تماسك أفضل — حساس للعتبة</a:t>
             </a:r>
@@ -8702,6 +8966,8 @@
                   <a:srgbClr val="333333"/>
                 </a:solidFill>
                 <a:latin typeface="Arial"/>
+                <a:cs typeface="Arial"/>
+                <a:ea typeface="Calibri"/>
               </a:rPr>
               <a:t>تكراري ★</a:t>
             </a:r>
@@ -8714,6 +8980,8 @@
                   <a:srgbClr val="666666"/>
                 </a:solidFill>
                 <a:latin typeface="Calibri"/>
+                <a:cs typeface="Arial"/>
+                <a:ea typeface="Calibri"/>
               </a:rPr>
               <a:t>Recursive</a:t>
             </a:r>
@@ -8769,6 +9037,8 @@
                   <a:srgbClr val="333333"/>
                 </a:solidFill>
                 <a:latin typeface="Arial"/>
+                <a:cs typeface="Arial"/>
+                <a:ea typeface="Calibri"/>
               </a:rPr>
               <a:t>الموصى به افتراضيًا</a:t>
             </a:r>
@@ -8824,6 +9094,8 @@
                   <a:srgbClr val="333333"/>
                 </a:solidFill>
                 <a:latin typeface="Arial"/>
+                <a:cs typeface="Arial"/>
+                <a:ea typeface="Calibri"/>
               </a:rPr>
               <a:t>بحسب البنية</a:t>
             </a:r>
@@ -8836,6 +9108,8 @@
                   <a:srgbClr val="666666"/>
                 </a:solidFill>
                 <a:latin typeface="Calibri"/>
+                <a:cs typeface="Arial"/>
+                <a:ea typeface="Calibri"/>
               </a:rPr>
               <a:t>Structure-based</a:t>
             </a:r>
@@ -8891,6 +9165,8 @@
                   <a:srgbClr val="333333"/>
                 </a:solidFill>
                 <a:latin typeface="Arial"/>
+                <a:cs typeface="Arial"/>
+                <a:ea typeface="Calibri"/>
               </a:rPr>
               <a:t>عناوين وأقسام — يُدمج مع التكراري</a:t>
             </a:r>
@@ -8946,6 +9222,8 @@
                   <a:srgbClr val="333333"/>
                 </a:solidFill>
                 <a:latin typeface="Arial"/>
+                <a:cs typeface="Arial"/>
+                <a:ea typeface="Calibri"/>
               </a:rPr>
               <a:t>بالنموذج اللغوي</a:t>
             </a:r>
@@ -8958,6 +9236,8 @@
                   <a:srgbClr val="666666"/>
                 </a:solidFill>
                 <a:latin typeface="Calibri"/>
+                <a:cs typeface="Arial"/>
+                <a:ea typeface="Calibri"/>
               </a:rPr>
               <a:t>LLM-based</a:t>
             </a:r>
@@ -9013,6 +9293,8 @@
                   <a:srgbClr val="333333"/>
                 </a:solidFill>
                 <a:latin typeface="Arial"/>
+                <a:cs typeface="Arial"/>
+                <a:ea typeface="Calibri"/>
               </a:rPr>
               <a:t>الأدق — الأغلى حسابيًا</a:t>
             </a:r>
@@ -9048,6 +9330,8 @@
                   <a:srgbClr val="666666"/>
                 </a:solidFill>
                 <a:latin typeface="Arial"/>
+                <a:cs typeface="Arial"/>
+                <a:ea typeface="Calibri"/>
               </a:rPr>
               <a:t>★ التقسيم التكراري: فصل بالفقرات ثم تقسيم ما تجاوز الحد الأقصى.</a:t>
             </a:r>
@@ -9055,6 +9339,11 @@
           <a:p>
             <a:pPr algn="r" rtl="0"/>
             <a:r>
+              <a:rPr>
+                <a:latin typeface="Calibri"/>
+                <a:cs typeface="Arial"/>
+                <a:ea typeface="Calibri"/>
+              </a:rPr>
               <a:t>★ Recursive: split by paragraphs, then oversized chunks.</a:t>
             </a:r>
           </a:p>
@@ -9115,6 +9404,8 @@
                   <a:srgbClr val="1F3B5C"/>
                 </a:solidFill>
                 <a:latin typeface="Arial"/>
+                <a:cs typeface="Arial"/>
+                <a:ea typeface="Calibri"/>
               </a:rPr>
               <a:t>مثلث تقييم RAG / RAG Evaluation Triad</a:t>
             </a:r>
@@ -9216,6 +9507,8 @@
                   <a:srgbClr val="333333"/>
                 </a:solidFill>
                 <a:latin typeface="Arial"/>
+                <a:cs typeface="Arial"/>
+                <a:ea typeface="Calibri"/>
               </a:rPr>
               <a:t>الوفاء بالمصدر</a:t>
             </a:r>
@@ -9228,6 +9521,8 @@
                   <a:srgbClr val="666666"/>
                 </a:solidFill>
                 <a:latin typeface="Calibri"/>
+                <a:cs typeface="Arial"/>
+                <a:ea typeface="Calibri"/>
               </a:rPr>
               <a:t>Faithfulness</a:t>
             </a:r>
@@ -9283,6 +9578,8 @@
                   <a:srgbClr val="333333"/>
                 </a:solidFill>
                 <a:latin typeface="Arial"/>
+                <a:cs typeface="Arial"/>
+                <a:ea typeface="Calibri"/>
               </a:rPr>
               <a:t>ملاءمة الإجابة</a:t>
             </a:r>
@@ -9295,6 +9592,8 @@
                   <a:srgbClr val="666666"/>
                 </a:solidFill>
                 <a:latin typeface="Calibri"/>
+                <a:cs typeface="Arial"/>
+                <a:ea typeface="Calibri"/>
               </a:rPr>
               <a:t>Answer Relevancy</a:t>
             </a:r>
@@ -9350,6 +9649,8 @@
                   <a:srgbClr val="333333"/>
                 </a:solidFill>
                 <a:latin typeface="Arial"/>
+                <a:cs typeface="Arial"/>
+                <a:ea typeface="Calibri"/>
               </a:rPr>
               <a:t>دقة السياق</a:t>
             </a:r>
@@ -9362,6 +9663,8 @@
                   <a:srgbClr val="666666"/>
                 </a:solidFill>
                 <a:latin typeface="Calibri"/>
+                <a:cs typeface="Arial"/>
+                <a:ea typeface="Calibri"/>
               </a:rPr>
               <a:t>Context Precision</a:t>
             </a:r>
@@ -9397,6 +9700,8 @@
                   <a:srgbClr val="666666"/>
                 </a:solidFill>
                 <a:latin typeface="Arial"/>
+                <a:cs typeface="Arial"/>
+                <a:ea typeface="Calibri"/>
               </a:rPr>
               <a:t>يُقاس بإطار RAGAS — الوفاء يمنع الهلوسة والملاءمة تجعل الإجابة نافعة.</a:t>
             </a:r>
@@ -9404,6 +9709,11 @@
           <a:p>
             <a:pPr algn="r" rtl="0"/>
             <a:r>
+              <a:rPr>
+                <a:latin typeface="Calibri"/>
+                <a:cs typeface="Arial"/>
+                <a:ea typeface="Calibri"/>
+              </a:rPr>
               <a:t>Measured with RAGAS — faithfulness prevents hallucination; relevancy keeps answers useful.</a:t>
             </a:r>
           </a:p>
@@ -9464,6 +9774,8 @@
                   <a:srgbClr val="1F3B5C"/>
                 </a:solidFill>
                 <a:latin typeface="Arial"/>
+                <a:cs typeface="Arial"/>
+                <a:ea typeface="Calibri"/>
               </a:rPr>
               <a:t>المعمارية المرجعية للذكاء التوليدي / GenAI Reference Architecture</a:t>
             </a:r>
@@ -9519,6 +9831,8 @@
                   <a:srgbClr val="333333"/>
                 </a:solidFill>
                 <a:latin typeface="Arial"/>
+                <a:cs typeface="Arial"/>
+                <a:ea typeface="Calibri"/>
               </a:rPr>
               <a:t>أ. بوابة منصة GenAI</a:t>
             </a:r>
@@ -9531,6 +9845,8 @@
                   <a:srgbClr val="666666"/>
                 </a:solidFill>
                 <a:latin typeface="Calibri"/>
+                <a:cs typeface="Arial"/>
+                <a:ea typeface="Calibri"/>
               </a:rPr>
               <a:t>A. Platform Portal — POC → MVP → PROD</a:t>
             </a:r>
@@ -9586,6 +9902,8 @@
                   <a:srgbClr val="333333"/>
                 </a:solidFill>
                 <a:latin typeface="Arial"/>
+                <a:cs typeface="Arial"/>
+                <a:ea typeface="Calibri"/>
               </a:rPr>
               <a:t>ب. الأتمتة والامتثال</a:t>
             </a:r>
@@ -9598,6 +9916,8 @@
                   <a:srgbClr val="666666"/>
                 </a:solidFill>
                 <a:latin typeface="Calibri"/>
+                <a:cs typeface="Arial"/>
+                <a:ea typeface="Calibri"/>
               </a:rPr>
               <a:t>B. Automation &amp; Compliance — CI/CD gates</a:t>
             </a:r>
@@ -9653,6 +9973,8 @@
                   <a:srgbClr val="333333"/>
                 </a:solidFill>
                 <a:latin typeface="Arial"/>
+                <a:cs typeface="Arial"/>
+                <a:ea typeface="Calibri"/>
               </a:rPr>
               <a:t>ج. الخدمات المشتركة</a:t>
             </a:r>
@@ -9665,6 +9987,8 @@
                   <a:srgbClr val="666666"/>
                 </a:solidFill>
                 <a:latin typeface="Calibri"/>
+                <a:cs typeface="Arial"/>
+                <a:ea typeface="Calibri"/>
               </a:rPr>
               <a:t>C. Shared Services — Gateway, Prompts, Audit, Guardrails</a:t>
             </a:r>
@@ -9720,6 +10044,8 @@
                   <a:srgbClr val="333333"/>
                 </a:solidFill>
                 <a:latin typeface="Arial"/>
+                <a:cs typeface="Arial"/>
+                <a:ea typeface="Calibri"/>
               </a:rPr>
               <a:t>د. الحوكمة والمراقبة</a:t>
             </a:r>
@@ -9732,6 +10058,8 @@
                   <a:srgbClr val="666666"/>
                 </a:solidFill>
                 <a:latin typeface="Calibri"/>
+                <a:cs typeface="Arial"/>
+                <a:ea typeface="Calibri"/>
               </a:rPr>
               <a:t>D. Governance &amp; Monitoring — Responsible AI, FinOps</a:t>
             </a:r>
@@ -9767,6 +10095,8 @@
                   <a:srgbClr val="666666"/>
                 </a:solidFill>
                 <a:latin typeface="Arial"/>
+                <a:cs typeface="Arial"/>
+                <a:ea typeface="Calibri"/>
               </a:rPr>
               <a:t>النمط المرجعي المؤسسي (McKinsey) — نافذة موحدة فوق خدمات مشتركة محكومة.</a:t>
             </a:r>
@@ -9774,6 +10104,11 @@
           <a:p>
             <a:pPr algn="r" rtl="0"/>
             <a:r>
+              <a:rPr>
+                <a:latin typeface="Calibri"/>
+                <a:cs typeface="Arial"/>
+                <a:ea typeface="Calibri"/>
+              </a:rPr>
               <a:t>Enterprise reference pattern (McKinsey) — a unified pane over governed shared services.</a:t>
             </a:r>
           </a:p>
@@ -9834,6 +10169,8 @@
                   <a:srgbClr val="1F3B5C"/>
                 </a:solidFill>
                 <a:latin typeface="Arial"/>
+                <a:cs typeface="Arial"/>
+                <a:ea typeface="Calibri"/>
               </a:rPr>
               <a:t>التكلفة عمليًا: التضمين مقابل التوليد / Cost: Embedding vs Generation</a:t>
             </a:r>
@@ -9889,6 +10226,8 @@
                   <a:srgbClr val="333333"/>
                 </a:solidFill>
                 <a:latin typeface="Arial"/>
+                <a:cs typeface="Arial"/>
+                <a:ea typeface="Calibri"/>
               </a:rPr>
               <a:t>التضمين 1x</a:t>
             </a:r>
@@ -9901,6 +10240,8 @@
                   <a:srgbClr val="666666"/>
                 </a:solidFill>
                 <a:latin typeface="Calibri"/>
+                <a:cs typeface="Arial"/>
+                <a:ea typeface="Calibri"/>
               </a:rPr>
               <a:t>Embedding — cheap</a:t>
             </a:r>
@@ -9956,6 +10297,8 @@
                   <a:srgbClr val="333333"/>
                 </a:solidFill>
                 <a:latin typeface="Arial"/>
+                <a:cs typeface="Arial"/>
+                <a:ea typeface="Calibri"/>
               </a:rPr>
               <a:t>التوليد ~10x</a:t>
             </a:r>
@@ -9968,6 +10311,8 @@
                   <a:srgbClr val="666666"/>
                 </a:solidFill>
                 <a:latin typeface="Calibri"/>
+                <a:cs typeface="Arial"/>
+                <a:ea typeface="Calibri"/>
               </a:rPr>
               <a:t>Generation — costly</a:t>
             </a:r>
@@ -10023,6 +10368,8 @@
                   <a:srgbClr val="333333"/>
                 </a:solidFill>
                 <a:latin typeface="Arial"/>
+                <a:cs typeface="Arial"/>
+                <a:ea typeface="Calibri"/>
               </a:rPr>
               <a:t>الحل: تخزين مؤقت + توجيه</a:t>
             </a:r>
@@ -10035,6 +10382,8 @@
                   <a:srgbClr val="666666"/>
                 </a:solidFill>
                 <a:latin typeface="Calibri"/>
+                <a:cs typeface="Arial"/>
+                <a:ea typeface="Calibri"/>
               </a:rPr>
               <a:t>Fix: caching + routing</a:t>
             </a:r>
@@ -10070,6 +10419,8 @@
                   <a:srgbClr val="666666"/>
                 </a:solidFill>
                 <a:latin typeface="Arial"/>
+                <a:cs typeface="Arial"/>
+                <a:ea typeface="Calibri"/>
               </a:rPr>
               <a:t>قاعدة FinOps: قِس التكلفة لكل طلب قبل التوسع.</a:t>
             </a:r>
@@ -10077,6 +10428,11 @@
           <a:p>
             <a:pPr algn="r" rtl="0"/>
             <a:r>
+              <a:rPr>
+                <a:latin typeface="Calibri"/>
+                <a:cs typeface="Arial"/>
+                <a:ea typeface="Calibri"/>
+              </a:rPr>
               <a:t>FinOps rule: measure per-request cost before scaling.</a:t>
             </a:r>
           </a:p>

--- a/output/Module02_Visualizations.pptx
+++ b/output/Module02_Visualizations.pptx
@@ -17,6 +17,7 @@
     <p:sldId id="265" r:id="rId16"/>
     <p:sldId id="266" r:id="rId17"/>
     <p:sldId id="267" r:id="rId18"/>
+    <p:sldId id="268" r:id="rId19"/>
   </p:sldIdLst>
   <p:sldSz cx="12191695" cy="6858000" type="screen4x3"/>
   <p:notesSz cx="6858000" cy="9144000"/>
@@ -3136,8 +3137,6 @@
                   <a:srgbClr val="1F3B5C"/>
                 </a:solidFill>
                 <a:latin typeface="Arial"/>
-                <a:cs typeface="Arial"/>
-                <a:ea typeface="Calibri"/>
               </a:rPr>
               <a:t>خريطة المسار / Track Roadmap</a:t>
             </a:r>
@@ -3193,8 +3192,6 @@
                   <a:srgbClr val="333333"/>
                 </a:solidFill>
                 <a:latin typeface="Arial"/>
-                <a:cs typeface="Arial"/>
-                <a:ea typeface="Calibri"/>
               </a:rPr>
               <a:t>البيانات</a:t>
             </a:r>
@@ -3207,8 +3204,6 @@
                   <a:srgbClr val="666666"/>
                 </a:solidFill>
                 <a:latin typeface="Calibri"/>
-                <a:cs typeface="Arial"/>
-                <a:ea typeface="Calibri"/>
               </a:rPr>
               <a:t>Data</a:t>
             </a:r>
@@ -3308,8 +3303,6 @@
                   <a:srgbClr val="333333"/>
                 </a:solidFill>
                 <a:latin typeface="Arial"/>
-                <a:cs typeface="Arial"/>
-                <a:ea typeface="Calibri"/>
               </a:rPr>
               <a:t>التخزين</a:t>
             </a:r>
@@ -3322,8 +3315,6 @@
                   <a:srgbClr val="666666"/>
                 </a:solidFill>
                 <a:latin typeface="Calibri"/>
-                <a:cs typeface="Arial"/>
-                <a:ea typeface="Calibri"/>
               </a:rPr>
               <a:t>Storage</a:t>
             </a:r>
@@ -3423,8 +3414,6 @@
                   <a:srgbClr val="333333"/>
                 </a:solidFill>
                 <a:latin typeface="Arial"/>
-                <a:cs typeface="Arial"/>
-                <a:ea typeface="Calibri"/>
               </a:rPr>
               <a:t>الخصائص</a:t>
             </a:r>
@@ -3437,8 +3426,6 @@
                   <a:srgbClr val="666666"/>
                 </a:solidFill>
                 <a:latin typeface="Calibri"/>
-                <a:cs typeface="Arial"/>
-                <a:ea typeface="Calibri"/>
               </a:rPr>
               <a:t>Features</a:t>
             </a:r>
@@ -3538,8 +3525,6 @@
                   <a:srgbClr val="333333"/>
                 </a:solidFill>
                 <a:latin typeface="Arial"/>
-                <a:cs typeface="Arial"/>
-                <a:ea typeface="Calibri"/>
               </a:rPr>
               <a:t>الفهارس المتجهية</a:t>
             </a:r>
@@ -3552,8 +3537,6 @@
                   <a:srgbClr val="666666"/>
                 </a:solidFill>
                 <a:latin typeface="Calibri"/>
-                <a:cs typeface="Arial"/>
-                <a:ea typeface="Calibri"/>
               </a:rPr>
               <a:t>Vector Indexes</a:t>
             </a:r>
@@ -3653,8 +3636,6 @@
                   <a:srgbClr val="333333"/>
                 </a:solidFill>
                 <a:latin typeface="Arial"/>
-                <a:cs typeface="Arial"/>
-                <a:ea typeface="Calibri"/>
               </a:rPr>
               <a:t>التصنيف</a:t>
             </a:r>
@@ -3667,8 +3648,6 @@
                   <a:srgbClr val="666666"/>
                 </a:solidFill>
                 <a:latin typeface="Calibri"/>
-                <a:cs typeface="Arial"/>
-                <a:ea typeface="Calibri"/>
               </a:rPr>
               <a:t>Labeling</a:t>
             </a:r>
@@ -3768,8 +3747,6 @@
                   <a:srgbClr val="333333"/>
                 </a:solidFill>
                 <a:latin typeface="Arial"/>
-                <a:cs typeface="Arial"/>
-                <a:ea typeface="Calibri"/>
               </a:rPr>
               <a:t>الحوكمة</a:t>
             </a:r>
@@ -3782,8 +3759,6 @@
                   <a:srgbClr val="666666"/>
                 </a:solidFill>
                 <a:latin typeface="Calibri"/>
-                <a:cs typeface="Arial"/>
-                <a:ea typeface="Calibri"/>
               </a:rPr>
               <a:t>Governance</a:t>
             </a:r>
@@ -3876,29 +3851,25 @@
           <a:bodyPr rtlCol="0" anchor="ctr" wrap="square"/>
           <a:lstStyle/>
           <a:p>
+            <a:pPr algn="ctr" rtl="1"/>
+            <a:r>
+              <a:rPr sz="1400" b="1">
+                <a:solidFill>
+                  <a:srgbClr val="333333"/>
+                </a:solidFill>
+                <a:latin typeface="Arial"/>
+              </a:rPr>
+              <a:t>MLOps</a:t>
+            </a:r>
+          </a:p>
+          <a:p>
             <a:pPr algn="ctr" rtl="0"/>
             <a:r>
-              <a:rPr sz="1400" b="1">
-                <a:solidFill>
-                  <a:srgbClr val="333333"/>
+              <a:rPr sz="1000">
+                <a:solidFill>
+                  <a:srgbClr val="666666"/>
                 </a:solidFill>
                 <a:latin typeface="Calibri"/>
-                <a:cs typeface="Arial"/>
-                <a:ea typeface="Calibri"/>
-              </a:rPr>
-              <a:t>MLOps</a:t>
-            </a:r>
-          </a:p>
-          <a:p>
-            <a:pPr algn="ctr" rtl="0"/>
-            <a:r>
-              <a:rPr sz="1000">
-                <a:solidFill>
-                  <a:srgbClr val="666666"/>
-                </a:solidFill>
-                <a:latin typeface="Calibri"/>
-                <a:cs typeface="Arial"/>
-                <a:ea typeface="Calibri"/>
               </a:rPr>
               <a:t>MLOps</a:t>
             </a:r>
@@ -3998,8 +3969,6 @@
                   <a:srgbClr val="333333"/>
                 </a:solidFill>
                 <a:latin typeface="Arial"/>
-                <a:cs typeface="Arial"/>
-                <a:ea typeface="Calibri"/>
               </a:rPr>
               <a:t>المختبر</a:t>
             </a:r>
@@ -4012,8 +3981,6 @@
                   <a:srgbClr val="666666"/>
                 </a:solidFill>
                 <a:latin typeface="Calibri"/>
-                <a:cs typeface="Arial"/>
-                <a:ea typeface="Calibri"/>
               </a:rPr>
               <a:t>Lab</a:t>
             </a:r>
@@ -4049,8 +4016,6 @@
                   <a:srgbClr val="666666"/>
                 </a:solidFill>
                 <a:latin typeface="Arial"/>
-                <a:cs typeface="Arial"/>
-                <a:ea typeface="Calibri"/>
               </a:rPr>
               <a:t>رحلة الوحدة الثانية من البيانات الخام إلى نقطة نهاية RAG.</a:t>
             </a:r>
@@ -4058,11 +4023,6 @@
           <a:p>
             <a:pPr algn="r" rtl="0"/>
             <a:r>
-              <a:rPr>
-                <a:latin typeface="Calibri"/>
-                <a:cs typeface="Arial"/>
-                <a:ea typeface="Calibri"/>
-              </a:rPr>
               <a:t>Module 02 journey: from raw data to a RAG endpoint.</a:t>
             </a:r>
           </a:p>
@@ -4123,8 +4083,6 @@
                   <a:srgbClr val="1F3B5C"/>
                 </a:solidFill>
                 <a:latin typeface="Arial"/>
-                <a:cs typeface="Arial"/>
-                <a:ea typeface="Calibri"/>
               </a:rPr>
               <a:t>من LLM إلى الأنظمة الوكيلة / From LLM to Agentic AI</a:t>
             </a:r>
@@ -4173,15 +4131,13 @@
           <a:bodyPr rtlCol="0" anchor="ctr" wrap="square"/>
           <a:lstStyle/>
           <a:p>
-            <a:pPr algn="ctr" rtl="0"/>
+            <a:pPr algn="ctr" rtl="1"/>
             <a:r>
               <a:rPr sz="1800" b="1">
                 <a:solidFill>
                   <a:srgbClr val="333333"/>
                 </a:solidFill>
-                <a:latin typeface="Calibri"/>
-                <a:cs typeface="Arial"/>
-                <a:ea typeface="Calibri"/>
+                <a:latin typeface="Arial"/>
               </a:rPr>
               <a:t>LLM</a:t>
             </a:r>
@@ -4237,8 +4193,6 @@
                   <a:srgbClr val="333333"/>
                 </a:solidFill>
                 <a:latin typeface="Arial"/>
-                <a:cs typeface="Arial"/>
-                <a:ea typeface="Calibri"/>
               </a:rPr>
               <a:t>تنبؤ بالرموز التالية</a:t>
             </a:r>
@@ -4251,8 +4205,6 @@
                   <a:srgbClr val="666666"/>
                 </a:solidFill>
                 <a:latin typeface="Calibri"/>
-                <a:cs typeface="Arial"/>
-                <a:ea typeface="Calibri"/>
               </a:rPr>
               <a:t>Predicts next tokens</a:t>
             </a:r>
@@ -4352,8 +4304,6 @@
                   <a:srgbClr val="333333"/>
                 </a:solidFill>
                 <a:latin typeface="Arial"/>
-                <a:cs typeface="Arial"/>
-                <a:ea typeface="Calibri"/>
               </a:rPr>
               <a:t>الذكاء التوليدي</a:t>
             </a:r>
@@ -4409,8 +4359,6 @@
                   <a:srgbClr val="333333"/>
                 </a:solidFill>
                 <a:latin typeface="Arial"/>
-                <a:cs typeface="Arial"/>
-                <a:ea typeface="Calibri"/>
               </a:rPr>
               <a:t>يولّد محتوى جديدًا</a:t>
             </a:r>
@@ -4423,8 +4371,6 @@
                   <a:srgbClr val="666666"/>
                 </a:solidFill>
                 <a:latin typeface="Calibri"/>
-                <a:cs typeface="Arial"/>
-                <a:ea typeface="Calibri"/>
               </a:rPr>
               <a:t>Generates new content</a:t>
             </a:r>
@@ -4524,8 +4470,6 @@
                   <a:srgbClr val="333333"/>
                 </a:solidFill>
                 <a:latin typeface="Arial"/>
-                <a:cs typeface="Arial"/>
-                <a:ea typeface="Calibri"/>
               </a:rPr>
               <a:t>الوكلاء Agents</a:t>
             </a:r>
@@ -4581,8 +4525,6 @@
                   <a:srgbClr val="333333"/>
                 </a:solidFill>
                 <a:latin typeface="Arial"/>
-                <a:cs typeface="Arial"/>
-                <a:ea typeface="Calibri"/>
               </a:rPr>
               <a:t>نية + استدعاء أدوات</a:t>
             </a:r>
@@ -4595,8 +4537,6 @@
                   <a:srgbClr val="666666"/>
                 </a:solidFill>
                 <a:latin typeface="Calibri"/>
-                <a:cs typeface="Arial"/>
-                <a:ea typeface="Calibri"/>
               </a:rPr>
               <a:t>Intent + tool calls</a:t>
             </a:r>
@@ -4696,8 +4636,6 @@
                   <a:srgbClr val="333333"/>
                 </a:solidFill>
                 <a:latin typeface="Arial"/>
-                <a:cs typeface="Arial"/>
-                <a:ea typeface="Calibri"/>
               </a:rPr>
               <a:t>الأنظمة الوكيلة</a:t>
             </a:r>
@@ -4753,8 +4691,6 @@
                   <a:srgbClr val="333333"/>
                 </a:solidFill>
                 <a:latin typeface="Arial"/>
-                <a:cs typeface="Arial"/>
-                <a:ea typeface="Calibri"/>
               </a:rPr>
               <a:t>تخطيط وتنفيذ متعدد الخطوات</a:t>
             </a:r>
@@ -4767,8 +4703,6 @@
                   <a:srgbClr val="666666"/>
                 </a:solidFill>
                 <a:latin typeface="Calibri"/>
-                <a:cs typeface="Arial"/>
-                <a:ea typeface="Calibri"/>
               </a:rPr>
               <a:t>Multi-step planning</a:t>
             </a:r>
@@ -4804,8 +4738,6 @@
                   <a:srgbClr val="666666"/>
                 </a:solidFill>
                 <a:latin typeface="Arial"/>
-                <a:cs typeface="Arial"/>
-                <a:ea typeface="Calibri"/>
               </a:rPr>
               <a:t>Agentic RAG = بحث متجهي + جلب عبر الواجهات بذاكرة متجددة وتحقق قبل التسليم.</a:t>
             </a:r>
@@ -4813,11 +4745,6 @@
           <a:p>
             <a:pPr algn="r" rtl="0"/>
             <a:r>
-              <a:rPr>
-                <a:latin typeface="Calibri"/>
-                <a:cs typeface="Arial"/>
-                <a:ea typeface="Calibri"/>
-              </a:rPr>
               <a:t>Agentic RAG = vector search + API fetching with refreshed memory and verification.</a:t>
             </a:r>
           </a:p>
@@ -4878,8 +4805,6 @@
                   <a:srgbClr val="1F3B5C"/>
                 </a:solidFill>
                 <a:latin typeface="Arial"/>
-                <a:cs typeface="Arial"/>
-                <a:ea typeface="Calibri"/>
               </a:rPr>
               <a:t>معمارية مخزن الخصائص / Feature Store Architecture</a:t>
             </a:r>
@@ -4935,8 +4860,6 @@
                   <a:srgbClr val="333333"/>
                 </a:solidFill>
                 <a:latin typeface="Arial"/>
-                <a:cs typeface="Arial"/>
-                <a:ea typeface="Calibri"/>
               </a:rPr>
               <a:t>مصادر البيانات</a:t>
             </a:r>
@@ -4949,8 +4872,6 @@
                   <a:srgbClr val="666666"/>
                 </a:solidFill>
                 <a:latin typeface="Calibri"/>
-                <a:cs typeface="Arial"/>
-                <a:ea typeface="Calibri"/>
               </a:rPr>
               <a:t>Data Sources</a:t>
             </a:r>
@@ -5050,22 +4971,18 @@
                   <a:srgbClr val="333333"/>
                 </a:solidFill>
                 <a:latin typeface="Arial"/>
-                <a:cs typeface="Arial"/>
-                <a:ea typeface="Calibri"/>
               </a:rPr>
               <a:t>خط الخصائص</a:t>
             </a:r>
           </a:p>
           <a:p>
-            <a:pPr algn="ctr" rtl="1"/>
+            <a:pPr algn="ctr" rtl="0"/>
             <a:r>
               <a:rPr sz="1100">
                 <a:solidFill>
                   <a:srgbClr val="666666"/>
                 </a:solidFill>
-                <a:latin typeface="Arial"/>
-                <a:cs typeface="Arial"/>
-                <a:ea typeface="Calibri"/>
+                <a:latin typeface="Calibri"/>
               </a:rPr>
               <a:t>Feature Pipeline
 هندسة + تحويل</a:t>
@@ -5210,22 +5127,18 @@
                   <a:srgbClr val="333333"/>
                 </a:solidFill>
                 <a:latin typeface="Arial"/>
-                <a:cs typeface="Arial"/>
-                <a:ea typeface="Calibri"/>
               </a:rPr>
               <a:t>المخزن غير المتصل</a:t>
             </a:r>
           </a:p>
           <a:p>
-            <a:pPr algn="ctr" rtl="1"/>
+            <a:pPr algn="ctr" rtl="0"/>
             <a:r>
               <a:rPr sz="1100">
                 <a:solidFill>
                   <a:srgbClr val="666666"/>
                 </a:solidFill>
-                <a:latin typeface="Arial"/>
-                <a:cs typeface="Arial"/>
-                <a:ea typeface="Calibri"/>
+                <a:latin typeface="Calibri"/>
               </a:rPr>
               <a:t>Offline Store
 تدريب النماذج</a:t>
@@ -5282,22 +5195,18 @@
                   <a:srgbClr val="333333"/>
                 </a:solidFill>
                 <a:latin typeface="Arial"/>
-                <a:cs typeface="Arial"/>
-                <a:ea typeface="Calibri"/>
               </a:rPr>
               <a:t>المخزن المتصل</a:t>
             </a:r>
           </a:p>
           <a:p>
-            <a:pPr algn="ctr" rtl="1"/>
+            <a:pPr algn="ctr" rtl="0"/>
             <a:r>
               <a:rPr sz="1100">
                 <a:solidFill>
                   <a:srgbClr val="666666"/>
                 </a:solidFill>
-                <a:latin typeface="Arial"/>
-                <a:cs typeface="Arial"/>
-                <a:ea typeface="Calibri"/>
+                <a:latin typeface="Calibri"/>
               </a:rPr>
               <a:t>Online Store
 استدلال منخفض زمن الاستجابة</a:t>
@@ -5354,8 +5263,6 @@
                   <a:srgbClr val="333333"/>
                 </a:solidFill>
                 <a:latin typeface="Arial"/>
-                <a:cs typeface="Arial"/>
-                <a:ea typeface="Calibri"/>
               </a:rPr>
               <a:t>التدريب</a:t>
             </a:r>
@@ -5368,8 +5275,6 @@
                   <a:srgbClr val="666666"/>
                 </a:solidFill>
                 <a:latin typeface="Calibri"/>
-                <a:cs typeface="Arial"/>
-                <a:ea typeface="Calibri"/>
               </a:rPr>
               <a:t>Training</a:t>
             </a:r>
@@ -5425,8 +5330,6 @@
                   <a:srgbClr val="333333"/>
                 </a:solidFill>
                 <a:latin typeface="Arial"/>
-                <a:cs typeface="Arial"/>
-                <a:ea typeface="Calibri"/>
               </a:rPr>
               <a:t>الاستدلال</a:t>
             </a:r>
@@ -5439,8 +5342,6 @@
                   <a:srgbClr val="666666"/>
                 </a:solidFill>
                 <a:latin typeface="Calibri"/>
-                <a:cs typeface="Arial"/>
-                <a:ea typeface="Calibri"/>
               </a:rPr>
               <a:t>Serving</a:t>
             </a:r>
@@ -5564,8 +5465,6 @@
                   <a:srgbClr val="666666"/>
                 </a:solidFill>
                 <a:latin typeface="Arial"/>
-                <a:cs typeface="Arial"/>
-                <a:ea typeface="Calibri"/>
               </a:rPr>
               <a:t>قيمة مخزن الخصائص: نفس تعريف الخصائص للتدريب والاستدلال — لا انحراف.</a:t>
             </a:r>
@@ -5573,11 +5472,6 @@
           <a:p>
             <a:pPr algn="r" rtl="0"/>
             <a:r>
-              <a:rPr>
-                <a:latin typeface="Calibri"/>
-                <a:cs typeface="Arial"/>
-                <a:ea typeface="Calibri"/>
-              </a:rPr>
               <a:t>Core value: one feature definition for training and serving — no skew.</a:t>
             </a:r>
           </a:p>
@@ -5638,8 +5532,6 @@
                   <a:srgbClr val="1F3B5C"/>
                 </a:solidFill>
                 <a:latin typeface="Arial"/>
-                <a:cs typeface="Arial"/>
-                <a:ea typeface="Calibri"/>
               </a:rPr>
               <a:t>سير عمل التصنيف بمساعدة LLM / LLM-assisted Labeling Workflow</a:t>
             </a:r>
@@ -5695,8 +5587,6 @@
                   <a:srgbClr val="333333"/>
                 </a:solidFill>
                 <a:latin typeface="Arial"/>
-                <a:cs typeface="Arial"/>
-                <a:ea typeface="Calibri"/>
               </a:rPr>
               <a:t>بيانات خام</a:t>
             </a:r>
@@ -5709,8 +5599,6 @@
                   <a:srgbClr val="666666"/>
                 </a:solidFill>
                 <a:latin typeface="Calibri"/>
-                <a:cs typeface="Arial"/>
-                <a:ea typeface="Calibri"/>
               </a:rPr>
               <a:t>Raw data</a:t>
             </a:r>
@@ -5810,8 +5698,6 @@
                   <a:srgbClr val="333333"/>
                 </a:solidFill>
                 <a:latin typeface="Arial"/>
-                <a:cs typeface="Arial"/>
-                <a:ea typeface="Calibri"/>
               </a:rPr>
               <a:t>تسمية مبدئية بالـ LLM</a:t>
             </a:r>
@@ -5824,8 +5710,6 @@
                   <a:srgbClr val="666666"/>
                 </a:solidFill>
                 <a:latin typeface="Calibri"/>
-                <a:cs typeface="Arial"/>
-                <a:ea typeface="Calibri"/>
               </a:rPr>
               <a:t>LLM pre-labeling</a:t>
             </a:r>
@@ -5925,8 +5809,6 @@
                   <a:srgbClr val="333333"/>
                 </a:solidFill>
                 <a:latin typeface="Arial"/>
-                <a:cs typeface="Arial"/>
-                <a:ea typeface="Calibri"/>
               </a:rPr>
               <a:t>مراجعة وتصحيح بشري</a:t>
             </a:r>
@@ -5939,8 +5821,6 @@
                   <a:srgbClr val="666666"/>
                 </a:solidFill>
                 <a:latin typeface="Calibri"/>
-                <a:cs typeface="Arial"/>
-                <a:ea typeface="Calibri"/>
               </a:rPr>
               <a:t>Human review (HITL)</a:t>
             </a:r>
@@ -6040,8 +5920,6 @@
                   <a:srgbClr val="333333"/>
                 </a:solidFill>
                 <a:latin typeface="Arial"/>
-                <a:cs typeface="Arial"/>
-                <a:ea typeface="Calibri"/>
               </a:rPr>
               <a:t>تسميات معتمدة</a:t>
             </a:r>
@@ -6054,8 +5932,6 @@
                   <a:srgbClr val="666666"/>
                 </a:solidFill>
                 <a:latin typeface="Calibri"/>
-                <a:cs typeface="Arial"/>
-                <a:ea typeface="Calibri"/>
               </a:rPr>
               <a:t>Approved labels</a:t>
             </a:r>
@@ -6155,8 +6031,6 @@
                   <a:srgbClr val="333333"/>
                 </a:solidFill>
                 <a:latin typeface="Arial"/>
-                <a:cs typeface="Arial"/>
-                <a:ea typeface="Calibri"/>
               </a:rPr>
               <a:t>تدريب النموذج</a:t>
             </a:r>
@@ -6169,8 +6043,6 @@
                   <a:srgbClr val="666666"/>
                 </a:solidFill>
                 <a:latin typeface="Calibri"/>
-                <a:cs typeface="Arial"/>
-                <a:ea typeface="Calibri"/>
               </a:rPr>
               <a:t>Model training</a:t>
             </a:r>
@@ -6226,8 +6098,6 @@
                   <a:srgbClr val="333333"/>
                 </a:solidFill>
                 <a:latin typeface="Arial"/>
-                <a:cs typeface="Arial"/>
-                <a:ea typeface="Calibri"/>
               </a:rPr>
               <a:t>حلقة تغذية راجعة: تصحيحات البشر تُحسِّن موجِّهات الـ LLM</a:t>
             </a:r>
@@ -6240,8 +6110,6 @@
                   <a:srgbClr val="666666"/>
                 </a:solidFill>
                 <a:latin typeface="Calibri"/>
-                <a:cs typeface="Arial"/>
-                <a:ea typeface="Calibri"/>
               </a:rPr>
               <a:t>Feedback loop: human corrections improve LLM prompts</a:t>
             </a:r>
@@ -6277,8 +6145,6 @@
                   <a:srgbClr val="666666"/>
                 </a:solidFill>
                 <a:latin typeface="Arial"/>
-                <a:cs typeface="Arial"/>
-                <a:ea typeface="Calibri"/>
               </a:rPr>
               <a:t>الـ LLM يسرّع التسمية والبشر يضمنون الجودة — أفضل الممارسات الحديثة.</a:t>
             </a:r>
@@ -6286,12 +6152,721 @@
           <a:p>
             <a:pPr algn="r" rtl="0"/>
             <a:r>
-              <a:rPr>
+              <a:t>LLM accelerates labeling; humans guarantee quality — modern best practice.</a:t>
+            </a:r>
+          </a:p>
+        </p:txBody>
+      </p:sp>
+    </p:spTree>
+  </p:cSld>
+  <p:clrMapOvr>
+    <a:masterClrMapping/>
+  </p:clrMapOvr>
+</p:sld>
+</file>
+
+<file path=ppt/slides/slide13.xml><?xml version="1.0" encoding="utf-8"?>
+<p:sld xmlns:a="http://schemas.openxmlformats.org/drawingml/2006/main" xmlns:p="http://schemas.openxmlformats.org/presentationml/2006/main" xmlns:r="http://schemas.openxmlformats.org/officeDocument/2006/relationships">
+  <p:cSld>
+    <p:bg>
+      <p:bgPr>
+        <a:solidFill>
+          <a:srgbClr val="FFFFFF"/>
+        </a:solidFill>
+        <a:effectLst/>
+      </p:bgPr>
+    </p:bg>
+    <p:spTree>
+      <p:nvGrpSpPr>
+        <p:cNvPr id="1" name=""/>
+        <p:cNvGrpSpPr/>
+        <p:nvPr/>
+      </p:nvGrpSpPr>
+      <p:grpSpPr/>
+      <p:sp>
+        <p:nvSpPr>
+          <p:cNvPr id="2" name="TextBox 1"/>
+          <p:cNvSpPr txBox="1"/>
+          <p:nvPr/>
+        </p:nvSpPr>
+        <p:spPr>
+          <a:xfrm>
+            <a:off x="640080" y="137160"/>
+            <a:ext cx="10972800" cy="640080"/>
+          </a:xfrm>
+          <a:prstGeom prst="rect">
+            <a:avLst/>
+          </a:prstGeom>
+          <a:noFill/>
+        </p:spPr>
+        <p:txBody>
+          <a:bodyPr wrap="none">
+            <a:spAutoFit/>
+          </a:bodyPr>
+          <a:lstStyle/>
+          <a:p>
+            <a:pPr algn="r" rtl="1"/>
+            <a:r>
+              <a:rPr sz="3000" b="1">
+                <a:solidFill>
+                  <a:srgbClr val="1F3B5C"/>
+                </a:solidFill>
+                <a:latin typeface="Arial"/>
+              </a:rPr>
+              <a:t>نمط الإجابة المؤرَّضة / Grounded Answer Pattern</a:t>
+            </a:r>
+          </a:p>
+        </p:txBody>
+      </p:sp>
+      <p:sp>
+        <p:nvSpPr>
+          <p:cNvPr id="3" name="Rounded Rectangle 2"/>
+          <p:cNvSpPr/>
+          <p:nvPr/>
+        </p:nvSpPr>
+        <p:spPr>
+          <a:xfrm>
+            <a:off x="640080" y="1417320"/>
+            <a:ext cx="2743200" cy="1097280"/>
+          </a:xfrm>
+          <a:prstGeom prst="roundRect">
+            <a:avLst/>
+          </a:prstGeom>
+          <a:solidFill>
+            <a:srgbClr val="DCE6F1"/>
+          </a:solidFill>
+          <a:ln w="12700">
+            <a:solidFill>
+              <a:srgbClr val="1F4E79"/>
+            </a:solidFill>
+          </a:ln>
+          <a:effectLst/>
+        </p:spPr>
+        <p:style>
+          <a:lnRef idx="1">
+            <a:schemeClr val="accent1"/>
+          </a:lnRef>
+          <a:fillRef idx="3">
+            <a:schemeClr val="accent1"/>
+          </a:fillRef>
+          <a:effectRef idx="2">
+            <a:schemeClr val="accent1"/>
+          </a:effectRef>
+          <a:fontRef idx="minor">
+            <a:schemeClr val="lt1"/>
+          </a:fontRef>
+        </p:style>
+        <p:txBody>
+          <a:bodyPr rtlCol="0" anchor="ctr" wrap="square"/>
+          <a:lstStyle/>
+          <a:p>
+            <a:pPr algn="ctr" rtl="1"/>
+            <a:r>
+              <a:rPr sz="1800" b="1">
+                <a:solidFill>
+                  <a:srgbClr val="333333"/>
+                </a:solidFill>
+                <a:latin typeface="Arial"/>
+              </a:rPr>
+              <a:t>سؤال المتعلِّم</a:t>
+            </a:r>
+          </a:p>
+          <a:p>
+            <a:pPr algn="ctr" rtl="0"/>
+            <a:r>
+              <a:rPr sz="1300">
+                <a:solidFill>
+                  <a:srgbClr val="666666"/>
+                </a:solidFill>
                 <a:latin typeface="Calibri"/>
-                <a:cs typeface="Arial"/>
-                <a:ea typeface="Calibri"/>
-              </a:rPr>
-              <a:t>LLM accelerates labeling; humans guarantee quality — modern best practice.</a:t>
+              </a:rPr>
+              <a:t>Learner question</a:t>
+            </a:r>
+          </a:p>
+        </p:txBody>
+      </p:sp>
+      <p:sp>
+        <p:nvSpPr>
+          <p:cNvPr id="4" name="Rounded Rectangle 3"/>
+          <p:cNvSpPr/>
+          <p:nvPr/>
+        </p:nvSpPr>
+        <p:spPr>
+          <a:xfrm>
+            <a:off x="640080" y="2697480"/>
+            <a:ext cx="2743200" cy="1143000"/>
+          </a:xfrm>
+          <a:prstGeom prst="roundRect">
+            <a:avLst/>
+          </a:prstGeom>
+          <a:solidFill>
+            <a:srgbClr val="EDEDED"/>
+          </a:solidFill>
+          <a:ln w="12700">
+            <a:solidFill>
+              <a:srgbClr val="1F4E79"/>
+            </a:solidFill>
+          </a:ln>
+          <a:effectLst/>
+        </p:spPr>
+        <p:style>
+          <a:lnRef idx="1">
+            <a:schemeClr val="accent1"/>
+          </a:lnRef>
+          <a:fillRef idx="3">
+            <a:schemeClr val="accent1"/>
+          </a:fillRef>
+          <a:effectRef idx="2">
+            <a:schemeClr val="accent1"/>
+          </a:effectRef>
+          <a:fontRef idx="minor">
+            <a:schemeClr val="lt1"/>
+          </a:fontRef>
+        </p:style>
+        <p:txBody>
+          <a:bodyPr rtlCol="0" anchor="ctr" wrap="square"/>
+          <a:lstStyle/>
+          <a:p>
+            <a:pPr algn="ctr" rtl="1"/>
+            <a:r>
+              <a:rPr sz="1400" b="1">
+                <a:solidFill>
+                  <a:srgbClr val="333333"/>
+                </a:solidFill>
+                <a:latin typeface="Arial"/>
+              </a:rPr>
+              <a:t>ما الاستراتيجية الافتراضية للتقسيم؟</a:t>
+            </a:r>
+          </a:p>
+          <a:p>
+            <a:pPr algn="ctr" rtl="0"/>
+            <a:r>
+              <a:rPr sz="1100">
+                <a:solidFill>
+                  <a:srgbClr val="666666"/>
+                </a:solidFill>
+                <a:latin typeface="Calibri"/>
+              </a:rPr>
+              <a:t>Which chunking default should I use?</a:t>
+            </a:r>
+          </a:p>
+        </p:txBody>
+      </p:sp>
+      <p:sp>
+        <p:nvSpPr>
+          <p:cNvPr id="5" name="Right Arrow 4"/>
+          <p:cNvSpPr/>
+          <p:nvPr/>
+        </p:nvSpPr>
+        <p:spPr>
+          <a:xfrm>
+            <a:off x="3520440" y="3063240"/>
+            <a:ext cx="594360" cy="274320"/>
+          </a:xfrm>
+          <a:prstGeom prst="rightArrow">
+            <a:avLst/>
+          </a:prstGeom>
+          <a:solidFill>
+            <a:srgbClr val="1F4E79"/>
+          </a:solidFill>
+          <a:ln>
+            <a:noFill/>
+          </a:ln>
+          <a:effectLst/>
+        </p:spPr>
+        <p:style>
+          <a:lnRef idx="1">
+            <a:schemeClr val="accent1"/>
+          </a:lnRef>
+          <a:fillRef idx="3">
+            <a:schemeClr val="accent1"/>
+          </a:fillRef>
+          <a:effectRef idx="2">
+            <a:schemeClr val="accent1"/>
+          </a:effectRef>
+          <a:fontRef idx="minor">
+            <a:schemeClr val="lt1"/>
+          </a:fontRef>
+        </p:style>
+        <p:txBody>
+          <a:bodyPr rtlCol="0" anchor="ctr"/>
+          <a:lstStyle/>
+          <a:p>
+            <a:pPr algn="ctr"/>
+          </a:p>
+        </p:txBody>
+      </p:sp>
+      <p:sp>
+        <p:nvSpPr>
+          <p:cNvPr id="6" name="Rounded Rectangle 5"/>
+          <p:cNvSpPr/>
+          <p:nvPr/>
+        </p:nvSpPr>
+        <p:spPr>
+          <a:xfrm>
+            <a:off x="4251960" y="1280160"/>
+            <a:ext cx="3063240" cy="1005840"/>
+          </a:xfrm>
+          <a:prstGeom prst="roundRect">
+            <a:avLst/>
+          </a:prstGeom>
+          <a:solidFill>
+            <a:srgbClr val="E2EFDA"/>
+          </a:solidFill>
+          <a:ln w="12700">
+            <a:solidFill>
+              <a:srgbClr val="1F4E79"/>
+            </a:solidFill>
+          </a:ln>
+          <a:effectLst/>
+        </p:spPr>
+        <p:style>
+          <a:lnRef idx="1">
+            <a:schemeClr val="accent1"/>
+          </a:lnRef>
+          <a:fillRef idx="3">
+            <a:schemeClr val="accent1"/>
+          </a:fillRef>
+          <a:effectRef idx="2">
+            <a:schemeClr val="accent1"/>
+          </a:effectRef>
+          <a:fontRef idx="minor">
+            <a:schemeClr val="lt1"/>
+          </a:fontRef>
+        </p:style>
+        <p:txBody>
+          <a:bodyPr rtlCol="0" anchor="ctr" wrap="square"/>
+          <a:lstStyle/>
+          <a:p>
+            <a:pPr algn="ctr" rtl="1"/>
+            <a:r>
+              <a:rPr sz="1800" b="1">
+                <a:solidFill>
+                  <a:srgbClr val="333333"/>
+                </a:solidFill>
+                <a:latin typeface="Arial"/>
+              </a:rPr>
+              <a:t>أدلة مسترجعة</a:t>
+            </a:r>
+          </a:p>
+          <a:p>
+            <a:pPr algn="ctr" rtl="0"/>
+            <a:r>
+              <a:rPr sz="1300">
+                <a:solidFill>
+                  <a:srgbClr val="666666"/>
+                </a:solidFill>
+                <a:latin typeface="Calibri"/>
+              </a:rPr>
+              <a:t>Retrieved evidence</a:t>
+            </a:r>
+          </a:p>
+        </p:txBody>
+      </p:sp>
+      <p:sp>
+        <p:nvSpPr>
+          <p:cNvPr id="7" name="Rounded Rectangle 6"/>
+          <p:cNvSpPr/>
+          <p:nvPr/>
+        </p:nvSpPr>
+        <p:spPr>
+          <a:xfrm>
+            <a:off x="4251960" y="2514600"/>
+            <a:ext cx="3063240" cy="658368"/>
+          </a:xfrm>
+          <a:prstGeom prst="roundRect">
+            <a:avLst/>
+          </a:prstGeom>
+          <a:solidFill>
+            <a:srgbClr val="EDEDED"/>
+          </a:solidFill>
+          <a:ln w="12700">
+            <a:solidFill>
+              <a:srgbClr val="1F4E79"/>
+            </a:solidFill>
+          </a:ln>
+          <a:effectLst/>
+        </p:spPr>
+        <p:style>
+          <a:lnRef idx="1">
+            <a:schemeClr val="accent1"/>
+          </a:lnRef>
+          <a:fillRef idx="3">
+            <a:schemeClr val="accent1"/>
+          </a:fillRef>
+          <a:effectRef idx="2">
+            <a:schemeClr val="accent1"/>
+          </a:effectRef>
+          <a:fontRef idx="minor">
+            <a:schemeClr val="lt1"/>
+          </a:fontRef>
+        </p:style>
+        <p:txBody>
+          <a:bodyPr rtlCol="0" anchor="ctr" wrap="square"/>
+          <a:lstStyle/>
+          <a:p>
+            <a:pPr algn="ctr" rtl="1"/>
+            <a:r>
+              <a:rPr sz="1200" b="1">
+                <a:solidFill>
+                  <a:srgbClr val="333333"/>
+                </a:solidFill>
+                <a:latin typeface="Arial"/>
+              </a:rPr>
+              <a:t>[1] الفقرات ← الجمل ← التقسيم</a:t>
+            </a:r>
+          </a:p>
+          <a:p>
+            <a:pPr algn="ctr" rtl="0"/>
+            <a:r>
+              <a:rPr sz="1000">
+                <a:solidFill>
+                  <a:srgbClr val="666666"/>
+                </a:solidFill>
+                <a:latin typeface="Calibri"/>
+              </a:rPr>
+              <a:t>[1] paragraphs → sentences → split</a:t>
+            </a:r>
+          </a:p>
+        </p:txBody>
+      </p:sp>
+      <p:sp>
+        <p:nvSpPr>
+          <p:cNvPr id="8" name="Rounded Rectangle 7"/>
+          <p:cNvSpPr/>
+          <p:nvPr/>
+        </p:nvSpPr>
+        <p:spPr>
+          <a:xfrm>
+            <a:off x="4251960" y="3310128"/>
+            <a:ext cx="3063240" cy="658368"/>
+          </a:xfrm>
+          <a:prstGeom prst="roundRect">
+            <a:avLst/>
+          </a:prstGeom>
+          <a:solidFill>
+            <a:srgbClr val="EDEDED"/>
+          </a:solidFill>
+          <a:ln w="12700">
+            <a:solidFill>
+              <a:srgbClr val="1F4E79"/>
+            </a:solidFill>
+          </a:ln>
+          <a:effectLst/>
+        </p:spPr>
+        <p:style>
+          <a:lnRef idx="1">
+            <a:schemeClr val="accent1"/>
+          </a:lnRef>
+          <a:fillRef idx="3">
+            <a:schemeClr val="accent1"/>
+          </a:fillRef>
+          <a:effectRef idx="2">
+            <a:schemeClr val="accent1"/>
+          </a:effectRef>
+          <a:fontRef idx="minor">
+            <a:schemeClr val="lt1"/>
+          </a:fontRef>
+        </p:style>
+        <p:txBody>
+          <a:bodyPr rtlCol="0" anchor="ctr" wrap="square"/>
+          <a:lstStyle/>
+          <a:p>
+            <a:pPr algn="ctr" rtl="1"/>
+            <a:r>
+              <a:rPr sz="1200" b="1">
+                <a:solidFill>
+                  <a:srgbClr val="333333"/>
+                </a:solidFill>
+                <a:latin typeface="Arial"/>
+              </a:rPr>
+              <a:t>[2] التكراري هو الخيار الموصى به</a:t>
+            </a:r>
+          </a:p>
+          <a:p>
+            <a:pPr algn="ctr" rtl="0"/>
+            <a:r>
+              <a:rPr sz="1000">
+                <a:solidFill>
+                  <a:srgbClr val="666666"/>
+                </a:solidFill>
+                <a:latin typeface="Calibri"/>
+              </a:rPr>
+              <a:t>[2] recursive is the recommended default</a:t>
+            </a:r>
+          </a:p>
+        </p:txBody>
+      </p:sp>
+      <p:sp>
+        <p:nvSpPr>
+          <p:cNvPr id="9" name="Right Arrow 8"/>
+          <p:cNvSpPr/>
+          <p:nvPr/>
+        </p:nvSpPr>
+        <p:spPr>
+          <a:xfrm>
+            <a:off x="7452360" y="3063240"/>
+            <a:ext cx="594360" cy="274320"/>
+          </a:xfrm>
+          <a:prstGeom prst="rightArrow">
+            <a:avLst/>
+          </a:prstGeom>
+          <a:solidFill>
+            <a:srgbClr val="1F4E79"/>
+          </a:solidFill>
+          <a:ln>
+            <a:noFill/>
+          </a:ln>
+          <a:effectLst/>
+        </p:spPr>
+        <p:style>
+          <a:lnRef idx="1">
+            <a:schemeClr val="accent1"/>
+          </a:lnRef>
+          <a:fillRef idx="3">
+            <a:schemeClr val="accent1"/>
+          </a:fillRef>
+          <a:effectRef idx="2">
+            <a:schemeClr val="accent1"/>
+          </a:effectRef>
+          <a:fontRef idx="minor">
+            <a:schemeClr val="lt1"/>
+          </a:fontRef>
+        </p:style>
+        <p:txBody>
+          <a:bodyPr rtlCol="0" anchor="ctr"/>
+          <a:lstStyle/>
+          <a:p>
+            <a:pPr algn="ctr"/>
+          </a:p>
+        </p:txBody>
+      </p:sp>
+      <p:sp>
+        <p:nvSpPr>
+          <p:cNvPr id="10" name="Rounded Rectangle 9"/>
+          <p:cNvSpPr/>
+          <p:nvPr/>
+        </p:nvSpPr>
+        <p:spPr>
+          <a:xfrm>
+            <a:off x="8183879" y="1417320"/>
+            <a:ext cx="3337560" cy="1097280"/>
+          </a:xfrm>
+          <a:prstGeom prst="roundRect">
+            <a:avLst/>
+          </a:prstGeom>
+          <a:solidFill>
+            <a:srgbClr val="FDE9D9"/>
+          </a:solidFill>
+          <a:ln w="12700">
+            <a:solidFill>
+              <a:srgbClr val="1F4E79"/>
+            </a:solidFill>
+          </a:ln>
+          <a:effectLst/>
+        </p:spPr>
+        <p:style>
+          <a:lnRef idx="1">
+            <a:schemeClr val="accent1"/>
+          </a:lnRef>
+          <a:fillRef idx="3">
+            <a:schemeClr val="accent1"/>
+          </a:fillRef>
+          <a:effectRef idx="2">
+            <a:schemeClr val="accent1"/>
+          </a:effectRef>
+          <a:fontRef idx="minor">
+            <a:schemeClr val="lt1"/>
+          </a:fontRef>
+        </p:style>
+        <p:txBody>
+          <a:bodyPr rtlCol="0" anchor="ctr" wrap="square"/>
+          <a:lstStyle/>
+          <a:p>
+            <a:pPr algn="ctr" rtl="1"/>
+            <a:r>
+              <a:rPr sz="1800" b="1">
+                <a:solidFill>
+                  <a:srgbClr val="333333"/>
+                </a:solidFill>
+                <a:latin typeface="Arial"/>
+              </a:rPr>
+              <a:t>إجابة موثقة</a:t>
+            </a:r>
+          </a:p>
+          <a:p>
+            <a:pPr algn="ctr" rtl="0"/>
+            <a:r>
+              <a:rPr sz="1300">
+                <a:solidFill>
+                  <a:srgbClr val="666666"/>
+                </a:solidFill>
+                <a:latin typeface="Calibri"/>
+              </a:rPr>
+              <a:t>Grounded answer</a:t>
+            </a:r>
+          </a:p>
+        </p:txBody>
+      </p:sp>
+      <p:sp>
+        <p:nvSpPr>
+          <p:cNvPr id="11" name="Rounded Rectangle 10"/>
+          <p:cNvSpPr/>
+          <p:nvPr/>
+        </p:nvSpPr>
+        <p:spPr>
+          <a:xfrm>
+            <a:off x="8183879" y="2697480"/>
+            <a:ext cx="3337560" cy="1143000"/>
+          </a:xfrm>
+          <a:prstGeom prst="roundRect">
+            <a:avLst/>
+          </a:prstGeom>
+          <a:solidFill>
+            <a:srgbClr val="EDEDED"/>
+          </a:solidFill>
+          <a:ln w="12700">
+            <a:solidFill>
+              <a:srgbClr val="1F4E79"/>
+            </a:solidFill>
+          </a:ln>
+          <a:effectLst/>
+        </p:spPr>
+        <p:style>
+          <a:lnRef idx="1">
+            <a:schemeClr val="accent1"/>
+          </a:lnRef>
+          <a:fillRef idx="3">
+            <a:schemeClr val="accent1"/>
+          </a:fillRef>
+          <a:effectRef idx="2">
+            <a:schemeClr val="accent1"/>
+          </a:effectRef>
+          <a:fontRef idx="minor">
+            <a:schemeClr val="lt1"/>
+          </a:fontRef>
+        </p:style>
+        <p:txBody>
+          <a:bodyPr rtlCol="0" anchor="ctr" wrap="square"/>
+          <a:lstStyle/>
+          <a:p>
+            <a:pPr algn="ctr" rtl="1"/>
+            <a:r>
+              <a:rPr sz="1400" b="1">
+                <a:solidFill>
+                  <a:srgbClr val="333333"/>
+                </a:solidFill>
+                <a:latin typeface="Arial"/>
+              </a:rPr>
+              <a:t>ابدأ بالتقسيم التكراري [1][2]</a:t>
+            </a:r>
+          </a:p>
+          <a:p>
+            <a:pPr algn="ctr" rtl="0"/>
+            <a:r>
+              <a:rPr sz="1100">
+                <a:solidFill>
+                  <a:srgbClr val="666666"/>
+                </a:solidFill>
+                <a:latin typeface="Calibri"/>
+              </a:rPr>
+              <a:t>Start with recursive chunking [1][2]</a:t>
+            </a:r>
+          </a:p>
+        </p:txBody>
+      </p:sp>
+      <p:sp>
+        <p:nvSpPr>
+          <p:cNvPr id="12" name="Rounded Rectangle 11"/>
+          <p:cNvSpPr/>
+          <p:nvPr/>
+        </p:nvSpPr>
+        <p:spPr>
+          <a:xfrm>
+            <a:off x="2194560" y="4892040"/>
+            <a:ext cx="7818120" cy="685800"/>
+          </a:xfrm>
+          <a:prstGeom prst="roundRect">
+            <a:avLst/>
+          </a:prstGeom>
+          <a:solidFill>
+            <a:srgbClr val="FDE9D9"/>
+          </a:solidFill>
+          <a:ln w="12700">
+            <a:solidFill>
+              <a:srgbClr val="1F4E79"/>
+            </a:solidFill>
+          </a:ln>
+          <a:effectLst/>
+        </p:spPr>
+        <p:style>
+          <a:lnRef idx="1">
+            <a:schemeClr val="accent1"/>
+          </a:lnRef>
+          <a:fillRef idx="3">
+            <a:schemeClr val="accent1"/>
+          </a:fillRef>
+          <a:effectRef idx="2">
+            <a:schemeClr val="accent1"/>
+          </a:effectRef>
+          <a:fontRef idx="minor">
+            <a:schemeClr val="lt1"/>
+          </a:fontRef>
+        </p:style>
+        <p:txBody>
+          <a:bodyPr rtlCol="0" anchor="ctr" wrap="square"/>
+          <a:lstStyle/>
+          <a:p>
+            <a:pPr algn="ctr" rtl="1"/>
+            <a:r>
+              <a:rPr sz="1400" b="1">
+                <a:solidFill>
+                  <a:srgbClr val="333333"/>
+                </a:solidFill>
+                <a:latin typeface="Arial"/>
+              </a:rPr>
+              <a:t>لا دليل مسترجع؟ قل: لا أعرف / No retrieved evidence? Say: I don't know.</a:t>
+            </a:r>
+          </a:p>
+        </p:txBody>
+      </p:sp>
+      <p:sp>
+        <p:nvSpPr>
+          <p:cNvPr id="13" name="TextBox 12"/>
+          <p:cNvSpPr txBox="1"/>
+          <p:nvPr/>
+        </p:nvSpPr>
+        <p:spPr>
+          <a:xfrm>
+            <a:off x="640080" y="6126480"/>
+            <a:ext cx="10972800" cy="548640"/>
+          </a:xfrm>
+          <a:prstGeom prst="rect">
+            <a:avLst/>
+          </a:prstGeom>
+          <a:noFill/>
+        </p:spPr>
+        <p:txBody>
+          <a:bodyPr wrap="square">
+            <a:spAutoFit/>
+          </a:bodyPr>
+          <a:lstStyle/>
+          <a:p>
+            <a:pPr algn="r" rtl="1"/>
+            <a:r>
+              <a:rPr sz="1400">
+                <a:solidFill>
+                  <a:srgbClr val="666666"/>
+                </a:solidFill>
+                <a:latin typeface="Arial"/>
+              </a:rPr>
+              <a:t>القاعدة: لا تتجاوز الأدلة، واربط كل ادعاء بمصدر.</a:t>
+            </a:r>
+          </a:p>
+          <a:p>
+            <a:pPr algn="r" rtl="0"/>
+            <a:r>
+              <a:t>Rule: do not go beyond the evidence; connect every claim to a source.</a:t>
             </a:r>
           </a:p>
         </p:txBody>
@@ -6351,8 +6926,6 @@
                   <a:srgbClr val="1F3B5C"/>
                 </a:solidFill>
                 <a:latin typeface="Arial"/>
-                <a:cs typeface="Arial"/>
-                <a:ea typeface="Calibri"/>
               </a:rPr>
               <a:t>المعمارية المتدرِّجة Medallion / Medallion Layers</a:t>
             </a:r>
@@ -6408,8 +6981,6 @@
                   <a:srgbClr val="333333"/>
                 </a:solidFill>
                 <a:latin typeface="Arial"/>
-                <a:cs typeface="Arial"/>
-                <a:ea typeface="Calibri"/>
               </a:rPr>
               <a:t>Bronze — بيانات خام غير قابلة للتغيير</a:t>
             </a:r>
@@ -6422,8 +6993,6 @@
                   <a:srgbClr val="666666"/>
                 </a:solidFill>
                 <a:latin typeface="Calibri"/>
-                <a:cs typeface="Arial"/>
-                <a:ea typeface="Calibri"/>
               </a:rPr>
               <a:t>Raw immutable data</a:t>
             </a:r>
@@ -6479,8 +7048,6 @@
                   <a:srgbClr val="333333"/>
                 </a:solidFill>
                 <a:latin typeface="Arial"/>
-                <a:cs typeface="Arial"/>
-                <a:ea typeface="Calibri"/>
               </a:rPr>
               <a:t>Silver — بيانات منقَّاة ومنظَّمة</a:t>
             </a:r>
@@ -6493,8 +7060,6 @@
                   <a:srgbClr val="666666"/>
                 </a:solidFill>
                 <a:latin typeface="Calibri"/>
-                <a:cs typeface="Arial"/>
-                <a:ea typeface="Calibri"/>
               </a:rPr>
               <a:t>Cleansed &amp; structured data</a:t>
             </a:r>
@@ -6550,8 +7115,6 @@
                   <a:srgbClr val="333333"/>
                 </a:solidFill>
                 <a:latin typeface="Arial"/>
-                <a:cs typeface="Arial"/>
-                <a:ea typeface="Calibri"/>
               </a:rPr>
               <a:t>Gold — تجميعات جاهزة للتحليل</a:t>
             </a:r>
@@ -6564,8 +7127,6 @@
                   <a:srgbClr val="666666"/>
                 </a:solidFill>
                 <a:latin typeface="Calibri"/>
-                <a:cs typeface="Arial"/>
-                <a:ea typeface="Calibri"/>
               </a:rPr>
               <a:t>Analytics-ready aggregates</a:t>
             </a:r>
@@ -6689,8 +7250,6 @@
                   <a:srgbClr val="666666"/>
                 </a:solidFill>
                 <a:latin typeface="Arial"/>
-                <a:cs typeface="Arial"/>
-                <a:ea typeface="Calibri"/>
               </a:rPr>
               <a:t>الحوكمة عبر تحسين الجودة بين الطبقات — إدارة مركزية.</a:t>
             </a:r>
@@ -6698,11 +7257,6 @@
           <a:p>
             <a:pPr algn="r" rtl="0"/>
             <a:r>
-              <a:rPr>
-                <a:latin typeface="Calibri"/>
-                <a:cs typeface="Arial"/>
-                <a:ea typeface="Calibri"/>
-              </a:rPr>
               <a:t>Governance via quality improvement between layers — central ownership.</a:t>
             </a:r>
           </a:p>
@@ -6763,8 +7317,6 @@
                   <a:srgbClr val="1F3B5C"/>
                 </a:solidFill>
                 <a:latin typeface="Arial"/>
-                <a:cs typeface="Arial"/>
-                <a:ea typeface="Calibri"/>
               </a:rPr>
               <a:t>أنماط معالجة البيانات الثلاثة / Three Data Patterns</a:t>
             </a:r>
@@ -6820,8 +7372,6 @@
                   <a:srgbClr val="333333"/>
                 </a:solidFill>
                 <a:latin typeface="Arial"/>
-                <a:cs typeface="Arial"/>
-                <a:ea typeface="Calibri"/>
               </a:rPr>
               <a:t>المعمارية المتدرِّجة</a:t>
             </a:r>
@@ -6834,8 +7384,6 @@
                   <a:srgbClr val="666666"/>
                 </a:solidFill>
                 <a:latin typeface="Calibri"/>
-                <a:cs typeface="Arial"/>
-                <a:ea typeface="Calibri"/>
               </a:rPr>
               <a:t>Medallion</a:t>
             </a:r>
@@ -6891,8 +7439,6 @@
                   <a:srgbClr val="333333"/>
                 </a:solidFill>
                 <a:latin typeface="Arial"/>
-                <a:cs typeface="Arial"/>
-                <a:ea typeface="Calibri"/>
               </a:rPr>
               <a:t>فريق مركزي — تحليلات وAI/ML/RAG</a:t>
             </a:r>
@@ -6948,8 +7494,6 @@
                   <a:srgbClr val="333333"/>
                 </a:solidFill>
                 <a:latin typeface="Arial"/>
-                <a:cs typeface="Arial"/>
-                <a:ea typeface="Calibri"/>
               </a:rPr>
               <a:t>مستودع البيانات</a:t>
             </a:r>
@@ -6962,8 +7506,6 @@
                   <a:srgbClr val="666666"/>
                 </a:solidFill>
                 <a:latin typeface="Calibri"/>
-                <a:cs typeface="Arial"/>
-                <a:ea typeface="Calibri"/>
               </a:rPr>
               <a:t>Data Warehouse</a:t>
             </a:r>
@@ -7019,8 +7561,6 @@
                   <a:srgbClr val="333333"/>
                 </a:solidFill>
                 <a:latin typeface="Arial"/>
-                <a:cs typeface="Arial"/>
-                <a:ea typeface="Calibri"/>
               </a:rPr>
               <a:t>فرق BI — تقارير وذكاء أعمال</a:t>
             </a:r>
@@ -7076,8 +7616,6 @@
                   <a:srgbClr val="333333"/>
                 </a:solidFill>
                 <a:latin typeface="Arial"/>
-                <a:cs typeface="Arial"/>
-                <a:ea typeface="Calibri"/>
               </a:rPr>
               <a:t>شبكة البيانات</a:t>
             </a:r>
@@ -7090,8 +7628,6 @@
                   <a:srgbClr val="666666"/>
                 </a:solidFill>
                 <a:latin typeface="Calibri"/>
-                <a:cs typeface="Arial"/>
-                <a:ea typeface="Calibri"/>
               </a:rPr>
               <a:t>Data Mesh</a:t>
             </a:r>
@@ -7147,8 +7683,6 @@
                   <a:srgbClr val="333333"/>
                 </a:solidFill>
                 <a:latin typeface="Arial"/>
-                <a:cs typeface="Arial"/>
-                <a:ea typeface="Calibri"/>
               </a:rPr>
               <a:t>فرق المجالات — مؤسسات كبيرة</a:t>
             </a:r>
@@ -7184,8 +7718,6 @@
                   <a:srgbClr val="666666"/>
                 </a:solidFill>
                 <a:latin typeface="Arial"/>
-                <a:cs typeface="Arial"/>
-                <a:ea typeface="Calibri"/>
               </a:rPr>
               <a:t>المعايير: الفكرة الجوهرية / المالك / الحوكمة / حالة الاستخدام المثلى.</a:t>
             </a:r>
@@ -7193,11 +7725,6 @@
           <a:p>
             <a:pPr algn="r" rtl="0"/>
             <a:r>
-              <a:rPr>
-                <a:latin typeface="Calibri"/>
-                <a:cs typeface="Arial"/>
-                <a:ea typeface="Calibri"/>
-              </a:rPr>
               <a:t>Criteria: core idea / ownership / governance / best use case.</a:t>
             </a:r>
           </a:p>
@@ -7258,8 +7785,6 @@
                   <a:srgbClr val="1F3B5C"/>
                 </a:solidFill>
                 <a:latin typeface="Arial"/>
-                <a:cs typeface="Arial"/>
-                <a:ea typeface="Calibri"/>
               </a:rPr>
               <a:t>منتج البيانات وعقد البيانات / Data Product &amp; Contract</a:t>
             </a:r>
@@ -7315,22 +7840,18 @@
                   <a:srgbClr val="333333"/>
                 </a:solidFill>
                 <a:latin typeface="Arial"/>
-                <a:cs typeface="Arial"/>
-                <a:ea typeface="Calibri"/>
               </a:rPr>
               <a:t>منتج البيانات</a:t>
             </a:r>
           </a:p>
           <a:p>
-            <a:pPr algn="ctr" rtl="1"/>
+            <a:pPr algn="ctr" rtl="0"/>
             <a:r>
               <a:rPr sz="1400">
                 <a:solidFill>
                   <a:srgbClr val="666666"/>
                 </a:solidFill>
-                <a:latin typeface="Arial"/>
-                <a:cs typeface="Arial"/>
-                <a:ea typeface="Calibri"/>
+                <a:latin typeface="Calibri"/>
               </a:rPr>
               <a:t>Data Product — موثوق • موثّق • قابل للاكتشاف</a:t>
             </a:r>
@@ -7386,8 +7907,6 @@
                   <a:srgbClr val="333333"/>
                 </a:solidFill>
                 <a:latin typeface="Arial"/>
-                <a:cs typeface="Arial"/>
-                <a:ea typeface="Calibri"/>
               </a:rPr>
               <a:t>عقد البيانات</a:t>
             </a:r>
@@ -7400,8 +7919,6 @@
                   <a:srgbClr val="666666"/>
                 </a:solidFill>
                 <a:latin typeface="Calibri"/>
-                <a:cs typeface="Arial"/>
-                <a:ea typeface="Calibri"/>
               </a:rPr>
               <a:t>Data Contract</a:t>
             </a:r>
@@ -7457,8 +7974,6 @@
                   <a:srgbClr val="333333"/>
                 </a:solidFill>
                 <a:latin typeface="Arial"/>
-                <a:cs typeface="Arial"/>
-                <a:ea typeface="Calibri"/>
               </a:rPr>
               <a:t>المخطط / Schema</a:t>
             </a:r>
@@ -7514,8 +8029,6 @@
                   <a:srgbClr val="333333"/>
                 </a:solidFill>
                 <a:latin typeface="Arial"/>
-                <a:cs typeface="Arial"/>
-                <a:ea typeface="Calibri"/>
               </a:rPr>
               <a:t>الأمان / Security</a:t>
             </a:r>
@@ -7571,8 +8084,6 @@
                   <a:srgbClr val="333333"/>
                 </a:solidFill>
                 <a:latin typeface="Arial"/>
-                <a:cs typeface="Arial"/>
-                <a:ea typeface="Calibri"/>
               </a:rPr>
               <a:t>مستوى الخدمة / SLA</a:t>
             </a:r>
@@ -7652,8 +8163,6 @@
                   <a:srgbClr val="666666"/>
                 </a:solidFill>
                 <a:latin typeface="Arial"/>
-                <a:cs typeface="Arial"/>
-                <a:ea typeface="Calibri"/>
               </a:rPr>
               <a:t>وحدة التسليم الحديثة في هندسة البيانات.</a:t>
             </a:r>
@@ -7661,11 +8170,6 @@
           <a:p>
             <a:pPr algn="r" rtl="0"/>
             <a:r>
-              <a:rPr>
-                <a:latin typeface="Calibri"/>
-                <a:cs typeface="Arial"/>
-                <a:ea typeface="Calibri"/>
-              </a:rPr>
               <a:t>The modern delivery unit in data engineering.</a:t>
             </a:r>
           </a:p>
@@ -7726,8 +8230,6 @@
                   <a:srgbClr val="1F3B5C"/>
                 </a:solidFill>
                 <a:latin typeface="Arial"/>
-                <a:cs typeface="Arial"/>
-                <a:ea typeface="Calibri"/>
               </a:rPr>
               <a:t>خط أنابيب RAG / RAG Pipeline</a:t>
             </a:r>
@@ -7783,8 +8285,6 @@
                   <a:srgbClr val="333333"/>
                 </a:solidFill>
                 <a:latin typeface="Arial"/>
-                <a:cs typeface="Arial"/>
-                <a:ea typeface="Calibri"/>
               </a:rPr>
               <a:t>1) الفهرسة</a:t>
             </a:r>
@@ -7797,8 +8297,6 @@
                   <a:srgbClr val="666666"/>
                 </a:solidFill>
                 <a:latin typeface="Calibri"/>
-                <a:cs typeface="Arial"/>
-                <a:ea typeface="Calibri"/>
               </a:rPr>
               <a:t>Indexing</a:t>
             </a:r>
@@ -7898,8 +8396,6 @@
                   <a:srgbClr val="333333"/>
                 </a:solidFill>
                 <a:latin typeface="Arial"/>
-                <a:cs typeface="Arial"/>
-                <a:ea typeface="Calibri"/>
               </a:rPr>
               <a:t>2) الاسترجاع</a:t>
             </a:r>
@@ -7912,8 +8408,6 @@
                   <a:srgbClr val="666666"/>
                 </a:solidFill>
                 <a:latin typeface="Calibri"/>
-                <a:cs typeface="Arial"/>
-                <a:ea typeface="Calibri"/>
               </a:rPr>
               <a:t>Retrieval</a:t>
             </a:r>
@@ -8013,8 +8507,6 @@
                   <a:srgbClr val="333333"/>
                 </a:solidFill>
                 <a:latin typeface="Arial"/>
-                <a:cs typeface="Arial"/>
-                <a:ea typeface="Calibri"/>
               </a:rPr>
               <a:t>3) التوليد</a:t>
             </a:r>
@@ -8027,8 +8519,6 @@
                   <a:srgbClr val="666666"/>
                 </a:solidFill>
                 <a:latin typeface="Calibri"/>
-                <a:cs typeface="Arial"/>
-                <a:ea typeface="Calibri"/>
               </a:rPr>
               <a:t>Generation</a:t>
             </a:r>
@@ -8128,8 +8618,6 @@
                   <a:srgbClr val="333333"/>
                 </a:solidFill>
                 <a:latin typeface="Arial"/>
-                <a:cs typeface="Arial"/>
-                <a:ea typeface="Calibri"/>
               </a:rPr>
               <a:t>4) التقييم</a:t>
             </a:r>
@@ -8142,8 +8630,6 @@
                   <a:srgbClr val="666666"/>
                 </a:solidFill>
                 <a:latin typeface="Calibri"/>
-                <a:cs typeface="Arial"/>
-                <a:ea typeface="Calibri"/>
               </a:rPr>
               <a:t>Evaluation</a:t>
             </a:r>
@@ -8243,8 +8729,6 @@
                   <a:srgbClr val="333333"/>
                 </a:solidFill>
                 <a:latin typeface="Arial"/>
-                <a:cs typeface="Arial"/>
-                <a:ea typeface="Calibri"/>
               </a:rPr>
               <a:t>5) التحسين</a:t>
             </a:r>
@@ -8257,8 +8741,6 @@
                   <a:srgbClr val="666666"/>
                 </a:solidFill>
                 <a:latin typeface="Calibri"/>
-                <a:cs typeface="Arial"/>
-                <a:ea typeface="Calibri"/>
               </a:rPr>
               <a:t>Optimization</a:t>
             </a:r>
@@ -8314,8 +8796,6 @@
                   <a:srgbClr val="333333"/>
                 </a:solidFill>
                 <a:latin typeface="Arial"/>
-                <a:cs typeface="Arial"/>
-                <a:ea typeface="Calibri"/>
               </a:rPr>
               <a:t>تقسيم تكراري + HNSW</a:t>
             </a:r>
@@ -8371,8 +8851,6 @@
                   <a:srgbClr val="333333"/>
                 </a:solidFill>
                 <a:latin typeface="Arial"/>
-                <a:cs typeface="Arial"/>
-                <a:ea typeface="Calibri"/>
               </a:rPr>
               <a:t>بحث هجين + إعادة ترتيب</a:t>
             </a:r>
@@ -8428,8 +8906,6 @@
                   <a:srgbClr val="333333"/>
                 </a:solidFill>
                 <a:latin typeface="Arial"/>
-                <a:cs typeface="Arial"/>
-                <a:ea typeface="Calibri"/>
               </a:rPr>
               <a:t>موجِّه مقيَّد بالمصادر</a:t>
             </a:r>
@@ -8485,8 +8961,6 @@
                   <a:srgbClr val="333333"/>
                 </a:solidFill>
                 <a:latin typeface="Arial"/>
-                <a:cs typeface="Arial"/>
-                <a:ea typeface="Calibri"/>
               </a:rPr>
               <a:t>مثلث RAG (RAGAS)</a:t>
             </a:r>
@@ -8542,8 +9016,6 @@
                   <a:srgbClr val="333333"/>
                 </a:solidFill>
                 <a:latin typeface="Arial"/>
-                <a:cs typeface="Arial"/>
-                <a:ea typeface="Calibri"/>
               </a:rPr>
               <a:t>تخزين مؤقت + توجيه</a:t>
             </a:r>
@@ -8579,8 +9051,6 @@
                   <a:srgbClr val="666666"/>
                 </a:solidFill>
                 <a:latin typeface="Arial"/>
-                <a:cs typeface="Arial"/>
-                <a:ea typeface="Calibri"/>
               </a:rPr>
               <a:t>من الفهرسة إلى التقييم — المسار التطبيقي في مختبر L03.</a:t>
             </a:r>
@@ -8588,11 +9058,6 @@
           <a:p>
             <a:pPr algn="r" rtl="0"/>
             <a:r>
-              <a:rPr>
-                <a:latin typeface="Calibri"/>
-                <a:cs typeface="Arial"/>
-                <a:ea typeface="Calibri"/>
-              </a:rPr>
               <a:t>From indexing to evaluation — applied in lab L03.</a:t>
             </a:r>
           </a:p>
@@ -8653,8 +9118,6 @@
                   <a:srgbClr val="1F3B5C"/>
                 </a:solidFill>
                 <a:latin typeface="Arial"/>
-                <a:cs typeface="Arial"/>
-                <a:ea typeface="Calibri"/>
               </a:rPr>
               <a:t>استراتيجيات تقسيم النصوص / Chunking Strategies</a:t>
             </a:r>
@@ -8710,8 +9173,6 @@
                   <a:srgbClr val="333333"/>
                 </a:solidFill>
                 <a:latin typeface="Arial"/>
-                <a:cs typeface="Arial"/>
-                <a:ea typeface="Calibri"/>
               </a:rPr>
               <a:t>ثابت الحجم</a:t>
             </a:r>
@@ -8724,8 +9185,6 @@
                   <a:srgbClr val="666666"/>
                 </a:solidFill>
                 <a:latin typeface="Calibri"/>
-                <a:cs typeface="Arial"/>
-                <a:ea typeface="Calibri"/>
               </a:rPr>
               <a:t>Fixed-size</a:t>
             </a:r>
@@ -8781,8 +9240,6 @@
                   <a:srgbClr val="333333"/>
                 </a:solidFill>
                 <a:latin typeface="Arial"/>
-                <a:cs typeface="Arial"/>
-                <a:ea typeface="Calibri"/>
               </a:rPr>
               <a:t>أبسطها — يقطع الجُمل</a:t>
             </a:r>
@@ -8838,8 +9295,6 @@
                   <a:srgbClr val="333333"/>
                 </a:solidFill>
                 <a:latin typeface="Arial"/>
-                <a:cs typeface="Arial"/>
-                <a:ea typeface="Calibri"/>
               </a:rPr>
               <a:t>دلالي</a:t>
             </a:r>
@@ -8852,8 +9307,6 @@
                   <a:srgbClr val="666666"/>
                 </a:solidFill>
                 <a:latin typeface="Calibri"/>
-                <a:cs typeface="Arial"/>
-                <a:ea typeface="Calibri"/>
               </a:rPr>
               <a:t>Semantic</a:t>
             </a:r>
@@ -8909,8 +9362,6 @@
                   <a:srgbClr val="333333"/>
                 </a:solidFill>
                 <a:latin typeface="Arial"/>
-                <a:cs typeface="Arial"/>
-                <a:ea typeface="Calibri"/>
               </a:rPr>
               <a:t>تماسك أفضل — حساس للعتبة</a:t>
             </a:r>
@@ -8966,8 +9417,6 @@
                   <a:srgbClr val="333333"/>
                 </a:solidFill>
                 <a:latin typeface="Arial"/>
-                <a:cs typeface="Arial"/>
-                <a:ea typeface="Calibri"/>
               </a:rPr>
               <a:t>تكراري ★</a:t>
             </a:r>
@@ -8980,8 +9429,6 @@
                   <a:srgbClr val="666666"/>
                 </a:solidFill>
                 <a:latin typeface="Calibri"/>
-                <a:cs typeface="Arial"/>
-                <a:ea typeface="Calibri"/>
               </a:rPr>
               <a:t>Recursive</a:t>
             </a:r>
@@ -9037,8 +9484,6 @@
                   <a:srgbClr val="333333"/>
                 </a:solidFill>
                 <a:latin typeface="Arial"/>
-                <a:cs typeface="Arial"/>
-                <a:ea typeface="Calibri"/>
               </a:rPr>
               <a:t>الموصى به افتراضيًا</a:t>
             </a:r>
@@ -9094,8 +9539,6 @@
                   <a:srgbClr val="333333"/>
                 </a:solidFill>
                 <a:latin typeface="Arial"/>
-                <a:cs typeface="Arial"/>
-                <a:ea typeface="Calibri"/>
               </a:rPr>
               <a:t>بحسب البنية</a:t>
             </a:r>
@@ -9108,8 +9551,6 @@
                   <a:srgbClr val="666666"/>
                 </a:solidFill>
                 <a:latin typeface="Calibri"/>
-                <a:cs typeface="Arial"/>
-                <a:ea typeface="Calibri"/>
               </a:rPr>
               <a:t>Structure-based</a:t>
             </a:r>
@@ -9165,8 +9606,6 @@
                   <a:srgbClr val="333333"/>
                 </a:solidFill>
                 <a:latin typeface="Arial"/>
-                <a:cs typeface="Arial"/>
-                <a:ea typeface="Calibri"/>
               </a:rPr>
               <a:t>عناوين وأقسام — يُدمج مع التكراري</a:t>
             </a:r>
@@ -9222,8 +9661,6 @@
                   <a:srgbClr val="333333"/>
                 </a:solidFill>
                 <a:latin typeface="Arial"/>
-                <a:cs typeface="Arial"/>
-                <a:ea typeface="Calibri"/>
               </a:rPr>
               <a:t>بالنموذج اللغوي</a:t>
             </a:r>
@@ -9236,8 +9673,6 @@
                   <a:srgbClr val="666666"/>
                 </a:solidFill>
                 <a:latin typeface="Calibri"/>
-                <a:cs typeface="Arial"/>
-                <a:ea typeface="Calibri"/>
               </a:rPr>
               <a:t>LLM-based</a:t>
             </a:r>
@@ -9293,8 +9728,6 @@
                   <a:srgbClr val="333333"/>
                 </a:solidFill>
                 <a:latin typeface="Arial"/>
-                <a:cs typeface="Arial"/>
-                <a:ea typeface="Calibri"/>
               </a:rPr>
               <a:t>الأدق — الأغلى حسابيًا</a:t>
             </a:r>
@@ -9330,8 +9763,6 @@
                   <a:srgbClr val="666666"/>
                 </a:solidFill>
                 <a:latin typeface="Arial"/>
-                <a:cs typeface="Arial"/>
-                <a:ea typeface="Calibri"/>
               </a:rPr>
               <a:t>★ التقسيم التكراري: فصل بالفقرات ثم تقسيم ما تجاوز الحد الأقصى.</a:t>
             </a:r>
@@ -9339,11 +9770,6 @@
           <a:p>
             <a:pPr algn="r" rtl="0"/>
             <a:r>
-              <a:rPr>
-                <a:latin typeface="Calibri"/>
-                <a:cs typeface="Arial"/>
-                <a:ea typeface="Calibri"/>
-              </a:rPr>
               <a:t>★ Recursive: split by paragraphs, then oversized chunks.</a:t>
             </a:r>
           </a:p>
@@ -9404,8 +9830,6 @@
                   <a:srgbClr val="1F3B5C"/>
                 </a:solidFill>
                 <a:latin typeface="Arial"/>
-                <a:cs typeface="Arial"/>
-                <a:ea typeface="Calibri"/>
               </a:rPr>
               <a:t>مثلث تقييم RAG / RAG Evaluation Triad</a:t>
             </a:r>
@@ -9507,8 +9931,6 @@
                   <a:srgbClr val="333333"/>
                 </a:solidFill>
                 <a:latin typeface="Arial"/>
-                <a:cs typeface="Arial"/>
-                <a:ea typeface="Calibri"/>
               </a:rPr>
               <a:t>الوفاء بالمصدر</a:t>
             </a:r>
@@ -9521,8 +9943,6 @@
                   <a:srgbClr val="666666"/>
                 </a:solidFill>
                 <a:latin typeface="Calibri"/>
-                <a:cs typeface="Arial"/>
-                <a:ea typeface="Calibri"/>
               </a:rPr>
               <a:t>Faithfulness</a:t>
             </a:r>
@@ -9578,8 +9998,6 @@
                   <a:srgbClr val="333333"/>
                 </a:solidFill>
                 <a:latin typeface="Arial"/>
-                <a:cs typeface="Arial"/>
-                <a:ea typeface="Calibri"/>
               </a:rPr>
               <a:t>ملاءمة الإجابة</a:t>
             </a:r>
@@ -9592,8 +10010,6 @@
                   <a:srgbClr val="666666"/>
                 </a:solidFill>
                 <a:latin typeface="Calibri"/>
-                <a:cs typeface="Arial"/>
-                <a:ea typeface="Calibri"/>
               </a:rPr>
               <a:t>Answer Relevancy</a:t>
             </a:r>
@@ -9649,8 +10065,6 @@
                   <a:srgbClr val="333333"/>
                 </a:solidFill>
                 <a:latin typeface="Arial"/>
-                <a:cs typeface="Arial"/>
-                <a:ea typeface="Calibri"/>
               </a:rPr>
               <a:t>دقة السياق</a:t>
             </a:r>
@@ -9663,8 +10077,6 @@
                   <a:srgbClr val="666666"/>
                 </a:solidFill>
                 <a:latin typeface="Calibri"/>
-                <a:cs typeface="Arial"/>
-                <a:ea typeface="Calibri"/>
               </a:rPr>
               <a:t>Context Precision</a:t>
             </a:r>
@@ -9700,8 +10112,6 @@
                   <a:srgbClr val="666666"/>
                 </a:solidFill>
                 <a:latin typeface="Arial"/>
-                <a:cs typeface="Arial"/>
-                <a:ea typeface="Calibri"/>
               </a:rPr>
               <a:t>يُقاس بإطار RAGAS — الوفاء يمنع الهلوسة والملاءمة تجعل الإجابة نافعة.</a:t>
             </a:r>
@@ -9709,11 +10119,6 @@
           <a:p>
             <a:pPr algn="r" rtl="0"/>
             <a:r>
-              <a:rPr>
-                <a:latin typeface="Calibri"/>
-                <a:cs typeface="Arial"/>
-                <a:ea typeface="Calibri"/>
-              </a:rPr>
               <a:t>Measured with RAGAS — faithfulness prevents hallucination; relevancy keeps answers useful.</a:t>
             </a:r>
           </a:p>
@@ -9774,8 +10179,6 @@
                   <a:srgbClr val="1F3B5C"/>
                 </a:solidFill>
                 <a:latin typeface="Arial"/>
-                <a:cs typeface="Arial"/>
-                <a:ea typeface="Calibri"/>
               </a:rPr>
               <a:t>المعمارية المرجعية للذكاء التوليدي / GenAI Reference Architecture</a:t>
             </a:r>
@@ -9831,8 +10234,6 @@
                   <a:srgbClr val="333333"/>
                 </a:solidFill>
                 <a:latin typeface="Arial"/>
-                <a:cs typeface="Arial"/>
-                <a:ea typeface="Calibri"/>
               </a:rPr>
               <a:t>أ. بوابة منصة GenAI</a:t>
             </a:r>
@@ -9845,8 +10246,6 @@
                   <a:srgbClr val="666666"/>
                 </a:solidFill>
                 <a:latin typeface="Calibri"/>
-                <a:cs typeface="Arial"/>
-                <a:ea typeface="Calibri"/>
               </a:rPr>
               <a:t>A. Platform Portal — POC → MVP → PROD</a:t>
             </a:r>
@@ -9902,8 +10301,6 @@
                   <a:srgbClr val="333333"/>
                 </a:solidFill>
                 <a:latin typeface="Arial"/>
-                <a:cs typeface="Arial"/>
-                <a:ea typeface="Calibri"/>
               </a:rPr>
               <a:t>ب. الأتمتة والامتثال</a:t>
             </a:r>
@@ -9916,8 +10313,6 @@
                   <a:srgbClr val="666666"/>
                 </a:solidFill>
                 <a:latin typeface="Calibri"/>
-                <a:cs typeface="Arial"/>
-                <a:ea typeface="Calibri"/>
               </a:rPr>
               <a:t>B. Automation &amp; Compliance — CI/CD gates</a:t>
             </a:r>
@@ -9973,8 +10368,6 @@
                   <a:srgbClr val="333333"/>
                 </a:solidFill>
                 <a:latin typeface="Arial"/>
-                <a:cs typeface="Arial"/>
-                <a:ea typeface="Calibri"/>
               </a:rPr>
               <a:t>ج. الخدمات المشتركة</a:t>
             </a:r>
@@ -9987,8 +10380,6 @@
                   <a:srgbClr val="666666"/>
                 </a:solidFill>
                 <a:latin typeface="Calibri"/>
-                <a:cs typeface="Arial"/>
-                <a:ea typeface="Calibri"/>
               </a:rPr>
               <a:t>C. Shared Services — Gateway, Prompts, Audit, Guardrails</a:t>
             </a:r>
@@ -10044,8 +10435,6 @@
                   <a:srgbClr val="333333"/>
                 </a:solidFill>
                 <a:latin typeface="Arial"/>
-                <a:cs typeface="Arial"/>
-                <a:ea typeface="Calibri"/>
               </a:rPr>
               <a:t>د. الحوكمة والمراقبة</a:t>
             </a:r>
@@ -10058,8 +10447,6 @@
                   <a:srgbClr val="666666"/>
                 </a:solidFill>
                 <a:latin typeface="Calibri"/>
-                <a:cs typeface="Arial"/>
-                <a:ea typeface="Calibri"/>
               </a:rPr>
               <a:t>D. Governance &amp; Monitoring — Responsible AI, FinOps</a:t>
             </a:r>
@@ -10095,8 +10482,6 @@
                   <a:srgbClr val="666666"/>
                 </a:solidFill>
                 <a:latin typeface="Arial"/>
-                <a:cs typeface="Arial"/>
-                <a:ea typeface="Calibri"/>
               </a:rPr>
               <a:t>النمط المرجعي المؤسسي (McKinsey) — نافذة موحدة فوق خدمات مشتركة محكومة.</a:t>
             </a:r>
@@ -10104,11 +10489,6 @@
           <a:p>
             <a:pPr algn="r" rtl="0"/>
             <a:r>
-              <a:rPr>
-                <a:latin typeface="Calibri"/>
-                <a:cs typeface="Arial"/>
-                <a:ea typeface="Calibri"/>
-              </a:rPr>
               <a:t>Enterprise reference pattern (McKinsey) — a unified pane over governed shared services.</a:t>
             </a:r>
           </a:p>
@@ -10169,8 +10549,6 @@
                   <a:srgbClr val="1F3B5C"/>
                 </a:solidFill>
                 <a:latin typeface="Arial"/>
-                <a:cs typeface="Arial"/>
-                <a:ea typeface="Calibri"/>
               </a:rPr>
               <a:t>التكلفة عمليًا: التضمين مقابل التوليد / Cost: Embedding vs Generation</a:t>
             </a:r>
@@ -10226,8 +10604,6 @@
                   <a:srgbClr val="333333"/>
                 </a:solidFill>
                 <a:latin typeface="Arial"/>
-                <a:cs typeface="Arial"/>
-                <a:ea typeface="Calibri"/>
               </a:rPr>
               <a:t>التضمين 1x</a:t>
             </a:r>
@@ -10240,8 +10616,6 @@
                   <a:srgbClr val="666666"/>
                 </a:solidFill>
                 <a:latin typeface="Calibri"/>
-                <a:cs typeface="Arial"/>
-                <a:ea typeface="Calibri"/>
               </a:rPr>
               <a:t>Embedding — cheap</a:t>
             </a:r>
@@ -10297,8 +10671,6 @@
                   <a:srgbClr val="333333"/>
                 </a:solidFill>
                 <a:latin typeface="Arial"/>
-                <a:cs typeface="Arial"/>
-                <a:ea typeface="Calibri"/>
               </a:rPr>
               <a:t>التوليد ~10x</a:t>
             </a:r>
@@ -10311,8 +10683,6 @@
                   <a:srgbClr val="666666"/>
                 </a:solidFill>
                 <a:latin typeface="Calibri"/>
-                <a:cs typeface="Arial"/>
-                <a:ea typeface="Calibri"/>
               </a:rPr>
               <a:t>Generation — costly</a:t>
             </a:r>
@@ -10368,8 +10738,6 @@
                   <a:srgbClr val="333333"/>
                 </a:solidFill>
                 <a:latin typeface="Arial"/>
-                <a:cs typeface="Arial"/>
-                <a:ea typeface="Calibri"/>
               </a:rPr>
               <a:t>الحل: تخزين مؤقت + توجيه</a:t>
             </a:r>
@@ -10382,8 +10750,6 @@
                   <a:srgbClr val="666666"/>
                 </a:solidFill>
                 <a:latin typeface="Calibri"/>
-                <a:cs typeface="Arial"/>
-                <a:ea typeface="Calibri"/>
               </a:rPr>
               <a:t>Fix: caching + routing</a:t>
             </a:r>
@@ -10419,8 +10785,6 @@
                   <a:srgbClr val="666666"/>
                 </a:solidFill>
                 <a:latin typeface="Arial"/>
-                <a:cs typeface="Arial"/>
-                <a:ea typeface="Calibri"/>
               </a:rPr>
               <a:t>قاعدة FinOps: قِس التكلفة لكل طلب قبل التوسع.</a:t>
             </a:r>
@@ -10428,11 +10792,6 @@
           <a:p>
             <a:pPr algn="r" rtl="0"/>
             <a:r>
-              <a:rPr>
-                <a:latin typeface="Calibri"/>
-                <a:cs typeface="Arial"/>
-                <a:ea typeface="Calibri"/>
-              </a:rPr>
               <a:t>FinOps rule: measure per-request cost before scaling.</a:t>
             </a:r>
           </a:p>

--- a/output/Module02_Visualizations.pptx
+++ b/output/Module02_Visualizations.pptx
@@ -18,6 +18,13 @@
     <p:sldId id="266" r:id="rId17"/>
     <p:sldId id="267" r:id="rId18"/>
     <p:sldId id="268" r:id="rId19"/>
+    <p:sldId id="269" r:id="rId20"/>
+    <p:sldId id="270" r:id="rId21"/>
+    <p:sldId id="271" r:id="rId22"/>
+    <p:sldId id="272" r:id="rId23"/>
+    <p:sldId id="273" r:id="rId24"/>
+    <p:sldId id="274" r:id="rId25"/>
+    <p:sldId id="275" r:id="rId26"/>
   </p:sldIdLst>
   <p:sldSz cx="12191695" cy="6858000" type="screen4x3"/>
   <p:notesSz cx="6858000" cy="9144000"/>
@@ -6879,6 +6886,3789 @@
 </p:sld>
 </file>
 
+<file path=ppt/slides/slide14.xml><?xml version="1.0" encoding="utf-8"?>
+<p:sld xmlns:a="http://schemas.openxmlformats.org/drawingml/2006/main" xmlns:p="http://schemas.openxmlformats.org/presentationml/2006/main" xmlns:r="http://schemas.openxmlformats.org/officeDocument/2006/relationships">
+  <p:cSld>
+    <p:bg>
+      <p:bgPr>
+        <a:solidFill>
+          <a:srgbClr val="FFFFFF"/>
+        </a:solidFill>
+        <a:effectLst/>
+      </p:bgPr>
+    </p:bg>
+    <p:spTree>
+      <p:nvGrpSpPr>
+        <p:cNvPr id="1" name=""/>
+        <p:cNvGrpSpPr/>
+        <p:nvPr/>
+      </p:nvGrpSpPr>
+      <p:grpSpPr/>
+      <p:sp>
+        <p:nvSpPr>
+          <p:cNvPr id="2" name="TextBox 1"/>
+          <p:cNvSpPr txBox="1"/>
+          <p:nvPr/>
+        </p:nvSpPr>
+        <p:spPr>
+          <a:xfrm>
+            <a:off x="640080" y="137160"/>
+            <a:ext cx="10972800" cy="640080"/>
+          </a:xfrm>
+          <a:prstGeom prst="rect">
+            <a:avLst/>
+          </a:prstGeom>
+          <a:noFill/>
+        </p:spPr>
+        <p:txBody>
+          <a:bodyPr wrap="none">
+            <a:spAutoFit/>
+          </a:bodyPr>
+          <a:lstStyle/>
+          <a:p>
+            <a:pPr algn="r" rtl="1"/>
+            <a:r>
+              <a:rPr sz="3000" b="1">
+                <a:solidFill>
+                  <a:srgbClr val="1F3B5C"/>
+                </a:solidFill>
+                <a:latin typeface="Arial"/>
+              </a:rPr>
+              <a:t>طيف البيانات والتنسيقات / Data Spectrum &amp; Formats</a:t>
+            </a:r>
+          </a:p>
+        </p:txBody>
+      </p:sp>
+      <p:sp>
+        <p:nvSpPr>
+          <p:cNvPr id="3" name="Rounded Rectangle 2"/>
+          <p:cNvSpPr/>
+          <p:nvPr/>
+        </p:nvSpPr>
+        <p:spPr>
+          <a:xfrm>
+            <a:off x="640080" y="1325880"/>
+            <a:ext cx="3520440" cy="960120"/>
+          </a:xfrm>
+          <a:prstGeom prst="roundRect">
+            <a:avLst/>
+          </a:prstGeom>
+          <a:solidFill>
+            <a:srgbClr val="DCE6F1"/>
+          </a:solidFill>
+          <a:ln w="12700">
+            <a:solidFill>
+              <a:srgbClr val="1F4E79"/>
+            </a:solidFill>
+          </a:ln>
+          <a:effectLst/>
+        </p:spPr>
+        <p:style>
+          <a:lnRef idx="1">
+            <a:schemeClr val="accent1"/>
+          </a:lnRef>
+          <a:fillRef idx="3">
+            <a:schemeClr val="accent1"/>
+          </a:fillRef>
+          <a:effectRef idx="2">
+            <a:schemeClr val="accent1"/>
+          </a:effectRef>
+          <a:fontRef idx="minor">
+            <a:schemeClr val="lt1"/>
+          </a:fontRef>
+        </p:style>
+        <p:txBody>
+          <a:bodyPr rtlCol="0" anchor="ctr" wrap="square"/>
+          <a:lstStyle/>
+          <a:p>
+            <a:pPr algn="ctr" rtl="1"/>
+            <a:r>
+              <a:rPr sz="1800" b="1">
+                <a:solidFill>
+                  <a:srgbClr val="333333"/>
+                </a:solidFill>
+                <a:latin typeface="Arial"/>
+              </a:rPr>
+              <a:t>مهيكلة</a:t>
+            </a:r>
+          </a:p>
+          <a:p>
+            <a:pPr algn="ctr" rtl="0"/>
+            <a:r>
+              <a:rPr sz="1300">
+                <a:solidFill>
+                  <a:srgbClr val="666666"/>
+                </a:solidFill>
+                <a:latin typeface="Calibri"/>
+              </a:rPr>
+              <a:t>Structured</a:t>
+            </a:r>
+          </a:p>
+        </p:txBody>
+      </p:sp>
+      <p:sp>
+        <p:nvSpPr>
+          <p:cNvPr id="4" name="Rounded Rectangle 3"/>
+          <p:cNvSpPr/>
+          <p:nvPr/>
+        </p:nvSpPr>
+        <p:spPr>
+          <a:xfrm>
+            <a:off x="640080" y="2468880"/>
+            <a:ext cx="3520440" cy="914400"/>
+          </a:xfrm>
+          <a:prstGeom prst="roundRect">
+            <a:avLst/>
+          </a:prstGeom>
+          <a:solidFill>
+            <a:srgbClr val="EDEDED"/>
+          </a:solidFill>
+          <a:ln w="12700">
+            <a:solidFill>
+              <a:srgbClr val="1F4E79"/>
+            </a:solidFill>
+          </a:ln>
+          <a:effectLst/>
+        </p:spPr>
+        <p:style>
+          <a:lnRef idx="1">
+            <a:schemeClr val="accent1"/>
+          </a:lnRef>
+          <a:fillRef idx="3">
+            <a:schemeClr val="accent1"/>
+          </a:fillRef>
+          <a:effectRef idx="2">
+            <a:schemeClr val="accent1"/>
+          </a:effectRef>
+          <a:fontRef idx="minor">
+            <a:schemeClr val="lt1"/>
+          </a:fontRef>
+        </p:style>
+        <p:txBody>
+          <a:bodyPr rtlCol="0" anchor="ctr" wrap="square"/>
+          <a:lstStyle/>
+          <a:p>
+            <a:pPr algn="ctr" rtl="1"/>
+            <a:r>
+              <a:rPr sz="1400" b="1">
+                <a:solidFill>
+                  <a:srgbClr val="333333"/>
+                </a:solidFill>
+                <a:latin typeface="Arial"/>
+              </a:rPr>
+              <a:t>جداول / Tables</a:t>
+            </a:r>
+          </a:p>
+          <a:p>
+            <a:pPr algn="ctr" rtl="0"/>
+            <a:r>
+              <a:rPr sz="1200">
+                <a:solidFill>
+                  <a:srgbClr val="666666"/>
+                </a:solidFill>
+                <a:latin typeface="Calibri"/>
+              </a:rPr>
+              <a:t>CSV • Parquet</a:t>
+            </a:r>
+          </a:p>
+        </p:txBody>
+      </p:sp>
+      <p:sp>
+        <p:nvSpPr>
+          <p:cNvPr id="5" name="Rounded Rectangle 4"/>
+          <p:cNvSpPr/>
+          <p:nvPr/>
+        </p:nvSpPr>
+        <p:spPr>
+          <a:xfrm>
+            <a:off x="4343400" y="1325880"/>
+            <a:ext cx="3520440" cy="960120"/>
+          </a:xfrm>
+          <a:prstGeom prst="roundRect">
+            <a:avLst/>
+          </a:prstGeom>
+          <a:solidFill>
+            <a:srgbClr val="E2EFDA"/>
+          </a:solidFill>
+          <a:ln w="12700">
+            <a:solidFill>
+              <a:srgbClr val="1F4E79"/>
+            </a:solidFill>
+          </a:ln>
+          <a:effectLst/>
+        </p:spPr>
+        <p:style>
+          <a:lnRef idx="1">
+            <a:schemeClr val="accent1"/>
+          </a:lnRef>
+          <a:fillRef idx="3">
+            <a:schemeClr val="accent1"/>
+          </a:fillRef>
+          <a:effectRef idx="2">
+            <a:schemeClr val="accent1"/>
+          </a:effectRef>
+          <a:fontRef idx="minor">
+            <a:schemeClr val="lt1"/>
+          </a:fontRef>
+        </p:style>
+        <p:txBody>
+          <a:bodyPr rtlCol="0" anchor="ctr" wrap="square"/>
+          <a:lstStyle/>
+          <a:p>
+            <a:pPr algn="ctr" rtl="1"/>
+            <a:r>
+              <a:rPr sz="1800" b="1">
+                <a:solidFill>
+                  <a:srgbClr val="333333"/>
+                </a:solidFill>
+                <a:latin typeface="Arial"/>
+              </a:rPr>
+              <a:t>شبه مهيكلة</a:t>
+            </a:r>
+          </a:p>
+          <a:p>
+            <a:pPr algn="ctr" rtl="0"/>
+            <a:r>
+              <a:rPr sz="1300">
+                <a:solidFill>
+                  <a:srgbClr val="666666"/>
+                </a:solidFill>
+                <a:latin typeface="Calibri"/>
+              </a:rPr>
+              <a:t>Semi-structured</a:t>
+            </a:r>
+          </a:p>
+        </p:txBody>
+      </p:sp>
+      <p:sp>
+        <p:nvSpPr>
+          <p:cNvPr id="6" name="Rounded Rectangle 5"/>
+          <p:cNvSpPr/>
+          <p:nvPr/>
+        </p:nvSpPr>
+        <p:spPr>
+          <a:xfrm>
+            <a:off x="4343400" y="2468880"/>
+            <a:ext cx="3520440" cy="914400"/>
+          </a:xfrm>
+          <a:prstGeom prst="roundRect">
+            <a:avLst/>
+          </a:prstGeom>
+          <a:solidFill>
+            <a:srgbClr val="EDEDED"/>
+          </a:solidFill>
+          <a:ln w="12700">
+            <a:solidFill>
+              <a:srgbClr val="1F4E79"/>
+            </a:solidFill>
+          </a:ln>
+          <a:effectLst/>
+        </p:spPr>
+        <p:style>
+          <a:lnRef idx="1">
+            <a:schemeClr val="accent1"/>
+          </a:lnRef>
+          <a:fillRef idx="3">
+            <a:schemeClr val="accent1"/>
+          </a:fillRef>
+          <a:effectRef idx="2">
+            <a:schemeClr val="accent1"/>
+          </a:effectRef>
+          <a:fontRef idx="minor">
+            <a:schemeClr val="lt1"/>
+          </a:fontRef>
+        </p:style>
+        <p:txBody>
+          <a:bodyPr rtlCol="0" anchor="ctr" wrap="square"/>
+          <a:lstStyle/>
+          <a:p>
+            <a:pPr algn="ctr" rtl="1"/>
+            <a:r>
+              <a:rPr sz="1400" b="1">
+                <a:solidFill>
+                  <a:srgbClr val="333333"/>
+                </a:solidFill>
+                <a:latin typeface="Arial"/>
+              </a:rPr>
+              <a:t>سجلات مرنة / Flexible records</a:t>
+            </a:r>
+          </a:p>
+          <a:p>
+            <a:pPr algn="ctr" rtl="0"/>
+            <a:r>
+              <a:rPr sz="1200">
+                <a:solidFill>
+                  <a:srgbClr val="666666"/>
+                </a:solidFill>
+                <a:latin typeface="Calibri"/>
+              </a:rPr>
+              <a:t>JSON • Avro</a:t>
+            </a:r>
+          </a:p>
+        </p:txBody>
+      </p:sp>
+      <p:sp>
+        <p:nvSpPr>
+          <p:cNvPr id="7" name="Rounded Rectangle 6"/>
+          <p:cNvSpPr/>
+          <p:nvPr/>
+        </p:nvSpPr>
+        <p:spPr>
+          <a:xfrm>
+            <a:off x="8046720" y="1325880"/>
+            <a:ext cx="3520440" cy="960120"/>
+          </a:xfrm>
+          <a:prstGeom prst="roundRect">
+            <a:avLst/>
+          </a:prstGeom>
+          <a:solidFill>
+            <a:srgbClr val="FDE9D9"/>
+          </a:solidFill>
+          <a:ln w="12700">
+            <a:solidFill>
+              <a:srgbClr val="1F4E79"/>
+            </a:solidFill>
+          </a:ln>
+          <a:effectLst/>
+        </p:spPr>
+        <p:style>
+          <a:lnRef idx="1">
+            <a:schemeClr val="accent1"/>
+          </a:lnRef>
+          <a:fillRef idx="3">
+            <a:schemeClr val="accent1"/>
+          </a:fillRef>
+          <a:effectRef idx="2">
+            <a:schemeClr val="accent1"/>
+          </a:effectRef>
+          <a:fontRef idx="minor">
+            <a:schemeClr val="lt1"/>
+          </a:fontRef>
+        </p:style>
+        <p:txBody>
+          <a:bodyPr rtlCol="0" anchor="ctr" wrap="square"/>
+          <a:lstStyle/>
+          <a:p>
+            <a:pPr algn="ctr" rtl="1"/>
+            <a:r>
+              <a:rPr sz="1800" b="1">
+                <a:solidFill>
+                  <a:srgbClr val="333333"/>
+                </a:solidFill>
+                <a:latin typeface="Arial"/>
+              </a:rPr>
+              <a:t>غير مهيكلة</a:t>
+            </a:r>
+          </a:p>
+          <a:p>
+            <a:pPr algn="ctr" rtl="0"/>
+            <a:r>
+              <a:rPr sz="1300">
+                <a:solidFill>
+                  <a:srgbClr val="666666"/>
+                </a:solidFill>
+                <a:latin typeface="Calibri"/>
+              </a:rPr>
+              <a:t>Unstructured</a:t>
+            </a:r>
+          </a:p>
+        </p:txBody>
+      </p:sp>
+      <p:sp>
+        <p:nvSpPr>
+          <p:cNvPr id="8" name="Rounded Rectangle 7"/>
+          <p:cNvSpPr/>
+          <p:nvPr/>
+        </p:nvSpPr>
+        <p:spPr>
+          <a:xfrm>
+            <a:off x="8046720" y="2468880"/>
+            <a:ext cx="3520440" cy="914400"/>
+          </a:xfrm>
+          <a:prstGeom prst="roundRect">
+            <a:avLst/>
+          </a:prstGeom>
+          <a:solidFill>
+            <a:srgbClr val="EDEDED"/>
+          </a:solidFill>
+          <a:ln w="12700">
+            <a:solidFill>
+              <a:srgbClr val="1F4E79"/>
+            </a:solidFill>
+          </a:ln>
+          <a:effectLst/>
+        </p:spPr>
+        <p:style>
+          <a:lnRef idx="1">
+            <a:schemeClr val="accent1"/>
+          </a:lnRef>
+          <a:fillRef idx="3">
+            <a:schemeClr val="accent1"/>
+          </a:fillRef>
+          <a:effectRef idx="2">
+            <a:schemeClr val="accent1"/>
+          </a:effectRef>
+          <a:fontRef idx="minor">
+            <a:schemeClr val="lt1"/>
+          </a:fontRef>
+        </p:style>
+        <p:txBody>
+          <a:bodyPr rtlCol="0" anchor="ctr" wrap="square"/>
+          <a:lstStyle/>
+          <a:p>
+            <a:pPr algn="ctr" rtl="1"/>
+            <a:r>
+              <a:rPr sz="1400" b="1">
+                <a:solidFill>
+                  <a:srgbClr val="333333"/>
+                </a:solidFill>
+                <a:latin typeface="Arial"/>
+              </a:rPr>
+              <a:t>نصوص وصور وصوت / Text, images, audio</a:t>
+            </a:r>
+          </a:p>
+          <a:p>
+            <a:pPr algn="ctr" rtl="0"/>
+            <a:r>
+              <a:rPr sz="1200">
+                <a:solidFill>
+                  <a:srgbClr val="666666"/>
+                </a:solidFill>
+                <a:latin typeface="Calibri"/>
+              </a:rPr>
+              <a:t>PDF • JPG • MP3</a:t>
+            </a:r>
+          </a:p>
+        </p:txBody>
+      </p:sp>
+      <p:sp>
+        <p:nvSpPr>
+          <p:cNvPr id="9" name="Rounded Rectangle 8"/>
+          <p:cNvSpPr/>
+          <p:nvPr/>
+        </p:nvSpPr>
+        <p:spPr>
+          <a:xfrm>
+            <a:off x="1463040" y="4160520"/>
+            <a:ext cx="9235440" cy="777240"/>
+          </a:xfrm>
+          <a:prstGeom prst="roundRect">
+            <a:avLst/>
+          </a:prstGeom>
+          <a:solidFill>
+            <a:srgbClr val="DCE6F1"/>
+          </a:solidFill>
+          <a:ln w="12700">
+            <a:solidFill>
+              <a:srgbClr val="1F4E79"/>
+            </a:solidFill>
+          </a:ln>
+          <a:effectLst/>
+        </p:spPr>
+        <p:style>
+          <a:lnRef idx="1">
+            <a:schemeClr val="accent1"/>
+          </a:lnRef>
+          <a:fillRef idx="3">
+            <a:schemeClr val="accent1"/>
+          </a:fillRef>
+          <a:effectRef idx="2">
+            <a:schemeClr val="accent1"/>
+          </a:effectRef>
+          <a:fontRef idx="minor">
+            <a:schemeClr val="lt1"/>
+          </a:fontRef>
+        </p:style>
+        <p:txBody>
+          <a:bodyPr rtlCol="0" anchor="ctr" wrap="square"/>
+          <a:lstStyle/>
+          <a:p>
+            <a:pPr algn="ctr" rtl="1"/>
+            <a:r>
+              <a:rPr sz="1500" b="1">
+                <a:solidFill>
+                  <a:srgbClr val="333333"/>
+                </a:solidFill>
+                <a:latin typeface="Arial"/>
+              </a:rPr>
+              <a:t>اختر التنسيق حسب الاستخدام: تبادل بسيط ← تحليلات سريعة ← محتوى غني</a:t>
+            </a:r>
+          </a:p>
+          <a:p>
+            <a:pPr algn="ctr" rtl="0"/>
+            <a:r>
+              <a:rPr sz="1200">
+                <a:solidFill>
+                  <a:srgbClr val="666666"/>
+                </a:solidFill>
+                <a:latin typeface="Calibri"/>
+              </a:rPr>
+              <a:t>Choose the format for the job: simple exchange ← fast analytics ← rich content</a:t>
+            </a:r>
+          </a:p>
+        </p:txBody>
+      </p:sp>
+      <p:sp>
+        <p:nvSpPr>
+          <p:cNvPr id="10" name="TextBox 9"/>
+          <p:cNvSpPr txBox="1"/>
+          <p:nvPr/>
+        </p:nvSpPr>
+        <p:spPr>
+          <a:xfrm>
+            <a:off x="640080" y="6126480"/>
+            <a:ext cx="10972800" cy="548640"/>
+          </a:xfrm>
+          <a:prstGeom prst="rect">
+            <a:avLst/>
+          </a:prstGeom>
+          <a:noFill/>
+        </p:spPr>
+        <p:txBody>
+          <a:bodyPr wrap="square">
+            <a:spAutoFit/>
+          </a:bodyPr>
+          <a:lstStyle/>
+          <a:p>
+            <a:pPr algn="r" rtl="1"/>
+            <a:r>
+              <a:rPr sz="1400">
+                <a:solidFill>
+                  <a:srgbClr val="666666"/>
+                </a:solidFill>
+                <a:latin typeface="Arial"/>
+              </a:rPr>
+              <a:t>Parquet عمودي للتحليلات؛ JSON مرن للواجهات؛ الملفات الغنية تحتاج استخراج محتوى.</a:t>
+            </a:r>
+          </a:p>
+          <a:p>
+            <a:pPr algn="r" rtl="0"/>
+            <a:r>
+              <a:t>Parquet is columnar for analytics; JSON is flexible for APIs; rich files need content extraction.</a:t>
+            </a:r>
+          </a:p>
+        </p:txBody>
+      </p:sp>
+    </p:spTree>
+  </p:cSld>
+  <p:clrMapOvr>
+    <a:masterClrMapping/>
+  </p:clrMapOvr>
+</p:sld>
+</file>
+
+<file path=ppt/slides/slide15.xml><?xml version="1.0" encoding="utf-8"?>
+<p:sld xmlns:a="http://schemas.openxmlformats.org/drawingml/2006/main" xmlns:p="http://schemas.openxmlformats.org/presentationml/2006/main" xmlns:r="http://schemas.openxmlformats.org/officeDocument/2006/relationships">
+  <p:cSld>
+    <p:bg>
+      <p:bgPr>
+        <a:solidFill>
+          <a:srgbClr val="FFFFFF"/>
+        </a:solidFill>
+        <a:effectLst/>
+      </p:bgPr>
+    </p:bg>
+    <p:spTree>
+      <p:nvGrpSpPr>
+        <p:cNvPr id="1" name=""/>
+        <p:cNvGrpSpPr/>
+        <p:nvPr/>
+      </p:nvGrpSpPr>
+      <p:grpSpPr/>
+      <p:sp>
+        <p:nvSpPr>
+          <p:cNvPr id="2" name="TextBox 1"/>
+          <p:cNvSpPr txBox="1"/>
+          <p:nvPr/>
+        </p:nvSpPr>
+        <p:spPr>
+          <a:xfrm>
+            <a:off x="640080" y="137160"/>
+            <a:ext cx="10972800" cy="640080"/>
+          </a:xfrm>
+          <a:prstGeom prst="rect">
+            <a:avLst/>
+          </a:prstGeom>
+          <a:noFill/>
+        </p:spPr>
+        <p:txBody>
+          <a:bodyPr wrap="none">
+            <a:spAutoFit/>
+          </a:bodyPr>
+          <a:lstStyle/>
+          <a:p>
+            <a:pPr algn="r" rtl="1"/>
+            <a:r>
+              <a:rPr sz="3000" b="1">
+                <a:solidFill>
+                  <a:srgbClr val="1F3B5C"/>
+                </a:solidFill>
+                <a:latin typeface="Arial"/>
+              </a:rPr>
+              <a:t>خريطة قرار: المستودع مقابل البحيرة / Warehouse vs Lake Decision Map</a:t>
+            </a:r>
+          </a:p>
+        </p:txBody>
+      </p:sp>
+      <p:sp>
+        <p:nvSpPr>
+          <p:cNvPr id="3" name="Rounded Rectangle 2"/>
+          <p:cNvSpPr/>
+          <p:nvPr/>
+        </p:nvSpPr>
+        <p:spPr>
+          <a:xfrm>
+            <a:off x="731520" y="1234440"/>
+            <a:ext cx="5029200" cy="822960"/>
+          </a:xfrm>
+          <a:prstGeom prst="roundRect">
+            <a:avLst/>
+          </a:prstGeom>
+          <a:solidFill>
+            <a:srgbClr val="E2EFDA"/>
+          </a:solidFill>
+          <a:ln w="12700">
+            <a:solidFill>
+              <a:srgbClr val="1F4E79"/>
+            </a:solidFill>
+          </a:ln>
+          <a:effectLst/>
+        </p:spPr>
+        <p:style>
+          <a:lnRef idx="1">
+            <a:schemeClr val="accent1"/>
+          </a:lnRef>
+          <a:fillRef idx="3">
+            <a:schemeClr val="accent1"/>
+          </a:fillRef>
+          <a:effectRef idx="2">
+            <a:schemeClr val="accent1"/>
+          </a:effectRef>
+          <a:fontRef idx="minor">
+            <a:schemeClr val="lt1"/>
+          </a:fontRef>
+        </p:style>
+        <p:txBody>
+          <a:bodyPr rtlCol="0" anchor="ctr" wrap="square"/>
+          <a:lstStyle/>
+          <a:p>
+            <a:pPr algn="ctr" rtl="1"/>
+            <a:r>
+              <a:rPr sz="2000" b="1">
+                <a:solidFill>
+                  <a:srgbClr val="333333"/>
+                </a:solidFill>
+                <a:latin typeface="Arial"/>
+              </a:rPr>
+              <a:t>مستودع البيانات</a:t>
+            </a:r>
+          </a:p>
+          <a:p>
+            <a:pPr algn="ctr" rtl="0"/>
+            <a:r>
+              <a:rPr sz="1400">
+                <a:solidFill>
+                  <a:srgbClr val="666666"/>
+                </a:solidFill>
+                <a:latin typeface="Calibri"/>
+              </a:rPr>
+              <a:t>Data Warehouse</a:t>
+            </a:r>
+          </a:p>
+        </p:txBody>
+      </p:sp>
+      <p:sp>
+        <p:nvSpPr>
+          <p:cNvPr id="4" name="Rounded Rectangle 3"/>
+          <p:cNvSpPr/>
+          <p:nvPr/>
+        </p:nvSpPr>
+        <p:spPr>
+          <a:xfrm>
+            <a:off x="6400800" y="1234440"/>
+            <a:ext cx="5029200" cy="822960"/>
+          </a:xfrm>
+          <a:prstGeom prst="roundRect">
+            <a:avLst/>
+          </a:prstGeom>
+          <a:solidFill>
+            <a:srgbClr val="DCE6F1"/>
+          </a:solidFill>
+          <a:ln w="12700">
+            <a:solidFill>
+              <a:srgbClr val="1F4E79"/>
+            </a:solidFill>
+          </a:ln>
+          <a:effectLst/>
+        </p:spPr>
+        <p:style>
+          <a:lnRef idx="1">
+            <a:schemeClr val="accent1"/>
+          </a:lnRef>
+          <a:fillRef idx="3">
+            <a:schemeClr val="accent1"/>
+          </a:fillRef>
+          <a:effectRef idx="2">
+            <a:schemeClr val="accent1"/>
+          </a:effectRef>
+          <a:fontRef idx="minor">
+            <a:schemeClr val="lt1"/>
+          </a:fontRef>
+        </p:style>
+        <p:txBody>
+          <a:bodyPr rtlCol="0" anchor="ctr" wrap="square"/>
+          <a:lstStyle/>
+          <a:p>
+            <a:pPr algn="ctr" rtl="1"/>
+            <a:r>
+              <a:rPr sz="2000" b="1">
+                <a:solidFill>
+                  <a:srgbClr val="333333"/>
+                </a:solidFill>
+                <a:latin typeface="Arial"/>
+              </a:rPr>
+              <a:t>بحيرة البيانات</a:t>
+            </a:r>
+          </a:p>
+          <a:p>
+            <a:pPr algn="ctr" rtl="0"/>
+            <a:r>
+              <a:rPr sz="1400">
+                <a:solidFill>
+                  <a:srgbClr val="666666"/>
+                </a:solidFill>
+                <a:latin typeface="Calibri"/>
+              </a:rPr>
+              <a:t>Data Lake</a:t>
+            </a:r>
+          </a:p>
+        </p:txBody>
+      </p:sp>
+      <p:sp>
+        <p:nvSpPr>
+          <p:cNvPr id="5" name="Rounded Rectangle 4"/>
+          <p:cNvSpPr/>
+          <p:nvPr/>
+        </p:nvSpPr>
+        <p:spPr>
+          <a:xfrm>
+            <a:off x="731520" y="2331720"/>
+            <a:ext cx="5029200" cy="731520"/>
+          </a:xfrm>
+          <a:prstGeom prst="roundRect">
+            <a:avLst/>
+          </a:prstGeom>
+          <a:solidFill>
+            <a:srgbClr val="EDEDED"/>
+          </a:solidFill>
+          <a:ln w="12700">
+            <a:solidFill>
+              <a:srgbClr val="1F4E79"/>
+            </a:solidFill>
+          </a:ln>
+          <a:effectLst/>
+        </p:spPr>
+        <p:style>
+          <a:lnRef idx="1">
+            <a:schemeClr val="accent1"/>
+          </a:lnRef>
+          <a:fillRef idx="3">
+            <a:schemeClr val="accent1"/>
+          </a:fillRef>
+          <a:effectRef idx="2">
+            <a:schemeClr val="accent1"/>
+          </a:effectRef>
+          <a:fontRef idx="minor">
+            <a:schemeClr val="lt1"/>
+          </a:fontRef>
+        </p:style>
+        <p:txBody>
+          <a:bodyPr rtlCol="0" anchor="ctr" wrap="square"/>
+          <a:lstStyle/>
+          <a:p>
+            <a:pPr algn="ctr" rtl="1"/>
+            <a:r>
+              <a:rPr sz="1400" b="1">
+                <a:solidFill>
+                  <a:srgbClr val="333333"/>
+                </a:solidFill>
+                <a:latin typeface="Arial"/>
+              </a:rPr>
+              <a:t>مخطط عند الكتابة</a:t>
+            </a:r>
+          </a:p>
+          <a:p>
+            <a:pPr algn="ctr" rtl="0"/>
+            <a:r>
+              <a:rPr sz="1100">
+                <a:solidFill>
+                  <a:srgbClr val="666666"/>
+                </a:solidFill>
+                <a:latin typeface="Calibri"/>
+              </a:rPr>
+              <a:t>Schema on write</a:t>
+            </a:r>
+          </a:p>
+        </p:txBody>
+      </p:sp>
+      <p:sp>
+        <p:nvSpPr>
+          <p:cNvPr id="6" name="Rounded Rectangle 5"/>
+          <p:cNvSpPr/>
+          <p:nvPr/>
+        </p:nvSpPr>
+        <p:spPr>
+          <a:xfrm>
+            <a:off x="6400800" y="2331720"/>
+            <a:ext cx="5029200" cy="731520"/>
+          </a:xfrm>
+          <a:prstGeom prst="roundRect">
+            <a:avLst/>
+          </a:prstGeom>
+          <a:solidFill>
+            <a:srgbClr val="EDEDED"/>
+          </a:solidFill>
+          <a:ln w="12700">
+            <a:solidFill>
+              <a:srgbClr val="1F4E79"/>
+            </a:solidFill>
+          </a:ln>
+          <a:effectLst/>
+        </p:spPr>
+        <p:style>
+          <a:lnRef idx="1">
+            <a:schemeClr val="accent1"/>
+          </a:lnRef>
+          <a:fillRef idx="3">
+            <a:schemeClr val="accent1"/>
+          </a:fillRef>
+          <a:effectRef idx="2">
+            <a:schemeClr val="accent1"/>
+          </a:effectRef>
+          <a:fontRef idx="minor">
+            <a:schemeClr val="lt1"/>
+          </a:fontRef>
+        </p:style>
+        <p:txBody>
+          <a:bodyPr rtlCol="0" anchor="ctr" wrap="square"/>
+          <a:lstStyle/>
+          <a:p>
+            <a:pPr algn="ctr" rtl="1"/>
+            <a:r>
+              <a:rPr sz="1400" b="1">
+                <a:solidFill>
+                  <a:srgbClr val="333333"/>
+                </a:solidFill>
+                <a:latin typeface="Arial"/>
+              </a:rPr>
+              <a:t>مخطط عند القراءة</a:t>
+            </a:r>
+          </a:p>
+          <a:p>
+            <a:pPr algn="ctr" rtl="0"/>
+            <a:r>
+              <a:rPr sz="1100">
+                <a:solidFill>
+                  <a:srgbClr val="666666"/>
+                </a:solidFill>
+                <a:latin typeface="Calibri"/>
+              </a:rPr>
+              <a:t>Schema on read</a:t>
+            </a:r>
+          </a:p>
+        </p:txBody>
+      </p:sp>
+      <p:sp>
+        <p:nvSpPr>
+          <p:cNvPr id="7" name="Rounded Rectangle 6"/>
+          <p:cNvSpPr/>
+          <p:nvPr/>
+        </p:nvSpPr>
+        <p:spPr>
+          <a:xfrm>
+            <a:off x="731520" y="3200400"/>
+            <a:ext cx="5029200" cy="731520"/>
+          </a:xfrm>
+          <a:prstGeom prst="roundRect">
+            <a:avLst/>
+          </a:prstGeom>
+          <a:solidFill>
+            <a:srgbClr val="EDEDED"/>
+          </a:solidFill>
+          <a:ln w="12700">
+            <a:solidFill>
+              <a:srgbClr val="1F4E79"/>
+            </a:solidFill>
+          </a:ln>
+          <a:effectLst/>
+        </p:spPr>
+        <p:style>
+          <a:lnRef idx="1">
+            <a:schemeClr val="accent1"/>
+          </a:lnRef>
+          <a:fillRef idx="3">
+            <a:schemeClr val="accent1"/>
+          </a:fillRef>
+          <a:effectRef idx="2">
+            <a:schemeClr val="accent1"/>
+          </a:effectRef>
+          <a:fontRef idx="minor">
+            <a:schemeClr val="lt1"/>
+          </a:fontRef>
+        </p:style>
+        <p:txBody>
+          <a:bodyPr rtlCol="0" anchor="ctr" wrap="square"/>
+          <a:lstStyle/>
+          <a:p>
+            <a:pPr algn="ctr" rtl="1"/>
+            <a:r>
+              <a:rPr sz="1400" b="1">
+                <a:solidFill>
+                  <a:srgbClr val="333333"/>
+                </a:solidFill>
+                <a:latin typeface="Arial"/>
+              </a:rPr>
+              <a:t>بيانات منظمة + SQL</a:t>
+            </a:r>
+          </a:p>
+          <a:p>
+            <a:pPr algn="ctr" rtl="0"/>
+            <a:r>
+              <a:rPr sz="1100">
+                <a:solidFill>
+                  <a:srgbClr val="666666"/>
+                </a:solidFill>
+                <a:latin typeface="Calibri"/>
+              </a:rPr>
+              <a:t>Curated data + SQL</a:t>
+            </a:r>
+          </a:p>
+        </p:txBody>
+      </p:sp>
+      <p:sp>
+        <p:nvSpPr>
+          <p:cNvPr id="8" name="Rounded Rectangle 7"/>
+          <p:cNvSpPr/>
+          <p:nvPr/>
+        </p:nvSpPr>
+        <p:spPr>
+          <a:xfrm>
+            <a:off x="6400800" y="3200400"/>
+            <a:ext cx="5029200" cy="731520"/>
+          </a:xfrm>
+          <a:prstGeom prst="roundRect">
+            <a:avLst/>
+          </a:prstGeom>
+          <a:solidFill>
+            <a:srgbClr val="EDEDED"/>
+          </a:solidFill>
+          <a:ln w="12700">
+            <a:solidFill>
+              <a:srgbClr val="1F4E79"/>
+            </a:solidFill>
+          </a:ln>
+          <a:effectLst/>
+        </p:spPr>
+        <p:style>
+          <a:lnRef idx="1">
+            <a:schemeClr val="accent1"/>
+          </a:lnRef>
+          <a:fillRef idx="3">
+            <a:schemeClr val="accent1"/>
+          </a:fillRef>
+          <a:effectRef idx="2">
+            <a:schemeClr val="accent1"/>
+          </a:effectRef>
+          <a:fontRef idx="minor">
+            <a:schemeClr val="lt1"/>
+          </a:fontRef>
+        </p:style>
+        <p:txBody>
+          <a:bodyPr rtlCol="0" anchor="ctr" wrap="square"/>
+          <a:lstStyle/>
+          <a:p>
+            <a:pPr algn="ctr" rtl="1"/>
+            <a:r>
+              <a:rPr sz="1400" b="1">
+                <a:solidFill>
+                  <a:srgbClr val="333333"/>
+                </a:solidFill>
+                <a:latin typeface="Arial"/>
+              </a:rPr>
+              <a:t>كل التنسيقات</a:t>
+            </a:r>
+          </a:p>
+          <a:p>
+            <a:pPr algn="ctr" rtl="0"/>
+            <a:r>
+              <a:rPr sz="1100">
+                <a:solidFill>
+                  <a:srgbClr val="666666"/>
+                </a:solidFill>
+                <a:latin typeface="Calibri"/>
+              </a:rPr>
+              <a:t>Any format</a:t>
+            </a:r>
+          </a:p>
+        </p:txBody>
+      </p:sp>
+      <p:sp>
+        <p:nvSpPr>
+          <p:cNvPr id="9" name="Rounded Rectangle 8"/>
+          <p:cNvSpPr/>
+          <p:nvPr/>
+        </p:nvSpPr>
+        <p:spPr>
+          <a:xfrm>
+            <a:off x="731520" y="4069080"/>
+            <a:ext cx="5029200" cy="731520"/>
+          </a:xfrm>
+          <a:prstGeom prst="roundRect">
+            <a:avLst/>
+          </a:prstGeom>
+          <a:solidFill>
+            <a:srgbClr val="EDEDED"/>
+          </a:solidFill>
+          <a:ln w="12700">
+            <a:solidFill>
+              <a:srgbClr val="1F4E79"/>
+            </a:solidFill>
+          </a:ln>
+          <a:effectLst/>
+        </p:spPr>
+        <p:style>
+          <a:lnRef idx="1">
+            <a:schemeClr val="accent1"/>
+          </a:lnRef>
+          <a:fillRef idx="3">
+            <a:schemeClr val="accent1"/>
+          </a:fillRef>
+          <a:effectRef idx="2">
+            <a:schemeClr val="accent1"/>
+          </a:effectRef>
+          <a:fontRef idx="minor">
+            <a:schemeClr val="lt1"/>
+          </a:fontRef>
+        </p:style>
+        <p:txBody>
+          <a:bodyPr rtlCol="0" anchor="ctr" wrap="square"/>
+          <a:lstStyle/>
+          <a:p>
+            <a:pPr algn="ctr" rtl="1"/>
+            <a:r>
+              <a:rPr sz="1400" b="1">
+                <a:solidFill>
+                  <a:srgbClr val="333333"/>
+                </a:solidFill>
+                <a:latin typeface="Arial"/>
+              </a:rPr>
+              <a:t>تقارير وذكاء أعمال</a:t>
+            </a:r>
+          </a:p>
+          <a:p>
+            <a:pPr algn="ctr" rtl="0"/>
+            <a:r>
+              <a:rPr sz="1100">
+                <a:solidFill>
+                  <a:srgbClr val="666666"/>
+                </a:solidFill>
+                <a:latin typeface="Calibri"/>
+              </a:rPr>
+              <a:t>Reporting and BI</a:t>
+            </a:r>
+          </a:p>
+        </p:txBody>
+      </p:sp>
+      <p:sp>
+        <p:nvSpPr>
+          <p:cNvPr id="10" name="Rounded Rectangle 9"/>
+          <p:cNvSpPr/>
+          <p:nvPr/>
+        </p:nvSpPr>
+        <p:spPr>
+          <a:xfrm>
+            <a:off x="6400800" y="4069080"/>
+            <a:ext cx="5029200" cy="731520"/>
+          </a:xfrm>
+          <a:prstGeom prst="roundRect">
+            <a:avLst/>
+          </a:prstGeom>
+          <a:solidFill>
+            <a:srgbClr val="EDEDED"/>
+          </a:solidFill>
+          <a:ln w="12700">
+            <a:solidFill>
+              <a:srgbClr val="1F4E79"/>
+            </a:solidFill>
+          </a:ln>
+          <a:effectLst/>
+        </p:spPr>
+        <p:style>
+          <a:lnRef idx="1">
+            <a:schemeClr val="accent1"/>
+          </a:lnRef>
+          <a:fillRef idx="3">
+            <a:schemeClr val="accent1"/>
+          </a:fillRef>
+          <a:effectRef idx="2">
+            <a:schemeClr val="accent1"/>
+          </a:effectRef>
+          <a:fontRef idx="minor">
+            <a:schemeClr val="lt1"/>
+          </a:fontRef>
+        </p:style>
+        <p:txBody>
+          <a:bodyPr rtlCol="0" anchor="ctr" wrap="square"/>
+          <a:lstStyle/>
+          <a:p>
+            <a:pPr algn="ctr" rtl="1"/>
+            <a:r>
+              <a:rPr sz="1400" b="1">
+                <a:solidFill>
+                  <a:srgbClr val="333333"/>
+                </a:solidFill>
+                <a:latin typeface="Arial"/>
+              </a:rPr>
+              <a:t>استكشاف وAI/ML</a:t>
+            </a:r>
+          </a:p>
+          <a:p>
+            <a:pPr algn="ctr" rtl="0"/>
+            <a:r>
+              <a:rPr sz="1100">
+                <a:solidFill>
+                  <a:srgbClr val="666666"/>
+                </a:solidFill>
+                <a:latin typeface="Calibri"/>
+              </a:rPr>
+              <a:t>Exploration and AI/ML</a:t>
+            </a:r>
+          </a:p>
+        </p:txBody>
+      </p:sp>
+      <p:sp>
+        <p:nvSpPr>
+          <p:cNvPr id="11" name="Rounded Rectangle 10"/>
+          <p:cNvSpPr/>
+          <p:nvPr/>
+        </p:nvSpPr>
+        <p:spPr>
+          <a:xfrm>
+            <a:off x="3886200" y="5212080"/>
+            <a:ext cx="4434840" cy="640080"/>
+          </a:xfrm>
+          <a:prstGeom prst="roundRect">
+            <a:avLst/>
+          </a:prstGeom>
+          <a:solidFill>
+            <a:srgbClr val="FDE9D9"/>
+          </a:solidFill>
+          <a:ln w="12700">
+            <a:solidFill>
+              <a:srgbClr val="1F4E79"/>
+            </a:solidFill>
+          </a:ln>
+          <a:effectLst/>
+        </p:spPr>
+        <p:style>
+          <a:lnRef idx="1">
+            <a:schemeClr val="accent1"/>
+          </a:lnRef>
+          <a:fillRef idx="3">
+            <a:schemeClr val="accent1"/>
+          </a:fillRef>
+          <a:effectRef idx="2">
+            <a:schemeClr val="accent1"/>
+          </a:effectRef>
+          <a:fontRef idx="minor">
+            <a:schemeClr val="lt1"/>
+          </a:fontRef>
+        </p:style>
+        <p:txBody>
+          <a:bodyPr rtlCol="0" anchor="ctr" wrap="square"/>
+          <a:lstStyle/>
+          <a:p>
+            <a:pPr algn="ctr" rtl="1"/>
+            <a:r>
+              <a:rPr sz="1400" b="1">
+                <a:solidFill>
+                  <a:srgbClr val="333333"/>
+                </a:solidFill>
+                <a:latin typeface="Arial"/>
+              </a:rPr>
+              <a:t>Lakehouse = مرونة البحيرة + موثوقية المستودع</a:t>
+            </a:r>
+          </a:p>
+          <a:p>
+            <a:pPr algn="ctr" rtl="0"/>
+            <a:r>
+              <a:rPr sz="1100">
+                <a:solidFill>
+                  <a:srgbClr val="666666"/>
+                </a:solidFill>
+                <a:latin typeface="Calibri"/>
+              </a:rPr>
+              <a:t>Lakehouse = lake flexibility + warehouse reliability</a:t>
+            </a:r>
+          </a:p>
+        </p:txBody>
+      </p:sp>
+      <p:sp>
+        <p:nvSpPr>
+          <p:cNvPr id="12" name="TextBox 11"/>
+          <p:cNvSpPr txBox="1"/>
+          <p:nvPr/>
+        </p:nvSpPr>
+        <p:spPr>
+          <a:xfrm>
+            <a:off x="640080" y="6126480"/>
+            <a:ext cx="10972800" cy="548640"/>
+          </a:xfrm>
+          <a:prstGeom prst="rect">
+            <a:avLst/>
+          </a:prstGeom>
+          <a:noFill/>
+        </p:spPr>
+        <p:txBody>
+          <a:bodyPr wrap="square">
+            <a:spAutoFit/>
+          </a:bodyPr>
+          <a:lstStyle/>
+          <a:p>
+            <a:pPr algn="r" rtl="1"/>
+            <a:r>
+              <a:rPr sz="1400">
+                <a:solidFill>
+                  <a:srgbClr val="666666"/>
+                </a:solidFill>
+                <a:latin typeface="Arial"/>
+              </a:rPr>
+              <a:t>لا يوجد فائز دائم: ابدأ من نوع السؤال، والفريق، ومتطلبات الحوكمة.</a:t>
+            </a:r>
+          </a:p>
+          <a:p>
+            <a:pPr algn="r" rtl="0"/>
+            <a:r>
+              <a:t>There is no universal winner: start with the question, team, and governance needs.</a:t>
+            </a:r>
+          </a:p>
+        </p:txBody>
+      </p:sp>
+    </p:spTree>
+  </p:cSld>
+  <p:clrMapOvr>
+    <a:masterClrMapping/>
+  </p:clrMapOvr>
+</p:sld>
+</file>
+
+<file path=ppt/slides/slide16.xml><?xml version="1.0" encoding="utf-8"?>
+<p:sld xmlns:a="http://schemas.openxmlformats.org/drawingml/2006/main" xmlns:p="http://schemas.openxmlformats.org/presentationml/2006/main" xmlns:r="http://schemas.openxmlformats.org/officeDocument/2006/relationships">
+  <p:cSld>
+    <p:bg>
+      <p:bgPr>
+        <a:solidFill>
+          <a:srgbClr val="FFFFFF"/>
+        </a:solidFill>
+        <a:effectLst/>
+      </p:bgPr>
+    </p:bg>
+    <p:spTree>
+      <p:nvGrpSpPr>
+        <p:cNvPr id="1" name=""/>
+        <p:cNvGrpSpPr/>
+        <p:nvPr/>
+      </p:nvGrpSpPr>
+      <p:grpSpPr/>
+      <p:sp>
+        <p:nvSpPr>
+          <p:cNvPr id="2" name="TextBox 1"/>
+          <p:cNvSpPr txBox="1"/>
+          <p:nvPr/>
+        </p:nvSpPr>
+        <p:spPr>
+          <a:xfrm>
+            <a:off x="640080" y="137160"/>
+            <a:ext cx="10972800" cy="640080"/>
+          </a:xfrm>
+          <a:prstGeom prst="rect">
+            <a:avLst/>
+          </a:prstGeom>
+          <a:noFill/>
+        </p:spPr>
+        <p:txBody>
+          <a:bodyPr wrap="none">
+            <a:spAutoFit/>
+          </a:bodyPr>
+          <a:lstStyle/>
+          <a:p>
+            <a:pPr algn="r" rtl="1"/>
+            <a:r>
+              <a:rPr sz="3000" b="1">
+                <a:solidFill>
+                  <a:srgbClr val="1F3B5C"/>
+                </a:solidFill>
+                <a:latin typeface="Arial"/>
+              </a:rPr>
+              <a:t>من البيانات الخام إلى الخصائص / Raw Data to Features</a:t>
+            </a:r>
+          </a:p>
+        </p:txBody>
+      </p:sp>
+      <p:sp>
+        <p:nvSpPr>
+          <p:cNvPr id="3" name="Rounded Rectangle 2"/>
+          <p:cNvSpPr/>
+          <p:nvPr/>
+        </p:nvSpPr>
+        <p:spPr>
+          <a:xfrm>
+            <a:off x="640080" y="2011680"/>
+            <a:ext cx="2468880" cy="1280160"/>
+          </a:xfrm>
+          <a:prstGeom prst="roundRect">
+            <a:avLst/>
+          </a:prstGeom>
+          <a:solidFill>
+            <a:srgbClr val="EDEDED"/>
+          </a:solidFill>
+          <a:ln w="12700">
+            <a:solidFill>
+              <a:srgbClr val="1F4E79"/>
+            </a:solidFill>
+          </a:ln>
+          <a:effectLst/>
+        </p:spPr>
+        <p:style>
+          <a:lnRef idx="1">
+            <a:schemeClr val="accent1"/>
+          </a:lnRef>
+          <a:fillRef idx="3">
+            <a:schemeClr val="accent1"/>
+          </a:fillRef>
+          <a:effectRef idx="2">
+            <a:schemeClr val="accent1"/>
+          </a:effectRef>
+          <a:fontRef idx="minor">
+            <a:schemeClr val="lt1"/>
+          </a:fontRef>
+        </p:style>
+        <p:txBody>
+          <a:bodyPr rtlCol="0" anchor="ctr" wrap="square"/>
+          <a:lstStyle/>
+          <a:p>
+            <a:pPr algn="ctr" rtl="1"/>
+            <a:r>
+              <a:rPr sz="1600" b="1">
+                <a:solidFill>
+                  <a:srgbClr val="333333"/>
+                </a:solidFill>
+                <a:latin typeface="Arial"/>
+              </a:rPr>
+              <a:t>أحداث خام</a:t>
+            </a:r>
+          </a:p>
+          <a:p>
+            <a:pPr algn="ctr" rtl="0"/>
+            <a:r>
+              <a:rPr sz="1200">
+                <a:solidFill>
+                  <a:srgbClr val="666666"/>
+                </a:solidFill>
+                <a:latin typeface="Calibri"/>
+              </a:rPr>
+              <a:t>Raw events</a:t>
+            </a:r>
+          </a:p>
+        </p:txBody>
+      </p:sp>
+      <p:sp>
+        <p:nvSpPr>
+          <p:cNvPr id="4" name="Right Arrow 3"/>
+          <p:cNvSpPr/>
+          <p:nvPr/>
+        </p:nvSpPr>
+        <p:spPr>
+          <a:xfrm>
+            <a:off x="3182112" y="2514600"/>
+            <a:ext cx="411480" cy="274320"/>
+          </a:xfrm>
+          <a:prstGeom prst="rightArrow">
+            <a:avLst/>
+          </a:prstGeom>
+          <a:solidFill>
+            <a:srgbClr val="1F4E79"/>
+          </a:solidFill>
+          <a:ln>
+            <a:noFill/>
+          </a:ln>
+          <a:effectLst/>
+        </p:spPr>
+        <p:style>
+          <a:lnRef idx="1">
+            <a:schemeClr val="accent1"/>
+          </a:lnRef>
+          <a:fillRef idx="3">
+            <a:schemeClr val="accent1"/>
+          </a:fillRef>
+          <a:effectRef idx="2">
+            <a:schemeClr val="accent1"/>
+          </a:effectRef>
+          <a:fontRef idx="minor">
+            <a:schemeClr val="lt1"/>
+          </a:fontRef>
+        </p:style>
+        <p:txBody>
+          <a:bodyPr rtlCol="0" anchor="ctr"/>
+          <a:lstStyle/>
+          <a:p>
+            <a:pPr algn="ctr"/>
+          </a:p>
+        </p:txBody>
+      </p:sp>
+      <p:sp>
+        <p:nvSpPr>
+          <p:cNvPr id="5" name="Rounded Rectangle 4"/>
+          <p:cNvSpPr/>
+          <p:nvPr/>
+        </p:nvSpPr>
+        <p:spPr>
+          <a:xfrm>
+            <a:off x="3566160" y="2011680"/>
+            <a:ext cx="2468880" cy="1280160"/>
+          </a:xfrm>
+          <a:prstGeom prst="roundRect">
+            <a:avLst/>
+          </a:prstGeom>
+          <a:solidFill>
+            <a:srgbClr val="DCE6F1"/>
+          </a:solidFill>
+          <a:ln w="12700">
+            <a:solidFill>
+              <a:srgbClr val="1F4E79"/>
+            </a:solidFill>
+          </a:ln>
+          <a:effectLst/>
+        </p:spPr>
+        <p:style>
+          <a:lnRef idx="1">
+            <a:schemeClr val="accent1"/>
+          </a:lnRef>
+          <a:fillRef idx="3">
+            <a:schemeClr val="accent1"/>
+          </a:fillRef>
+          <a:effectRef idx="2">
+            <a:schemeClr val="accent1"/>
+          </a:effectRef>
+          <a:fontRef idx="minor">
+            <a:schemeClr val="lt1"/>
+          </a:fontRef>
+        </p:style>
+        <p:txBody>
+          <a:bodyPr rtlCol="0" anchor="ctr" wrap="square"/>
+          <a:lstStyle/>
+          <a:p>
+            <a:pPr algn="ctr" rtl="1"/>
+            <a:r>
+              <a:rPr sz="1600" b="1">
+                <a:solidFill>
+                  <a:srgbClr val="333333"/>
+                </a:solidFill>
+                <a:latin typeface="Arial"/>
+              </a:rPr>
+              <a:t>تنظيف وتحويل</a:t>
+            </a:r>
+          </a:p>
+          <a:p>
+            <a:pPr algn="ctr" rtl="0"/>
+            <a:r>
+              <a:rPr sz="1200">
+                <a:solidFill>
+                  <a:srgbClr val="666666"/>
+                </a:solidFill>
+                <a:latin typeface="Calibri"/>
+              </a:rPr>
+              <a:t>Clean &amp; transform</a:t>
+            </a:r>
+          </a:p>
+        </p:txBody>
+      </p:sp>
+      <p:sp>
+        <p:nvSpPr>
+          <p:cNvPr id="6" name="Right Arrow 5"/>
+          <p:cNvSpPr/>
+          <p:nvPr/>
+        </p:nvSpPr>
+        <p:spPr>
+          <a:xfrm>
+            <a:off x="6108192" y="2514600"/>
+            <a:ext cx="411480" cy="274320"/>
+          </a:xfrm>
+          <a:prstGeom prst="rightArrow">
+            <a:avLst/>
+          </a:prstGeom>
+          <a:solidFill>
+            <a:srgbClr val="1F4E79"/>
+          </a:solidFill>
+          <a:ln>
+            <a:noFill/>
+          </a:ln>
+          <a:effectLst/>
+        </p:spPr>
+        <p:style>
+          <a:lnRef idx="1">
+            <a:schemeClr val="accent1"/>
+          </a:lnRef>
+          <a:fillRef idx="3">
+            <a:schemeClr val="accent1"/>
+          </a:fillRef>
+          <a:effectRef idx="2">
+            <a:schemeClr val="accent1"/>
+          </a:effectRef>
+          <a:fontRef idx="minor">
+            <a:schemeClr val="lt1"/>
+          </a:fontRef>
+        </p:style>
+        <p:txBody>
+          <a:bodyPr rtlCol="0" anchor="ctr"/>
+          <a:lstStyle/>
+          <a:p>
+            <a:pPr algn="ctr"/>
+          </a:p>
+        </p:txBody>
+      </p:sp>
+      <p:sp>
+        <p:nvSpPr>
+          <p:cNvPr id="7" name="Rounded Rectangle 6"/>
+          <p:cNvSpPr/>
+          <p:nvPr/>
+        </p:nvSpPr>
+        <p:spPr>
+          <a:xfrm>
+            <a:off x="6492240" y="2011680"/>
+            <a:ext cx="2468880" cy="1280160"/>
+          </a:xfrm>
+          <a:prstGeom prst="roundRect">
+            <a:avLst/>
+          </a:prstGeom>
+          <a:solidFill>
+            <a:srgbClr val="E2EFDA"/>
+          </a:solidFill>
+          <a:ln w="12700">
+            <a:solidFill>
+              <a:srgbClr val="1F4E79"/>
+            </a:solidFill>
+          </a:ln>
+          <a:effectLst/>
+        </p:spPr>
+        <p:style>
+          <a:lnRef idx="1">
+            <a:schemeClr val="accent1"/>
+          </a:lnRef>
+          <a:fillRef idx="3">
+            <a:schemeClr val="accent1"/>
+          </a:fillRef>
+          <a:effectRef idx="2">
+            <a:schemeClr val="accent1"/>
+          </a:effectRef>
+          <a:fontRef idx="minor">
+            <a:schemeClr val="lt1"/>
+          </a:fontRef>
+        </p:style>
+        <p:txBody>
+          <a:bodyPr rtlCol="0" anchor="ctr" wrap="square"/>
+          <a:lstStyle/>
+          <a:p>
+            <a:pPr algn="ctr" rtl="1"/>
+            <a:r>
+              <a:rPr sz="1600" b="1">
+                <a:solidFill>
+                  <a:srgbClr val="333333"/>
+                </a:solidFill>
+                <a:latin typeface="Arial"/>
+              </a:rPr>
+              <a:t>تعريف الخصائص</a:t>
+            </a:r>
+          </a:p>
+          <a:p>
+            <a:pPr algn="ctr" rtl="0"/>
+            <a:r>
+              <a:rPr sz="1200">
+                <a:solidFill>
+                  <a:srgbClr val="666666"/>
+                </a:solidFill>
+                <a:latin typeface="Calibri"/>
+              </a:rPr>
+              <a:t>Feature definitions</a:t>
+            </a:r>
+          </a:p>
+        </p:txBody>
+      </p:sp>
+      <p:sp>
+        <p:nvSpPr>
+          <p:cNvPr id="8" name="Right Arrow 7"/>
+          <p:cNvSpPr/>
+          <p:nvPr/>
+        </p:nvSpPr>
+        <p:spPr>
+          <a:xfrm>
+            <a:off x="9034272" y="2514600"/>
+            <a:ext cx="411480" cy="274320"/>
+          </a:xfrm>
+          <a:prstGeom prst="rightArrow">
+            <a:avLst/>
+          </a:prstGeom>
+          <a:solidFill>
+            <a:srgbClr val="1F4E79"/>
+          </a:solidFill>
+          <a:ln>
+            <a:noFill/>
+          </a:ln>
+          <a:effectLst/>
+        </p:spPr>
+        <p:style>
+          <a:lnRef idx="1">
+            <a:schemeClr val="accent1"/>
+          </a:lnRef>
+          <a:fillRef idx="3">
+            <a:schemeClr val="accent1"/>
+          </a:fillRef>
+          <a:effectRef idx="2">
+            <a:schemeClr val="accent1"/>
+          </a:effectRef>
+          <a:fontRef idx="minor">
+            <a:schemeClr val="lt1"/>
+          </a:fontRef>
+        </p:style>
+        <p:txBody>
+          <a:bodyPr rtlCol="0" anchor="ctr"/>
+          <a:lstStyle/>
+          <a:p>
+            <a:pPr algn="ctr"/>
+          </a:p>
+        </p:txBody>
+      </p:sp>
+      <p:sp>
+        <p:nvSpPr>
+          <p:cNvPr id="9" name="Rounded Rectangle 8"/>
+          <p:cNvSpPr/>
+          <p:nvPr/>
+        </p:nvSpPr>
+        <p:spPr>
+          <a:xfrm>
+            <a:off x="9418320" y="2011680"/>
+            <a:ext cx="2468880" cy="1280160"/>
+          </a:xfrm>
+          <a:prstGeom prst="roundRect">
+            <a:avLst/>
+          </a:prstGeom>
+          <a:solidFill>
+            <a:srgbClr val="FDE9D9"/>
+          </a:solidFill>
+          <a:ln w="12700">
+            <a:solidFill>
+              <a:srgbClr val="1F4E79"/>
+            </a:solidFill>
+          </a:ln>
+          <a:effectLst/>
+        </p:spPr>
+        <p:style>
+          <a:lnRef idx="1">
+            <a:schemeClr val="accent1"/>
+          </a:lnRef>
+          <a:fillRef idx="3">
+            <a:schemeClr val="accent1"/>
+          </a:fillRef>
+          <a:effectRef idx="2">
+            <a:schemeClr val="accent1"/>
+          </a:effectRef>
+          <a:fontRef idx="minor">
+            <a:schemeClr val="lt1"/>
+          </a:fontRef>
+        </p:style>
+        <p:txBody>
+          <a:bodyPr rtlCol="0" anchor="ctr" wrap="square"/>
+          <a:lstStyle/>
+          <a:p>
+            <a:pPr algn="ctr" rtl="1"/>
+            <a:r>
+              <a:rPr sz="1600" b="1">
+                <a:solidFill>
+                  <a:srgbClr val="333333"/>
+                </a:solidFill>
+                <a:latin typeface="Arial"/>
+              </a:rPr>
+              <a:t>تدريب + خدمة</a:t>
+            </a:r>
+          </a:p>
+          <a:p>
+            <a:pPr algn="ctr" rtl="0"/>
+            <a:r>
+              <a:rPr sz="1200">
+                <a:solidFill>
+                  <a:srgbClr val="666666"/>
+                </a:solidFill>
+                <a:latin typeface="Calibri"/>
+              </a:rPr>
+              <a:t>Training + serving</a:t>
+            </a:r>
+          </a:p>
+        </p:txBody>
+      </p:sp>
+      <p:sp>
+        <p:nvSpPr>
+          <p:cNvPr id="10" name="Rounded Rectangle 9"/>
+          <p:cNvSpPr/>
+          <p:nvPr/>
+        </p:nvSpPr>
+        <p:spPr>
+          <a:xfrm>
+            <a:off x="3063240" y="3977639"/>
+            <a:ext cx="6080760" cy="822960"/>
+          </a:xfrm>
+          <a:prstGeom prst="roundRect">
+            <a:avLst/>
+          </a:prstGeom>
+          <a:solidFill>
+            <a:srgbClr val="E2EFDA"/>
+          </a:solidFill>
+          <a:ln w="12700">
+            <a:solidFill>
+              <a:srgbClr val="1F4E79"/>
+            </a:solidFill>
+          </a:ln>
+          <a:effectLst/>
+        </p:spPr>
+        <p:style>
+          <a:lnRef idx="1">
+            <a:schemeClr val="accent1"/>
+          </a:lnRef>
+          <a:fillRef idx="3">
+            <a:schemeClr val="accent1"/>
+          </a:fillRef>
+          <a:effectRef idx="2">
+            <a:schemeClr val="accent1"/>
+          </a:effectRef>
+          <a:fontRef idx="minor">
+            <a:schemeClr val="lt1"/>
+          </a:fontRef>
+        </p:style>
+        <p:txBody>
+          <a:bodyPr rtlCol="0" anchor="ctr" wrap="square"/>
+          <a:lstStyle/>
+          <a:p>
+            <a:pPr algn="ctr" rtl="1"/>
+            <a:r>
+              <a:rPr sz="1500" b="1">
+                <a:solidFill>
+                  <a:srgbClr val="333333"/>
+                </a:solidFill>
+                <a:latin typeface="Arial"/>
+              </a:rPr>
+              <a:t>مخزن الخصائص: تعريف واحد متسق للتدريب والخدمة</a:t>
+            </a:r>
+          </a:p>
+          <a:p>
+            <a:pPr algn="ctr" rtl="0"/>
+            <a:r>
+              <a:rPr sz="1200">
+                <a:solidFill>
+                  <a:srgbClr val="666666"/>
+                </a:solidFill>
+                <a:latin typeface="Calibri"/>
+              </a:rPr>
+              <a:t>Feature store: one consistent definition for training and serving</a:t>
+            </a:r>
+          </a:p>
+        </p:txBody>
+      </p:sp>
+      <p:sp>
+        <p:nvSpPr>
+          <p:cNvPr id="11" name="TextBox 10"/>
+          <p:cNvSpPr txBox="1"/>
+          <p:nvPr/>
+        </p:nvSpPr>
+        <p:spPr>
+          <a:xfrm>
+            <a:off x="640080" y="6126480"/>
+            <a:ext cx="10972800" cy="548640"/>
+          </a:xfrm>
+          <a:prstGeom prst="rect">
+            <a:avLst/>
+          </a:prstGeom>
+          <a:noFill/>
+        </p:spPr>
+        <p:txBody>
+          <a:bodyPr wrap="square">
+            <a:spAutoFit/>
+          </a:bodyPr>
+          <a:lstStyle/>
+          <a:p>
+            <a:pPr algn="r" rtl="1"/>
+            <a:r>
+              <a:rPr sz="1400">
+                <a:solidFill>
+                  <a:srgbClr val="666666"/>
+                </a:solidFill>
+                <a:latin typeface="Arial"/>
+              </a:rPr>
+              <a:t>الاتساق هو النتيجة: نفس حساب الميزة يمنع انحراف التدريب والخدمة.</a:t>
+            </a:r>
+          </a:p>
+          <a:p>
+            <a:pPr algn="r" rtl="0"/>
+            <a:r>
+              <a:t>Consistency is the outcome: the same feature calculation prevents training-serving skew.</a:t>
+            </a:r>
+          </a:p>
+        </p:txBody>
+      </p:sp>
+    </p:spTree>
+  </p:cSld>
+  <p:clrMapOvr>
+    <a:masterClrMapping/>
+  </p:clrMapOvr>
+</p:sld>
+</file>
+
+<file path=ppt/slides/slide17.xml><?xml version="1.0" encoding="utf-8"?>
+<p:sld xmlns:a="http://schemas.openxmlformats.org/drawingml/2006/main" xmlns:p="http://schemas.openxmlformats.org/presentationml/2006/main" xmlns:r="http://schemas.openxmlformats.org/officeDocument/2006/relationships">
+  <p:cSld>
+    <p:bg>
+      <p:bgPr>
+        <a:solidFill>
+          <a:srgbClr val="FFFFFF"/>
+        </a:solidFill>
+        <a:effectLst/>
+      </p:bgPr>
+    </p:bg>
+    <p:spTree>
+      <p:nvGrpSpPr>
+        <p:cNvPr id="1" name=""/>
+        <p:cNvGrpSpPr/>
+        <p:nvPr/>
+      </p:nvGrpSpPr>
+      <p:grpSpPr/>
+      <p:sp>
+        <p:nvSpPr>
+          <p:cNvPr id="2" name="TextBox 1"/>
+          <p:cNvSpPr txBox="1"/>
+          <p:nvPr/>
+        </p:nvSpPr>
+        <p:spPr>
+          <a:xfrm>
+            <a:off x="640080" y="137160"/>
+            <a:ext cx="10972800" cy="640080"/>
+          </a:xfrm>
+          <a:prstGeom prst="rect">
+            <a:avLst/>
+          </a:prstGeom>
+          <a:noFill/>
+        </p:spPr>
+        <p:txBody>
+          <a:bodyPr wrap="none">
+            <a:spAutoFit/>
+          </a:bodyPr>
+          <a:lstStyle/>
+          <a:p>
+            <a:pPr algn="r" rtl="1"/>
+            <a:r>
+              <a:rPr sz="3000" b="1">
+                <a:solidFill>
+                  <a:srgbClr val="1F3B5C"/>
+                </a:solidFill>
+                <a:latin typeface="Arial"/>
+              </a:rPr>
+              <a:t>حلقة جودة التصنيف / Label Quality Loop</a:t>
+            </a:r>
+          </a:p>
+        </p:txBody>
+      </p:sp>
+      <p:sp>
+        <p:nvSpPr>
+          <p:cNvPr id="3" name="Rounded Rectangle 2"/>
+          <p:cNvSpPr/>
+          <p:nvPr/>
+        </p:nvSpPr>
+        <p:spPr>
+          <a:xfrm>
+            <a:off x="731520" y="1417320"/>
+            <a:ext cx="4480560" cy="822960"/>
+          </a:xfrm>
+          <a:prstGeom prst="roundRect">
+            <a:avLst/>
+          </a:prstGeom>
+          <a:solidFill>
+            <a:srgbClr val="FDE9D9"/>
+          </a:solidFill>
+          <a:ln w="12700">
+            <a:solidFill>
+              <a:srgbClr val="1F4E79"/>
+            </a:solidFill>
+          </a:ln>
+          <a:effectLst/>
+        </p:spPr>
+        <p:style>
+          <a:lnRef idx="1">
+            <a:schemeClr val="accent1"/>
+          </a:lnRef>
+          <a:fillRef idx="3">
+            <a:schemeClr val="accent1"/>
+          </a:fillRef>
+          <a:effectRef idx="2">
+            <a:schemeClr val="accent1"/>
+          </a:effectRef>
+          <a:fontRef idx="minor">
+            <a:schemeClr val="lt1"/>
+          </a:fontRef>
+        </p:style>
+        <p:txBody>
+          <a:bodyPr rtlCol="0" anchor="ctr" wrap="square"/>
+          <a:lstStyle/>
+          <a:p>
+            <a:pPr algn="ctr" rtl="1"/>
+            <a:r>
+              <a:rPr sz="1600" b="1">
+                <a:solidFill>
+                  <a:srgbClr val="333333"/>
+                </a:solidFill>
+                <a:latin typeface="Arial"/>
+              </a:rPr>
+              <a:t>تسميات متسرعة أو غير متسقة</a:t>
+            </a:r>
+          </a:p>
+          <a:p>
+            <a:pPr algn="ctr" rtl="0"/>
+            <a:r>
+              <a:rPr sz="1200">
+                <a:solidFill>
+                  <a:srgbClr val="666666"/>
+                </a:solidFill>
+                <a:latin typeface="Calibri"/>
+              </a:rPr>
+              <a:t>Rushed or inconsistent labels</a:t>
+            </a:r>
+          </a:p>
+        </p:txBody>
+      </p:sp>
+      <p:sp>
+        <p:nvSpPr>
+          <p:cNvPr id="4" name="Rounded Rectangle 3"/>
+          <p:cNvSpPr/>
+          <p:nvPr/>
+        </p:nvSpPr>
+        <p:spPr>
+          <a:xfrm>
+            <a:off x="731520" y="2468880"/>
+            <a:ext cx="4480560" cy="1143000"/>
+          </a:xfrm>
+          <a:prstGeom prst="roundRect">
+            <a:avLst/>
+          </a:prstGeom>
+          <a:solidFill>
+            <a:srgbClr val="EDEDED"/>
+          </a:solidFill>
+          <a:ln w="12700">
+            <a:solidFill>
+              <a:srgbClr val="1F4E79"/>
+            </a:solidFill>
+          </a:ln>
+          <a:effectLst/>
+        </p:spPr>
+        <p:style>
+          <a:lnRef idx="1">
+            <a:schemeClr val="accent1"/>
+          </a:lnRef>
+          <a:fillRef idx="3">
+            <a:schemeClr val="accent1"/>
+          </a:fillRef>
+          <a:effectRef idx="2">
+            <a:schemeClr val="accent1"/>
+          </a:effectRef>
+          <a:fontRef idx="minor">
+            <a:schemeClr val="lt1"/>
+          </a:fontRef>
+        </p:style>
+        <p:txBody>
+          <a:bodyPr rtlCol="0" anchor="ctr" wrap="square"/>
+          <a:lstStyle/>
+          <a:p>
+            <a:pPr algn="ctr" rtl="1"/>
+            <a:r>
+              <a:rPr sz="1500" b="1">
+                <a:solidFill>
+                  <a:srgbClr val="333333"/>
+                </a:solidFill>
+                <a:latin typeface="Arial"/>
+              </a:rPr>
+              <a:t>ضوضاء ← نموذج ضعيف ← تصحيحات أكثر</a:t>
+            </a:r>
+          </a:p>
+          <a:p>
+            <a:pPr algn="ctr" rtl="0"/>
+            <a:r>
+              <a:rPr sz="1200">
+                <a:solidFill>
+                  <a:srgbClr val="666666"/>
+                </a:solidFill>
+                <a:latin typeface="Calibri"/>
+              </a:rPr>
+              <a:t>Noise → weak model → more corrections</a:t>
+            </a:r>
+          </a:p>
+        </p:txBody>
+      </p:sp>
+      <p:sp>
+        <p:nvSpPr>
+          <p:cNvPr id="5" name="Right Arrow 4"/>
+          <p:cNvSpPr/>
+          <p:nvPr/>
+        </p:nvSpPr>
+        <p:spPr>
+          <a:xfrm>
+            <a:off x="5394960" y="2834640"/>
+            <a:ext cx="685800" cy="274320"/>
+          </a:xfrm>
+          <a:prstGeom prst="rightArrow">
+            <a:avLst/>
+          </a:prstGeom>
+          <a:solidFill>
+            <a:srgbClr val="1F4E79"/>
+          </a:solidFill>
+          <a:ln>
+            <a:noFill/>
+          </a:ln>
+          <a:effectLst/>
+        </p:spPr>
+        <p:style>
+          <a:lnRef idx="1">
+            <a:schemeClr val="accent1"/>
+          </a:lnRef>
+          <a:fillRef idx="3">
+            <a:schemeClr val="accent1"/>
+          </a:fillRef>
+          <a:effectRef idx="2">
+            <a:schemeClr val="accent1"/>
+          </a:effectRef>
+          <a:fontRef idx="minor">
+            <a:schemeClr val="lt1"/>
+          </a:fontRef>
+        </p:style>
+        <p:txBody>
+          <a:bodyPr rtlCol="0" anchor="ctr"/>
+          <a:lstStyle/>
+          <a:p>
+            <a:pPr algn="ctr"/>
+          </a:p>
+        </p:txBody>
+      </p:sp>
+      <p:sp>
+        <p:nvSpPr>
+          <p:cNvPr id="6" name="Rounded Rectangle 5"/>
+          <p:cNvSpPr/>
+          <p:nvPr/>
+        </p:nvSpPr>
+        <p:spPr>
+          <a:xfrm>
+            <a:off x="6309360" y="1417320"/>
+            <a:ext cx="4480560" cy="822960"/>
+          </a:xfrm>
+          <a:prstGeom prst="roundRect">
+            <a:avLst/>
+          </a:prstGeom>
+          <a:solidFill>
+            <a:srgbClr val="E2EFDA"/>
+          </a:solidFill>
+          <a:ln w="12700">
+            <a:solidFill>
+              <a:srgbClr val="1F4E79"/>
+            </a:solidFill>
+          </a:ln>
+          <a:effectLst/>
+        </p:spPr>
+        <p:style>
+          <a:lnRef idx="1">
+            <a:schemeClr val="accent1"/>
+          </a:lnRef>
+          <a:fillRef idx="3">
+            <a:schemeClr val="accent1"/>
+          </a:fillRef>
+          <a:effectRef idx="2">
+            <a:schemeClr val="accent1"/>
+          </a:effectRef>
+          <a:fontRef idx="minor">
+            <a:schemeClr val="lt1"/>
+          </a:fontRef>
+        </p:style>
+        <p:txBody>
+          <a:bodyPr rtlCol="0" anchor="ctr" wrap="square"/>
+          <a:lstStyle/>
+          <a:p>
+            <a:pPr algn="ctr" rtl="1"/>
+            <a:r>
+              <a:rPr sz="1600" b="1">
+                <a:solidFill>
+                  <a:srgbClr val="333333"/>
+                </a:solidFill>
+                <a:latin typeface="Arial"/>
+              </a:rPr>
+              <a:t>اقتراح LLM + مراجعة بشرية</a:t>
+            </a:r>
+          </a:p>
+          <a:p>
+            <a:pPr algn="ctr" rtl="0"/>
+            <a:r>
+              <a:rPr sz="1200">
+                <a:solidFill>
+                  <a:srgbClr val="666666"/>
+                </a:solidFill>
+                <a:latin typeface="Calibri"/>
+              </a:rPr>
+              <a:t>LLM suggestion + human review</a:t>
+            </a:r>
+          </a:p>
+        </p:txBody>
+      </p:sp>
+      <p:sp>
+        <p:nvSpPr>
+          <p:cNvPr id="7" name="Rounded Rectangle 6"/>
+          <p:cNvSpPr/>
+          <p:nvPr/>
+        </p:nvSpPr>
+        <p:spPr>
+          <a:xfrm>
+            <a:off x="6309360" y="2468880"/>
+            <a:ext cx="4480560" cy="1143000"/>
+          </a:xfrm>
+          <a:prstGeom prst="roundRect">
+            <a:avLst/>
+          </a:prstGeom>
+          <a:solidFill>
+            <a:srgbClr val="DCE6F1"/>
+          </a:solidFill>
+          <a:ln w="12700">
+            <a:solidFill>
+              <a:srgbClr val="1F4E79"/>
+            </a:solidFill>
+          </a:ln>
+          <a:effectLst/>
+        </p:spPr>
+        <p:style>
+          <a:lnRef idx="1">
+            <a:schemeClr val="accent1"/>
+          </a:lnRef>
+          <a:fillRef idx="3">
+            <a:schemeClr val="accent1"/>
+          </a:fillRef>
+          <a:effectRef idx="2">
+            <a:schemeClr val="accent1"/>
+          </a:effectRef>
+          <a:fontRef idx="minor">
+            <a:schemeClr val="lt1"/>
+          </a:fontRef>
+        </p:style>
+        <p:txBody>
+          <a:bodyPr rtlCol="0" anchor="ctr" wrap="square"/>
+          <a:lstStyle/>
+          <a:p>
+            <a:pPr algn="ctr" rtl="1"/>
+            <a:r>
+              <a:rPr sz="1500" b="1">
+                <a:solidFill>
+                  <a:srgbClr val="333333"/>
+                </a:solidFill>
+                <a:latin typeface="Arial"/>
+              </a:rPr>
+              <a:t>تسميات موثوقة ← نموذج أفضل ← تغذية راجعة</a:t>
+            </a:r>
+          </a:p>
+          <a:p>
+            <a:pPr algn="ctr" rtl="0"/>
+            <a:r>
+              <a:rPr sz="1200">
+                <a:solidFill>
+                  <a:srgbClr val="666666"/>
+                </a:solidFill>
+                <a:latin typeface="Calibri"/>
+              </a:rPr>
+              <a:t>Trusted labels → better model → feedback</a:t>
+            </a:r>
+          </a:p>
+        </p:txBody>
+      </p:sp>
+      <p:sp>
+        <p:nvSpPr>
+          <p:cNvPr id="8" name="Rounded Rectangle 7"/>
+          <p:cNvSpPr/>
+          <p:nvPr/>
+        </p:nvSpPr>
+        <p:spPr>
+          <a:xfrm>
+            <a:off x="3063240" y="4617720"/>
+            <a:ext cx="6080760" cy="713232"/>
+          </a:xfrm>
+          <a:prstGeom prst="roundRect">
+            <a:avLst/>
+          </a:prstGeom>
+          <a:solidFill>
+            <a:srgbClr val="EDEDED"/>
+          </a:solidFill>
+          <a:ln w="12700">
+            <a:solidFill>
+              <a:srgbClr val="1F4E79"/>
+            </a:solidFill>
+          </a:ln>
+          <a:effectLst/>
+        </p:spPr>
+        <p:style>
+          <a:lnRef idx="1">
+            <a:schemeClr val="accent1"/>
+          </a:lnRef>
+          <a:fillRef idx="3">
+            <a:schemeClr val="accent1"/>
+          </a:fillRef>
+          <a:effectRef idx="2">
+            <a:schemeClr val="accent1"/>
+          </a:effectRef>
+          <a:fontRef idx="minor">
+            <a:schemeClr val="lt1"/>
+          </a:fontRef>
+        </p:style>
+        <p:txBody>
+          <a:bodyPr rtlCol="0" anchor="ctr" wrap="square"/>
+          <a:lstStyle/>
+          <a:p>
+            <a:pPr algn="ctr" rtl="1"/>
+            <a:r>
+              <a:rPr sz="1300" b="1">
+                <a:solidFill>
+                  <a:srgbClr val="333333"/>
+                </a:solidFill>
+                <a:latin typeface="Arial"/>
+              </a:rPr>
+              <a:t>قِس اتفاق المقيمين قبل قبول البيانات / Measure reviewer agreement before accepting data</a:t>
+            </a:r>
+          </a:p>
+        </p:txBody>
+      </p:sp>
+      <p:sp>
+        <p:nvSpPr>
+          <p:cNvPr id="9" name="TextBox 8"/>
+          <p:cNvSpPr txBox="1"/>
+          <p:nvPr/>
+        </p:nvSpPr>
+        <p:spPr>
+          <a:xfrm>
+            <a:off x="640080" y="6126480"/>
+            <a:ext cx="10972800" cy="548640"/>
+          </a:xfrm>
+          <a:prstGeom prst="rect">
+            <a:avLst/>
+          </a:prstGeom>
+          <a:noFill/>
+        </p:spPr>
+        <p:txBody>
+          <a:bodyPr wrap="square">
+            <a:spAutoFit/>
+          </a:bodyPr>
+          <a:lstStyle/>
+          <a:p>
+            <a:pPr algn="r" rtl="1"/>
+            <a:r>
+              <a:rPr sz="1400">
+                <a:solidFill>
+                  <a:srgbClr val="666666"/>
+                </a:solidFill>
+                <a:latin typeface="Arial"/>
+              </a:rPr>
+              <a:t>الـ LLM يسرّع العمل؛ الإنسان يظل مسؤولًا عن القبول والجودة.</a:t>
+            </a:r>
+          </a:p>
+          <a:p>
+            <a:pPr algn="r" rtl="0"/>
+            <a:r>
+              <a:t>The LLM accelerates work; people remain accountable for acceptance and quality.</a:t>
+            </a:r>
+          </a:p>
+        </p:txBody>
+      </p:sp>
+    </p:spTree>
+  </p:cSld>
+  <p:clrMapOvr>
+    <a:masterClrMapping/>
+  </p:clrMapOvr>
+</p:sld>
+</file>
+
+<file path=ppt/slides/slide18.xml><?xml version="1.0" encoding="utf-8"?>
+<p:sld xmlns:a="http://schemas.openxmlformats.org/drawingml/2006/main" xmlns:p="http://schemas.openxmlformats.org/presentationml/2006/main" xmlns:r="http://schemas.openxmlformats.org/officeDocument/2006/relationships">
+  <p:cSld>
+    <p:bg>
+      <p:bgPr>
+        <a:solidFill>
+          <a:srgbClr val="FFFFFF"/>
+        </a:solidFill>
+        <a:effectLst/>
+      </p:bgPr>
+    </p:bg>
+    <p:spTree>
+      <p:nvGrpSpPr>
+        <p:cNvPr id="1" name=""/>
+        <p:cNvGrpSpPr/>
+        <p:nvPr/>
+      </p:nvGrpSpPr>
+      <p:grpSpPr/>
+      <p:sp>
+        <p:nvSpPr>
+          <p:cNvPr id="2" name="TextBox 1"/>
+          <p:cNvSpPr txBox="1"/>
+          <p:nvPr/>
+        </p:nvSpPr>
+        <p:spPr>
+          <a:xfrm>
+            <a:off x="640080" y="137160"/>
+            <a:ext cx="10972800" cy="640080"/>
+          </a:xfrm>
+          <a:prstGeom prst="rect">
+            <a:avLst/>
+          </a:prstGeom>
+          <a:noFill/>
+        </p:spPr>
+        <p:txBody>
+          <a:bodyPr wrap="none">
+            <a:spAutoFit/>
+          </a:bodyPr>
+          <a:lstStyle/>
+          <a:p>
+            <a:pPr algn="r" rtl="1"/>
+            <a:r>
+              <a:rPr sz="3000" b="1">
+                <a:solidFill>
+                  <a:srgbClr val="1F3B5C"/>
+                </a:solidFill>
+                <a:latin typeface="Arial"/>
+              </a:rPr>
+              <a:t>خريطة سلسلة العهدة / Data Lineage Map</a:t>
+            </a:r>
+          </a:p>
+        </p:txBody>
+      </p:sp>
+      <p:sp>
+        <p:nvSpPr>
+          <p:cNvPr id="3" name="Rounded Rectangle 2"/>
+          <p:cNvSpPr/>
+          <p:nvPr/>
+        </p:nvSpPr>
+        <p:spPr>
+          <a:xfrm>
+            <a:off x="594360" y="1874519"/>
+            <a:ext cx="2560320" cy="868680"/>
+          </a:xfrm>
+          <a:prstGeom prst="roundRect">
+            <a:avLst/>
+          </a:prstGeom>
+          <a:solidFill>
+            <a:srgbClr val="EDEDED"/>
+          </a:solidFill>
+          <a:ln w="12700">
+            <a:solidFill>
+              <a:srgbClr val="1F4E79"/>
+            </a:solidFill>
+          </a:ln>
+          <a:effectLst/>
+        </p:spPr>
+        <p:style>
+          <a:lnRef idx="1">
+            <a:schemeClr val="accent1"/>
+          </a:lnRef>
+          <a:fillRef idx="3">
+            <a:schemeClr val="accent1"/>
+          </a:fillRef>
+          <a:effectRef idx="2">
+            <a:schemeClr val="accent1"/>
+          </a:effectRef>
+          <a:fontRef idx="minor">
+            <a:schemeClr val="lt1"/>
+          </a:fontRef>
+        </p:style>
+        <p:txBody>
+          <a:bodyPr rtlCol="0" anchor="ctr" wrap="square"/>
+          <a:lstStyle/>
+          <a:p>
+            <a:pPr algn="ctr" rtl="1"/>
+            <a:r>
+              <a:rPr sz="1600" b="1">
+                <a:solidFill>
+                  <a:srgbClr val="333333"/>
+                </a:solidFill>
+                <a:latin typeface="Arial"/>
+              </a:rPr>
+              <a:t>مصدر</a:t>
+            </a:r>
+          </a:p>
+          <a:p>
+            <a:pPr algn="ctr" rtl="0"/>
+            <a:r>
+              <a:rPr sz="1200">
+                <a:solidFill>
+                  <a:srgbClr val="666666"/>
+                </a:solidFill>
+                <a:latin typeface="Calibri"/>
+              </a:rPr>
+              <a:t>Source</a:t>
+            </a:r>
+          </a:p>
+        </p:txBody>
+      </p:sp>
+      <p:sp>
+        <p:nvSpPr>
+          <p:cNvPr id="4" name="Rounded Rectangle 3"/>
+          <p:cNvSpPr/>
+          <p:nvPr/>
+        </p:nvSpPr>
+        <p:spPr>
+          <a:xfrm>
+            <a:off x="594360" y="2926080"/>
+            <a:ext cx="2560320" cy="640080"/>
+          </a:xfrm>
+          <a:prstGeom prst="roundRect">
+            <a:avLst/>
+          </a:prstGeom>
+          <a:solidFill>
+            <a:srgbClr val="EDEDED"/>
+          </a:solidFill>
+          <a:ln w="12700">
+            <a:solidFill>
+              <a:srgbClr val="1F4E79"/>
+            </a:solidFill>
+          </a:ln>
+          <a:effectLst/>
+        </p:spPr>
+        <p:style>
+          <a:lnRef idx="1">
+            <a:schemeClr val="accent1"/>
+          </a:lnRef>
+          <a:fillRef idx="3">
+            <a:schemeClr val="accent1"/>
+          </a:fillRef>
+          <a:effectRef idx="2">
+            <a:schemeClr val="accent1"/>
+          </a:effectRef>
+          <a:fontRef idx="minor">
+            <a:schemeClr val="lt1"/>
+          </a:fontRef>
+        </p:style>
+        <p:txBody>
+          <a:bodyPr rtlCol="0" anchor="ctr" wrap="square"/>
+          <a:lstStyle/>
+          <a:p>
+            <a:pPr algn="ctr" rtl="1"/>
+            <a:r>
+              <a:rPr sz="1200" b="1">
+                <a:solidFill>
+                  <a:srgbClr val="333333"/>
+                </a:solidFill>
+                <a:latin typeface="Arial"/>
+              </a:rPr>
+              <a:t>CRM / API</a:t>
+            </a:r>
+          </a:p>
+        </p:txBody>
+      </p:sp>
+      <p:sp>
+        <p:nvSpPr>
+          <p:cNvPr id="5" name="Right Arrow 4"/>
+          <p:cNvSpPr/>
+          <p:nvPr/>
+        </p:nvSpPr>
+        <p:spPr>
+          <a:xfrm>
+            <a:off x="3227832" y="2240280"/>
+            <a:ext cx="329184" cy="274320"/>
+          </a:xfrm>
+          <a:prstGeom prst="rightArrow">
+            <a:avLst/>
+          </a:prstGeom>
+          <a:solidFill>
+            <a:srgbClr val="1F4E79"/>
+          </a:solidFill>
+          <a:ln>
+            <a:noFill/>
+          </a:ln>
+          <a:effectLst/>
+        </p:spPr>
+        <p:style>
+          <a:lnRef idx="1">
+            <a:schemeClr val="accent1"/>
+          </a:lnRef>
+          <a:fillRef idx="3">
+            <a:schemeClr val="accent1"/>
+          </a:fillRef>
+          <a:effectRef idx="2">
+            <a:schemeClr val="accent1"/>
+          </a:effectRef>
+          <a:fontRef idx="minor">
+            <a:schemeClr val="lt1"/>
+          </a:fontRef>
+        </p:style>
+        <p:txBody>
+          <a:bodyPr rtlCol="0" anchor="ctr"/>
+          <a:lstStyle/>
+          <a:p>
+            <a:pPr algn="ctr"/>
+          </a:p>
+        </p:txBody>
+      </p:sp>
+      <p:sp>
+        <p:nvSpPr>
+          <p:cNvPr id="6" name="Rounded Rectangle 5"/>
+          <p:cNvSpPr/>
+          <p:nvPr/>
+        </p:nvSpPr>
+        <p:spPr>
+          <a:xfrm>
+            <a:off x="3474720" y="1874519"/>
+            <a:ext cx="2560320" cy="868680"/>
+          </a:xfrm>
+          <a:prstGeom prst="roundRect">
+            <a:avLst/>
+          </a:prstGeom>
+          <a:solidFill>
+            <a:srgbClr val="DCE6F1"/>
+          </a:solidFill>
+          <a:ln w="12700">
+            <a:solidFill>
+              <a:srgbClr val="1F4E79"/>
+            </a:solidFill>
+          </a:ln>
+          <a:effectLst/>
+        </p:spPr>
+        <p:style>
+          <a:lnRef idx="1">
+            <a:schemeClr val="accent1"/>
+          </a:lnRef>
+          <a:fillRef idx="3">
+            <a:schemeClr val="accent1"/>
+          </a:fillRef>
+          <a:effectRef idx="2">
+            <a:schemeClr val="accent1"/>
+          </a:effectRef>
+          <a:fontRef idx="minor">
+            <a:schemeClr val="lt1"/>
+          </a:fontRef>
+        </p:style>
+        <p:txBody>
+          <a:bodyPr rtlCol="0" anchor="ctr" wrap="square"/>
+          <a:lstStyle/>
+          <a:p>
+            <a:pPr algn="ctr" rtl="1"/>
+            <a:r>
+              <a:rPr sz="1600" b="1">
+                <a:solidFill>
+                  <a:srgbClr val="333333"/>
+                </a:solidFill>
+                <a:latin typeface="Arial"/>
+              </a:rPr>
+              <a:t>تحويل</a:t>
+            </a:r>
+          </a:p>
+          <a:p>
+            <a:pPr algn="ctr" rtl="0"/>
+            <a:r>
+              <a:rPr sz="1200">
+                <a:solidFill>
+                  <a:srgbClr val="666666"/>
+                </a:solidFill>
+                <a:latin typeface="Calibri"/>
+              </a:rPr>
+              <a:t>Transform</a:t>
+            </a:r>
+          </a:p>
+        </p:txBody>
+      </p:sp>
+      <p:sp>
+        <p:nvSpPr>
+          <p:cNvPr id="7" name="Rounded Rectangle 6"/>
+          <p:cNvSpPr/>
+          <p:nvPr/>
+        </p:nvSpPr>
+        <p:spPr>
+          <a:xfrm>
+            <a:off x="3474720" y="2926080"/>
+            <a:ext cx="2560320" cy="640080"/>
+          </a:xfrm>
+          <a:prstGeom prst="roundRect">
+            <a:avLst/>
+          </a:prstGeom>
+          <a:solidFill>
+            <a:srgbClr val="EDEDED"/>
+          </a:solidFill>
+          <a:ln w="12700">
+            <a:solidFill>
+              <a:srgbClr val="1F4E79"/>
+            </a:solidFill>
+          </a:ln>
+          <a:effectLst/>
+        </p:spPr>
+        <p:style>
+          <a:lnRef idx="1">
+            <a:schemeClr val="accent1"/>
+          </a:lnRef>
+          <a:fillRef idx="3">
+            <a:schemeClr val="accent1"/>
+          </a:fillRef>
+          <a:effectRef idx="2">
+            <a:schemeClr val="accent1"/>
+          </a:effectRef>
+          <a:fontRef idx="minor">
+            <a:schemeClr val="lt1"/>
+          </a:fontRef>
+        </p:style>
+        <p:txBody>
+          <a:bodyPr rtlCol="0" anchor="ctr" wrap="square"/>
+          <a:lstStyle/>
+          <a:p>
+            <a:pPr algn="ctr" rtl="1"/>
+            <a:r>
+              <a:rPr sz="1200" b="1">
+                <a:solidFill>
+                  <a:srgbClr val="333333"/>
+                </a:solidFill>
+                <a:latin typeface="Arial"/>
+              </a:rPr>
+              <a:t>تنظيف + توحيد</a:t>
+            </a:r>
+          </a:p>
+        </p:txBody>
+      </p:sp>
+      <p:sp>
+        <p:nvSpPr>
+          <p:cNvPr id="8" name="Right Arrow 7"/>
+          <p:cNvSpPr/>
+          <p:nvPr/>
+        </p:nvSpPr>
+        <p:spPr>
+          <a:xfrm>
+            <a:off x="6108192" y="2240280"/>
+            <a:ext cx="329184" cy="274320"/>
+          </a:xfrm>
+          <a:prstGeom prst="rightArrow">
+            <a:avLst/>
+          </a:prstGeom>
+          <a:solidFill>
+            <a:srgbClr val="1F4E79"/>
+          </a:solidFill>
+          <a:ln>
+            <a:noFill/>
+          </a:ln>
+          <a:effectLst/>
+        </p:spPr>
+        <p:style>
+          <a:lnRef idx="1">
+            <a:schemeClr val="accent1"/>
+          </a:lnRef>
+          <a:fillRef idx="3">
+            <a:schemeClr val="accent1"/>
+          </a:fillRef>
+          <a:effectRef idx="2">
+            <a:schemeClr val="accent1"/>
+          </a:effectRef>
+          <a:fontRef idx="minor">
+            <a:schemeClr val="lt1"/>
+          </a:fontRef>
+        </p:style>
+        <p:txBody>
+          <a:bodyPr rtlCol="0" anchor="ctr"/>
+          <a:lstStyle/>
+          <a:p>
+            <a:pPr algn="ctr"/>
+          </a:p>
+        </p:txBody>
+      </p:sp>
+      <p:sp>
+        <p:nvSpPr>
+          <p:cNvPr id="9" name="Rounded Rectangle 8"/>
+          <p:cNvSpPr/>
+          <p:nvPr/>
+        </p:nvSpPr>
+        <p:spPr>
+          <a:xfrm>
+            <a:off x="6355080" y="1874519"/>
+            <a:ext cx="2560320" cy="868680"/>
+          </a:xfrm>
+          <a:prstGeom prst="roundRect">
+            <a:avLst/>
+          </a:prstGeom>
+          <a:solidFill>
+            <a:srgbClr val="E2EFDA"/>
+          </a:solidFill>
+          <a:ln w="12700">
+            <a:solidFill>
+              <a:srgbClr val="1F4E79"/>
+            </a:solidFill>
+          </a:ln>
+          <a:effectLst/>
+        </p:spPr>
+        <p:style>
+          <a:lnRef idx="1">
+            <a:schemeClr val="accent1"/>
+          </a:lnRef>
+          <a:fillRef idx="3">
+            <a:schemeClr val="accent1"/>
+          </a:fillRef>
+          <a:effectRef idx="2">
+            <a:schemeClr val="accent1"/>
+          </a:effectRef>
+          <a:fontRef idx="minor">
+            <a:schemeClr val="lt1"/>
+          </a:fontRef>
+        </p:style>
+        <p:txBody>
+          <a:bodyPr rtlCol="0" anchor="ctr" wrap="square"/>
+          <a:lstStyle/>
+          <a:p>
+            <a:pPr algn="ctr" rtl="1"/>
+            <a:r>
+              <a:rPr sz="1600" b="1">
+                <a:solidFill>
+                  <a:srgbClr val="333333"/>
+                </a:solidFill>
+                <a:latin typeface="Arial"/>
+              </a:rPr>
+              <a:t>منتج بيانات</a:t>
+            </a:r>
+          </a:p>
+          <a:p>
+            <a:pPr algn="ctr" rtl="0"/>
+            <a:r>
+              <a:rPr sz="1200">
+                <a:solidFill>
+                  <a:srgbClr val="666666"/>
+                </a:solidFill>
+                <a:latin typeface="Calibri"/>
+              </a:rPr>
+              <a:t>Data product</a:t>
+            </a:r>
+          </a:p>
+        </p:txBody>
+      </p:sp>
+      <p:sp>
+        <p:nvSpPr>
+          <p:cNvPr id="10" name="Rounded Rectangle 9"/>
+          <p:cNvSpPr/>
+          <p:nvPr/>
+        </p:nvSpPr>
+        <p:spPr>
+          <a:xfrm>
+            <a:off x="6355080" y="2926080"/>
+            <a:ext cx="2560320" cy="640080"/>
+          </a:xfrm>
+          <a:prstGeom prst="roundRect">
+            <a:avLst/>
+          </a:prstGeom>
+          <a:solidFill>
+            <a:srgbClr val="EDEDED"/>
+          </a:solidFill>
+          <a:ln w="12700">
+            <a:solidFill>
+              <a:srgbClr val="1F4E79"/>
+            </a:solidFill>
+          </a:ln>
+          <a:effectLst/>
+        </p:spPr>
+        <p:style>
+          <a:lnRef idx="1">
+            <a:schemeClr val="accent1"/>
+          </a:lnRef>
+          <a:fillRef idx="3">
+            <a:schemeClr val="accent1"/>
+          </a:fillRef>
+          <a:effectRef idx="2">
+            <a:schemeClr val="accent1"/>
+          </a:effectRef>
+          <a:fontRef idx="minor">
+            <a:schemeClr val="lt1"/>
+          </a:fontRef>
+        </p:style>
+        <p:txBody>
+          <a:bodyPr rtlCol="0" anchor="ctr" wrap="square"/>
+          <a:lstStyle/>
+          <a:p>
+            <a:pPr algn="ctr" rtl="1"/>
+            <a:r>
+              <a:rPr sz="1200" b="1">
+                <a:solidFill>
+                  <a:srgbClr val="333333"/>
+                </a:solidFill>
+                <a:latin typeface="Arial"/>
+              </a:rPr>
+              <a:t>مخطط + مالك</a:t>
+            </a:r>
+          </a:p>
+        </p:txBody>
+      </p:sp>
+      <p:sp>
+        <p:nvSpPr>
+          <p:cNvPr id="11" name="Right Arrow 10"/>
+          <p:cNvSpPr/>
+          <p:nvPr/>
+        </p:nvSpPr>
+        <p:spPr>
+          <a:xfrm>
+            <a:off x="8988552" y="2240280"/>
+            <a:ext cx="329184" cy="274320"/>
+          </a:xfrm>
+          <a:prstGeom prst="rightArrow">
+            <a:avLst/>
+          </a:prstGeom>
+          <a:solidFill>
+            <a:srgbClr val="1F4E79"/>
+          </a:solidFill>
+          <a:ln>
+            <a:noFill/>
+          </a:ln>
+          <a:effectLst/>
+        </p:spPr>
+        <p:style>
+          <a:lnRef idx="1">
+            <a:schemeClr val="accent1"/>
+          </a:lnRef>
+          <a:fillRef idx="3">
+            <a:schemeClr val="accent1"/>
+          </a:fillRef>
+          <a:effectRef idx="2">
+            <a:schemeClr val="accent1"/>
+          </a:effectRef>
+          <a:fontRef idx="minor">
+            <a:schemeClr val="lt1"/>
+          </a:fontRef>
+        </p:style>
+        <p:txBody>
+          <a:bodyPr rtlCol="0" anchor="ctr"/>
+          <a:lstStyle/>
+          <a:p>
+            <a:pPr algn="ctr"/>
+          </a:p>
+        </p:txBody>
+      </p:sp>
+      <p:sp>
+        <p:nvSpPr>
+          <p:cNvPr id="12" name="Rounded Rectangle 11"/>
+          <p:cNvSpPr/>
+          <p:nvPr/>
+        </p:nvSpPr>
+        <p:spPr>
+          <a:xfrm>
+            <a:off x="9235440" y="1874519"/>
+            <a:ext cx="2560320" cy="868680"/>
+          </a:xfrm>
+          <a:prstGeom prst="roundRect">
+            <a:avLst/>
+          </a:prstGeom>
+          <a:solidFill>
+            <a:srgbClr val="FDE9D9"/>
+          </a:solidFill>
+          <a:ln w="12700">
+            <a:solidFill>
+              <a:srgbClr val="1F4E79"/>
+            </a:solidFill>
+          </a:ln>
+          <a:effectLst/>
+        </p:spPr>
+        <p:style>
+          <a:lnRef idx="1">
+            <a:schemeClr val="accent1"/>
+          </a:lnRef>
+          <a:fillRef idx="3">
+            <a:schemeClr val="accent1"/>
+          </a:fillRef>
+          <a:effectRef idx="2">
+            <a:schemeClr val="accent1"/>
+          </a:effectRef>
+          <a:fontRef idx="minor">
+            <a:schemeClr val="lt1"/>
+          </a:fontRef>
+        </p:style>
+        <p:txBody>
+          <a:bodyPr rtlCol="0" anchor="ctr" wrap="square"/>
+          <a:lstStyle/>
+          <a:p>
+            <a:pPr algn="ctr" rtl="1"/>
+            <a:r>
+              <a:rPr sz="1600" b="1">
+                <a:solidFill>
+                  <a:srgbClr val="333333"/>
+                </a:solidFill>
+                <a:latin typeface="Arial"/>
+              </a:rPr>
+              <a:t>استهلاك</a:t>
+            </a:r>
+          </a:p>
+          <a:p>
+            <a:pPr algn="ctr" rtl="0"/>
+            <a:r>
+              <a:rPr sz="1200">
+                <a:solidFill>
+                  <a:srgbClr val="666666"/>
+                </a:solidFill>
+                <a:latin typeface="Calibri"/>
+              </a:rPr>
+              <a:t>Consume</a:t>
+            </a:r>
+          </a:p>
+        </p:txBody>
+      </p:sp>
+      <p:sp>
+        <p:nvSpPr>
+          <p:cNvPr id="13" name="Rounded Rectangle 12"/>
+          <p:cNvSpPr/>
+          <p:nvPr/>
+        </p:nvSpPr>
+        <p:spPr>
+          <a:xfrm>
+            <a:off x="9235440" y="2926080"/>
+            <a:ext cx="2560320" cy="640080"/>
+          </a:xfrm>
+          <a:prstGeom prst="roundRect">
+            <a:avLst/>
+          </a:prstGeom>
+          <a:solidFill>
+            <a:srgbClr val="EDEDED"/>
+          </a:solidFill>
+          <a:ln w="12700">
+            <a:solidFill>
+              <a:srgbClr val="1F4E79"/>
+            </a:solidFill>
+          </a:ln>
+          <a:effectLst/>
+        </p:spPr>
+        <p:style>
+          <a:lnRef idx="1">
+            <a:schemeClr val="accent1"/>
+          </a:lnRef>
+          <a:fillRef idx="3">
+            <a:schemeClr val="accent1"/>
+          </a:fillRef>
+          <a:effectRef idx="2">
+            <a:schemeClr val="accent1"/>
+          </a:effectRef>
+          <a:fontRef idx="minor">
+            <a:schemeClr val="lt1"/>
+          </a:fontRef>
+        </p:style>
+        <p:txBody>
+          <a:bodyPr rtlCol="0" anchor="ctr" wrap="square"/>
+          <a:lstStyle/>
+          <a:p>
+            <a:pPr algn="ctr" rtl="1"/>
+            <a:r>
+              <a:rPr sz="1200" b="1">
+                <a:solidFill>
+                  <a:srgbClr val="333333"/>
+                </a:solidFill>
+                <a:latin typeface="Arial"/>
+              </a:rPr>
+              <a:t>لوحة / نموذج</a:t>
+            </a:r>
+          </a:p>
+        </p:txBody>
+      </p:sp>
+      <p:sp>
+        <p:nvSpPr>
+          <p:cNvPr id="14" name="Rounded Rectangle 13"/>
+          <p:cNvSpPr/>
+          <p:nvPr/>
+        </p:nvSpPr>
+        <p:spPr>
+          <a:xfrm>
+            <a:off x="2286000" y="4709160"/>
+            <a:ext cx="7635240" cy="731520"/>
+          </a:xfrm>
+          <a:prstGeom prst="roundRect">
+            <a:avLst/>
+          </a:prstGeom>
+          <a:solidFill>
+            <a:srgbClr val="DCE6F1"/>
+          </a:solidFill>
+          <a:ln w="12700">
+            <a:solidFill>
+              <a:srgbClr val="1F4E79"/>
+            </a:solidFill>
+          </a:ln>
+          <a:effectLst/>
+        </p:spPr>
+        <p:style>
+          <a:lnRef idx="1">
+            <a:schemeClr val="accent1"/>
+          </a:lnRef>
+          <a:fillRef idx="3">
+            <a:schemeClr val="accent1"/>
+          </a:fillRef>
+          <a:effectRef idx="2">
+            <a:schemeClr val="accent1"/>
+          </a:effectRef>
+          <a:fontRef idx="minor">
+            <a:schemeClr val="lt1"/>
+          </a:fontRef>
+        </p:style>
+        <p:txBody>
+          <a:bodyPr rtlCol="0" anchor="ctr" wrap="square"/>
+          <a:lstStyle/>
+          <a:p>
+            <a:pPr algn="ctr" rtl="1"/>
+            <a:r>
+              <a:rPr sz="1400" b="1">
+                <a:solidFill>
+                  <a:srgbClr val="333333"/>
+                </a:solidFill>
+                <a:latin typeface="Arial"/>
+              </a:rPr>
+              <a:t>لكل خطوة: مالك + وقت + سياسة + أثر التغيير</a:t>
+            </a:r>
+          </a:p>
+          <a:p>
+            <a:pPr algn="ctr" rtl="0"/>
+            <a:r>
+              <a:rPr sz="1200">
+                <a:solidFill>
+                  <a:srgbClr val="666666"/>
+                </a:solidFill>
+                <a:latin typeface="Calibri"/>
+              </a:rPr>
+              <a:t>For every step: owner + time + policy + change impact</a:t>
+            </a:r>
+          </a:p>
+        </p:txBody>
+      </p:sp>
+      <p:sp>
+        <p:nvSpPr>
+          <p:cNvPr id="15" name="TextBox 14"/>
+          <p:cNvSpPr txBox="1"/>
+          <p:nvPr/>
+        </p:nvSpPr>
+        <p:spPr>
+          <a:xfrm>
+            <a:off x="640080" y="6126480"/>
+            <a:ext cx="10972800" cy="548640"/>
+          </a:xfrm>
+          <a:prstGeom prst="rect">
+            <a:avLst/>
+          </a:prstGeom>
+          <a:noFill/>
+        </p:spPr>
+        <p:txBody>
+          <a:bodyPr wrap="square">
+            <a:spAutoFit/>
+          </a:bodyPr>
+          <a:lstStyle/>
+          <a:p>
+            <a:pPr algn="r" rtl="1"/>
+            <a:r>
+              <a:rPr sz="1400">
+                <a:solidFill>
+                  <a:srgbClr val="666666"/>
+                </a:solidFill>
+                <a:latin typeface="Arial"/>
+              </a:rPr>
+              <a:t>اسأل «من أين جاءت هذه النتيجة؟» ثم اتبع السلسلة إلى المصدر.</a:t>
+            </a:r>
+          </a:p>
+          <a:p>
+            <a:pPr algn="r" rtl="0"/>
+            <a:r>
+              <a:t>Ask “where did this result come from?” then follow the chain to its source.</a:t>
+            </a:r>
+          </a:p>
+        </p:txBody>
+      </p:sp>
+    </p:spTree>
+  </p:cSld>
+  <p:clrMapOvr>
+    <a:masterClrMapping/>
+  </p:clrMapOvr>
+</p:sld>
+</file>
+
+<file path=ppt/slides/slide19.xml><?xml version="1.0" encoding="utf-8"?>
+<p:sld xmlns:a="http://schemas.openxmlformats.org/drawingml/2006/main" xmlns:p="http://schemas.openxmlformats.org/presentationml/2006/main" xmlns:r="http://schemas.openxmlformats.org/officeDocument/2006/relationships">
+  <p:cSld>
+    <p:bg>
+      <p:bgPr>
+        <a:solidFill>
+          <a:srgbClr val="FFFFFF"/>
+        </a:solidFill>
+        <a:effectLst/>
+      </p:bgPr>
+    </p:bg>
+    <p:spTree>
+      <p:nvGrpSpPr>
+        <p:cNvPr id="1" name=""/>
+        <p:cNvGrpSpPr/>
+        <p:nvPr/>
+      </p:nvGrpSpPr>
+      <p:grpSpPr/>
+      <p:sp>
+        <p:nvSpPr>
+          <p:cNvPr id="2" name="TextBox 1"/>
+          <p:cNvSpPr txBox="1"/>
+          <p:nvPr/>
+        </p:nvSpPr>
+        <p:spPr>
+          <a:xfrm>
+            <a:off x="640080" y="137160"/>
+            <a:ext cx="10972800" cy="640080"/>
+          </a:xfrm>
+          <a:prstGeom prst="rect">
+            <a:avLst/>
+          </a:prstGeom>
+          <a:noFill/>
+        </p:spPr>
+        <p:txBody>
+          <a:bodyPr wrap="none">
+            <a:spAutoFit/>
+          </a:bodyPr>
+          <a:lstStyle/>
+          <a:p>
+            <a:pPr algn="r" rtl="1"/>
+            <a:r>
+              <a:rPr sz="3000" b="1">
+                <a:solidFill>
+                  <a:srgbClr val="1F3B5C"/>
+                </a:solidFill>
+                <a:latin typeface="Arial"/>
+              </a:rPr>
+              <a:t>دورة حياة MLOps / MLOps Lifecycle</a:t>
+            </a:r>
+          </a:p>
+        </p:txBody>
+      </p:sp>
+      <p:sp>
+        <p:nvSpPr>
+          <p:cNvPr id="3" name="Rounded Rectangle 2"/>
+          <p:cNvSpPr/>
+          <p:nvPr/>
+        </p:nvSpPr>
+        <p:spPr>
+          <a:xfrm>
+            <a:off x="502920" y="1965960"/>
+            <a:ext cx="2011680" cy="1143000"/>
+          </a:xfrm>
+          <a:prstGeom prst="roundRect">
+            <a:avLst/>
+          </a:prstGeom>
+          <a:solidFill>
+            <a:srgbClr val="DCE6F1"/>
+          </a:solidFill>
+          <a:ln w="12700">
+            <a:solidFill>
+              <a:srgbClr val="1F4E79"/>
+            </a:solidFill>
+          </a:ln>
+          <a:effectLst/>
+        </p:spPr>
+        <p:style>
+          <a:lnRef idx="1">
+            <a:schemeClr val="accent1"/>
+          </a:lnRef>
+          <a:fillRef idx="3">
+            <a:schemeClr val="accent1"/>
+          </a:fillRef>
+          <a:effectRef idx="2">
+            <a:schemeClr val="accent1"/>
+          </a:effectRef>
+          <a:fontRef idx="minor">
+            <a:schemeClr val="lt1"/>
+          </a:fontRef>
+        </p:style>
+        <p:txBody>
+          <a:bodyPr rtlCol="0" anchor="ctr" wrap="square"/>
+          <a:lstStyle/>
+          <a:p>
+            <a:pPr algn="ctr" rtl="1"/>
+            <a:r>
+              <a:rPr sz="1500" b="1">
+                <a:solidFill>
+                  <a:srgbClr val="333333"/>
+                </a:solidFill>
+                <a:latin typeface="Arial"/>
+              </a:rPr>
+              <a:t>تجربة</a:t>
+            </a:r>
+          </a:p>
+          <a:p>
+            <a:pPr algn="ctr" rtl="0"/>
+            <a:r>
+              <a:rPr sz="1100">
+                <a:solidFill>
+                  <a:srgbClr val="666666"/>
+                </a:solidFill>
+                <a:latin typeface="Calibri"/>
+              </a:rPr>
+              <a:t>Experiment</a:t>
+            </a:r>
+          </a:p>
+        </p:txBody>
+      </p:sp>
+      <p:sp>
+        <p:nvSpPr>
+          <p:cNvPr id="4" name="Right Arrow 3"/>
+          <p:cNvSpPr/>
+          <p:nvPr/>
+        </p:nvSpPr>
+        <p:spPr>
+          <a:xfrm>
+            <a:off x="2560320" y="2423160"/>
+            <a:ext cx="256032" cy="274320"/>
+          </a:xfrm>
+          <a:prstGeom prst="rightArrow">
+            <a:avLst/>
+          </a:prstGeom>
+          <a:solidFill>
+            <a:srgbClr val="1F4E79"/>
+          </a:solidFill>
+          <a:ln>
+            <a:noFill/>
+          </a:ln>
+          <a:effectLst/>
+        </p:spPr>
+        <p:style>
+          <a:lnRef idx="1">
+            <a:schemeClr val="accent1"/>
+          </a:lnRef>
+          <a:fillRef idx="3">
+            <a:schemeClr val="accent1"/>
+          </a:fillRef>
+          <a:effectRef idx="2">
+            <a:schemeClr val="accent1"/>
+          </a:effectRef>
+          <a:fontRef idx="minor">
+            <a:schemeClr val="lt1"/>
+          </a:fontRef>
+        </p:style>
+        <p:txBody>
+          <a:bodyPr rtlCol="0" anchor="ctr"/>
+          <a:lstStyle/>
+          <a:p>
+            <a:pPr algn="ctr"/>
+          </a:p>
+        </p:txBody>
+      </p:sp>
+      <p:sp>
+        <p:nvSpPr>
+          <p:cNvPr id="5" name="Rounded Rectangle 4"/>
+          <p:cNvSpPr/>
+          <p:nvPr/>
+        </p:nvSpPr>
+        <p:spPr>
+          <a:xfrm>
+            <a:off x="2834640" y="1965960"/>
+            <a:ext cx="2011680" cy="1143000"/>
+          </a:xfrm>
+          <a:prstGeom prst="roundRect">
+            <a:avLst/>
+          </a:prstGeom>
+          <a:solidFill>
+            <a:srgbClr val="E2EFDA"/>
+          </a:solidFill>
+          <a:ln w="12700">
+            <a:solidFill>
+              <a:srgbClr val="1F4E79"/>
+            </a:solidFill>
+          </a:ln>
+          <a:effectLst/>
+        </p:spPr>
+        <p:style>
+          <a:lnRef idx="1">
+            <a:schemeClr val="accent1"/>
+          </a:lnRef>
+          <a:fillRef idx="3">
+            <a:schemeClr val="accent1"/>
+          </a:fillRef>
+          <a:effectRef idx="2">
+            <a:schemeClr val="accent1"/>
+          </a:effectRef>
+          <a:fontRef idx="minor">
+            <a:schemeClr val="lt1"/>
+          </a:fontRef>
+        </p:style>
+        <p:txBody>
+          <a:bodyPr rtlCol="0" anchor="ctr" wrap="square"/>
+          <a:lstStyle/>
+          <a:p>
+            <a:pPr algn="ctr" rtl="1"/>
+            <a:r>
+              <a:rPr sz="1500" b="1">
+                <a:solidFill>
+                  <a:srgbClr val="333333"/>
+                </a:solidFill>
+                <a:latin typeface="Arial"/>
+              </a:rPr>
+              <a:t>تحقق</a:t>
+            </a:r>
+          </a:p>
+          <a:p>
+            <a:pPr algn="ctr" rtl="0"/>
+            <a:r>
+              <a:rPr sz="1100">
+                <a:solidFill>
+                  <a:srgbClr val="666666"/>
+                </a:solidFill>
+                <a:latin typeface="Calibri"/>
+              </a:rPr>
+              <a:t>Validate</a:t>
+            </a:r>
+          </a:p>
+        </p:txBody>
+      </p:sp>
+      <p:sp>
+        <p:nvSpPr>
+          <p:cNvPr id="6" name="Right Arrow 5"/>
+          <p:cNvSpPr/>
+          <p:nvPr/>
+        </p:nvSpPr>
+        <p:spPr>
+          <a:xfrm>
+            <a:off x="4892040" y="2423160"/>
+            <a:ext cx="256032" cy="274320"/>
+          </a:xfrm>
+          <a:prstGeom prst="rightArrow">
+            <a:avLst/>
+          </a:prstGeom>
+          <a:solidFill>
+            <a:srgbClr val="1F4E79"/>
+          </a:solidFill>
+          <a:ln>
+            <a:noFill/>
+          </a:ln>
+          <a:effectLst/>
+        </p:spPr>
+        <p:style>
+          <a:lnRef idx="1">
+            <a:schemeClr val="accent1"/>
+          </a:lnRef>
+          <a:fillRef idx="3">
+            <a:schemeClr val="accent1"/>
+          </a:fillRef>
+          <a:effectRef idx="2">
+            <a:schemeClr val="accent1"/>
+          </a:effectRef>
+          <a:fontRef idx="minor">
+            <a:schemeClr val="lt1"/>
+          </a:fontRef>
+        </p:style>
+        <p:txBody>
+          <a:bodyPr rtlCol="0" anchor="ctr"/>
+          <a:lstStyle/>
+          <a:p>
+            <a:pPr algn="ctr"/>
+          </a:p>
+        </p:txBody>
+      </p:sp>
+      <p:sp>
+        <p:nvSpPr>
+          <p:cNvPr id="7" name="Rounded Rectangle 6"/>
+          <p:cNvSpPr/>
+          <p:nvPr/>
+        </p:nvSpPr>
+        <p:spPr>
+          <a:xfrm>
+            <a:off x="5166360" y="1965960"/>
+            <a:ext cx="2011680" cy="1143000"/>
+          </a:xfrm>
+          <a:prstGeom prst="roundRect">
+            <a:avLst/>
+          </a:prstGeom>
+          <a:solidFill>
+            <a:srgbClr val="FDE9D9"/>
+          </a:solidFill>
+          <a:ln w="12700">
+            <a:solidFill>
+              <a:srgbClr val="1F4E79"/>
+            </a:solidFill>
+          </a:ln>
+          <a:effectLst/>
+        </p:spPr>
+        <p:style>
+          <a:lnRef idx="1">
+            <a:schemeClr val="accent1"/>
+          </a:lnRef>
+          <a:fillRef idx="3">
+            <a:schemeClr val="accent1"/>
+          </a:fillRef>
+          <a:effectRef idx="2">
+            <a:schemeClr val="accent1"/>
+          </a:effectRef>
+          <a:fontRef idx="minor">
+            <a:schemeClr val="lt1"/>
+          </a:fontRef>
+        </p:style>
+        <p:txBody>
+          <a:bodyPr rtlCol="0" anchor="ctr" wrap="square"/>
+          <a:lstStyle/>
+          <a:p>
+            <a:pPr algn="ctr" rtl="1"/>
+            <a:r>
+              <a:rPr sz="1500" b="1">
+                <a:solidFill>
+                  <a:srgbClr val="333333"/>
+                </a:solidFill>
+                <a:latin typeface="Arial"/>
+              </a:rPr>
+              <a:t>نشر</a:t>
+            </a:r>
+          </a:p>
+          <a:p>
+            <a:pPr algn="ctr" rtl="0"/>
+            <a:r>
+              <a:rPr sz="1100">
+                <a:solidFill>
+                  <a:srgbClr val="666666"/>
+                </a:solidFill>
+                <a:latin typeface="Calibri"/>
+              </a:rPr>
+              <a:t>Deploy</a:t>
+            </a:r>
+          </a:p>
+        </p:txBody>
+      </p:sp>
+      <p:sp>
+        <p:nvSpPr>
+          <p:cNvPr id="8" name="Right Arrow 7"/>
+          <p:cNvSpPr/>
+          <p:nvPr/>
+        </p:nvSpPr>
+        <p:spPr>
+          <a:xfrm>
+            <a:off x="7223760" y="2423160"/>
+            <a:ext cx="256032" cy="274320"/>
+          </a:xfrm>
+          <a:prstGeom prst="rightArrow">
+            <a:avLst/>
+          </a:prstGeom>
+          <a:solidFill>
+            <a:srgbClr val="1F4E79"/>
+          </a:solidFill>
+          <a:ln>
+            <a:noFill/>
+          </a:ln>
+          <a:effectLst/>
+        </p:spPr>
+        <p:style>
+          <a:lnRef idx="1">
+            <a:schemeClr val="accent1"/>
+          </a:lnRef>
+          <a:fillRef idx="3">
+            <a:schemeClr val="accent1"/>
+          </a:fillRef>
+          <a:effectRef idx="2">
+            <a:schemeClr val="accent1"/>
+          </a:effectRef>
+          <a:fontRef idx="minor">
+            <a:schemeClr val="lt1"/>
+          </a:fontRef>
+        </p:style>
+        <p:txBody>
+          <a:bodyPr rtlCol="0" anchor="ctr"/>
+          <a:lstStyle/>
+          <a:p>
+            <a:pPr algn="ctr"/>
+          </a:p>
+        </p:txBody>
+      </p:sp>
+      <p:sp>
+        <p:nvSpPr>
+          <p:cNvPr id="9" name="Rounded Rectangle 8"/>
+          <p:cNvSpPr/>
+          <p:nvPr/>
+        </p:nvSpPr>
+        <p:spPr>
+          <a:xfrm>
+            <a:off x="7498080" y="1965960"/>
+            <a:ext cx="2011680" cy="1143000"/>
+          </a:xfrm>
+          <a:prstGeom prst="roundRect">
+            <a:avLst/>
+          </a:prstGeom>
+          <a:solidFill>
+            <a:srgbClr val="EDEDED"/>
+          </a:solidFill>
+          <a:ln w="12700">
+            <a:solidFill>
+              <a:srgbClr val="1F4E79"/>
+            </a:solidFill>
+          </a:ln>
+          <a:effectLst/>
+        </p:spPr>
+        <p:style>
+          <a:lnRef idx="1">
+            <a:schemeClr val="accent1"/>
+          </a:lnRef>
+          <a:fillRef idx="3">
+            <a:schemeClr val="accent1"/>
+          </a:fillRef>
+          <a:effectRef idx="2">
+            <a:schemeClr val="accent1"/>
+          </a:effectRef>
+          <a:fontRef idx="minor">
+            <a:schemeClr val="lt1"/>
+          </a:fontRef>
+        </p:style>
+        <p:txBody>
+          <a:bodyPr rtlCol="0" anchor="ctr" wrap="square"/>
+          <a:lstStyle/>
+          <a:p>
+            <a:pPr algn="ctr" rtl="1"/>
+            <a:r>
+              <a:rPr sz="1500" b="1">
+                <a:solidFill>
+                  <a:srgbClr val="333333"/>
+                </a:solidFill>
+                <a:latin typeface="Arial"/>
+              </a:rPr>
+              <a:t>مراقبة</a:t>
+            </a:r>
+          </a:p>
+          <a:p>
+            <a:pPr algn="ctr" rtl="0"/>
+            <a:r>
+              <a:rPr sz="1100">
+                <a:solidFill>
+                  <a:srgbClr val="666666"/>
+                </a:solidFill>
+                <a:latin typeface="Calibri"/>
+              </a:rPr>
+              <a:t>Monitor</a:t>
+            </a:r>
+          </a:p>
+        </p:txBody>
+      </p:sp>
+      <p:sp>
+        <p:nvSpPr>
+          <p:cNvPr id="10" name="Right Arrow 9"/>
+          <p:cNvSpPr/>
+          <p:nvPr/>
+        </p:nvSpPr>
+        <p:spPr>
+          <a:xfrm>
+            <a:off x="9555480" y="2423160"/>
+            <a:ext cx="256032" cy="274320"/>
+          </a:xfrm>
+          <a:prstGeom prst="rightArrow">
+            <a:avLst/>
+          </a:prstGeom>
+          <a:solidFill>
+            <a:srgbClr val="1F4E79"/>
+          </a:solidFill>
+          <a:ln>
+            <a:noFill/>
+          </a:ln>
+          <a:effectLst/>
+        </p:spPr>
+        <p:style>
+          <a:lnRef idx="1">
+            <a:schemeClr val="accent1"/>
+          </a:lnRef>
+          <a:fillRef idx="3">
+            <a:schemeClr val="accent1"/>
+          </a:fillRef>
+          <a:effectRef idx="2">
+            <a:schemeClr val="accent1"/>
+          </a:effectRef>
+          <a:fontRef idx="minor">
+            <a:schemeClr val="lt1"/>
+          </a:fontRef>
+        </p:style>
+        <p:txBody>
+          <a:bodyPr rtlCol="0" anchor="ctr"/>
+          <a:lstStyle/>
+          <a:p>
+            <a:pPr algn="ctr"/>
+          </a:p>
+        </p:txBody>
+      </p:sp>
+      <p:sp>
+        <p:nvSpPr>
+          <p:cNvPr id="11" name="Rounded Rectangle 10"/>
+          <p:cNvSpPr/>
+          <p:nvPr/>
+        </p:nvSpPr>
+        <p:spPr>
+          <a:xfrm>
+            <a:off x="9829800" y="1965960"/>
+            <a:ext cx="2011680" cy="1143000"/>
+          </a:xfrm>
+          <a:prstGeom prst="roundRect">
+            <a:avLst/>
+          </a:prstGeom>
+          <a:solidFill>
+            <a:srgbClr val="DCE6F1"/>
+          </a:solidFill>
+          <a:ln w="12700">
+            <a:solidFill>
+              <a:srgbClr val="1F4E79"/>
+            </a:solidFill>
+          </a:ln>
+          <a:effectLst/>
+        </p:spPr>
+        <p:style>
+          <a:lnRef idx="1">
+            <a:schemeClr val="accent1"/>
+          </a:lnRef>
+          <a:fillRef idx="3">
+            <a:schemeClr val="accent1"/>
+          </a:fillRef>
+          <a:effectRef idx="2">
+            <a:schemeClr val="accent1"/>
+          </a:effectRef>
+          <a:fontRef idx="minor">
+            <a:schemeClr val="lt1"/>
+          </a:fontRef>
+        </p:style>
+        <p:txBody>
+          <a:bodyPr rtlCol="0" anchor="ctr" wrap="square"/>
+          <a:lstStyle/>
+          <a:p>
+            <a:pPr algn="ctr" rtl="1"/>
+            <a:r>
+              <a:rPr sz="1500" b="1">
+                <a:solidFill>
+                  <a:srgbClr val="333333"/>
+                </a:solidFill>
+                <a:latin typeface="Arial"/>
+              </a:rPr>
+              <a:t>إعادة تدريب</a:t>
+            </a:r>
+          </a:p>
+          <a:p>
+            <a:pPr algn="ctr" rtl="0"/>
+            <a:r>
+              <a:rPr sz="1100">
+                <a:solidFill>
+                  <a:srgbClr val="666666"/>
+                </a:solidFill>
+                <a:latin typeface="Calibri"/>
+              </a:rPr>
+              <a:t>Retrain</a:t>
+            </a:r>
+          </a:p>
+        </p:txBody>
+      </p:sp>
+      <p:sp>
+        <p:nvSpPr>
+          <p:cNvPr id="12" name="Rounded Rectangle 11"/>
+          <p:cNvSpPr/>
+          <p:nvPr/>
+        </p:nvSpPr>
+        <p:spPr>
+          <a:xfrm>
+            <a:off x="1920240" y="4023360"/>
+            <a:ext cx="8321040" cy="868680"/>
+          </a:xfrm>
+          <a:prstGeom prst="roundRect">
+            <a:avLst/>
+          </a:prstGeom>
+          <a:solidFill>
+            <a:srgbClr val="E2EFDA"/>
+          </a:solidFill>
+          <a:ln w="12700">
+            <a:solidFill>
+              <a:srgbClr val="1F4E79"/>
+            </a:solidFill>
+          </a:ln>
+          <a:effectLst/>
+        </p:spPr>
+        <p:style>
+          <a:lnRef idx="1">
+            <a:schemeClr val="accent1"/>
+          </a:lnRef>
+          <a:fillRef idx="3">
+            <a:schemeClr val="accent1"/>
+          </a:fillRef>
+          <a:effectRef idx="2">
+            <a:schemeClr val="accent1"/>
+          </a:effectRef>
+          <a:fontRef idx="minor">
+            <a:schemeClr val="lt1"/>
+          </a:fontRef>
+        </p:style>
+        <p:txBody>
+          <a:bodyPr rtlCol="0" anchor="ctr" wrap="square"/>
+          <a:lstStyle/>
+          <a:p>
+            <a:pPr algn="ctr" rtl="1"/>
+            <a:r>
+              <a:rPr sz="1500" b="1">
+                <a:solidFill>
+                  <a:srgbClr val="333333"/>
+                </a:solidFill>
+                <a:latin typeface="Arial"/>
+              </a:rPr>
+              <a:t>سجّل الإصدارات والقياسات في كل مرحلة — ثم أعد التعلم من الإنتاج</a:t>
+            </a:r>
+          </a:p>
+          <a:p>
+            <a:pPr algn="ctr" rtl="0"/>
+            <a:r>
+              <a:rPr sz="1200">
+                <a:solidFill>
+                  <a:srgbClr val="666666"/>
+                </a:solidFill>
+                <a:latin typeface="Calibri"/>
+              </a:rPr>
+              <a:t>Record versions and metrics at every stage — then learn again from production</a:t>
+            </a:r>
+          </a:p>
+        </p:txBody>
+      </p:sp>
+      <p:sp>
+        <p:nvSpPr>
+          <p:cNvPr id="13" name="TextBox 12"/>
+          <p:cNvSpPr txBox="1"/>
+          <p:nvPr/>
+        </p:nvSpPr>
+        <p:spPr>
+          <a:xfrm>
+            <a:off x="640080" y="6126480"/>
+            <a:ext cx="10972800" cy="548640"/>
+          </a:xfrm>
+          <a:prstGeom prst="rect">
+            <a:avLst/>
+          </a:prstGeom>
+          <a:noFill/>
+        </p:spPr>
+        <p:txBody>
+          <a:bodyPr wrap="square">
+            <a:spAutoFit/>
+          </a:bodyPr>
+          <a:lstStyle/>
+          <a:p>
+            <a:pPr algn="r" rtl="1"/>
+            <a:r>
+              <a:rPr sz="1400">
+                <a:solidFill>
+                  <a:srgbClr val="666666"/>
+                </a:solidFill>
+                <a:latin typeface="Arial"/>
+              </a:rPr>
+              <a:t>MLOps ليس «نشرًا مرة واحدة»؛ إنه حلقة قابلة للقياس والتحسين.</a:t>
+            </a:r>
+          </a:p>
+          <a:p>
+            <a:pPr algn="r" rtl="0"/>
+            <a:r>
+              <a:t>MLOps is not “deploy once”; it is a measurable improvement loop.</a:t>
+            </a:r>
+          </a:p>
+        </p:txBody>
+      </p:sp>
+    </p:spTree>
+  </p:cSld>
+  <p:clrMapOvr>
+    <a:masterClrMapping/>
+  </p:clrMapOvr>
+</p:sld>
+</file>
+
 <file path=ppt/slides/slide2.xml><?xml version="1.0" encoding="utf-8"?>
 <p:sld xmlns:a="http://schemas.openxmlformats.org/drawingml/2006/main" xmlns:p="http://schemas.openxmlformats.org/presentationml/2006/main" xmlns:r="http://schemas.openxmlformats.org/officeDocument/2006/relationships">
   <p:cSld>
@@ -7258,6 +11048,510 @@
             <a:pPr algn="r" rtl="0"/>
             <a:r>
               <a:t>Governance via quality improvement between layers — central ownership.</a:t>
+            </a:r>
+          </a:p>
+        </p:txBody>
+      </p:sp>
+    </p:spTree>
+  </p:cSld>
+  <p:clrMapOvr>
+    <a:masterClrMapping/>
+  </p:clrMapOvr>
+</p:sld>
+</file>
+
+<file path=ppt/slides/slide20.xml><?xml version="1.0" encoding="utf-8"?>
+<p:sld xmlns:a="http://schemas.openxmlformats.org/drawingml/2006/main" xmlns:p="http://schemas.openxmlformats.org/presentationml/2006/main" xmlns:r="http://schemas.openxmlformats.org/officeDocument/2006/relationships">
+  <p:cSld>
+    <p:bg>
+      <p:bgPr>
+        <a:solidFill>
+          <a:srgbClr val="FFFFFF"/>
+        </a:solidFill>
+        <a:effectLst/>
+      </p:bgPr>
+    </p:bg>
+    <p:spTree>
+      <p:nvGrpSpPr>
+        <p:cNvPr id="1" name=""/>
+        <p:cNvGrpSpPr/>
+        <p:nvPr/>
+      </p:nvGrpSpPr>
+      <p:grpSpPr/>
+      <p:sp>
+        <p:nvSpPr>
+          <p:cNvPr id="2" name="TextBox 1"/>
+          <p:cNvSpPr txBox="1"/>
+          <p:nvPr/>
+        </p:nvSpPr>
+        <p:spPr>
+          <a:xfrm>
+            <a:off x="640080" y="137160"/>
+            <a:ext cx="10972800" cy="640080"/>
+          </a:xfrm>
+          <a:prstGeom prst="rect">
+            <a:avLst/>
+          </a:prstGeom>
+          <a:noFill/>
+        </p:spPr>
+        <p:txBody>
+          <a:bodyPr wrap="none">
+            <a:spAutoFit/>
+          </a:bodyPr>
+          <a:lstStyle/>
+          <a:p>
+            <a:pPr algn="r" rtl="1"/>
+            <a:r>
+              <a:rPr sz="3000" b="1">
+                <a:solidFill>
+                  <a:srgbClr val="1F3B5C"/>
+                </a:solidFill>
+                <a:latin typeface="Arial"/>
+              </a:rPr>
+              <a:t>خريطة المصطلحات / Glossary Map</a:t>
+            </a:r>
+          </a:p>
+        </p:txBody>
+      </p:sp>
+      <p:sp>
+        <p:nvSpPr>
+          <p:cNvPr id="3" name="Rounded Rectangle 2"/>
+          <p:cNvSpPr/>
+          <p:nvPr/>
+        </p:nvSpPr>
+        <p:spPr>
+          <a:xfrm>
+            <a:off x="731520" y="1234440"/>
+            <a:ext cx="3474720" cy="1097280"/>
+          </a:xfrm>
+          <a:prstGeom prst="roundRect">
+            <a:avLst/>
+          </a:prstGeom>
+          <a:solidFill>
+            <a:srgbClr val="DCE6F1"/>
+          </a:solidFill>
+          <a:ln w="12700">
+            <a:solidFill>
+              <a:srgbClr val="1F4E79"/>
+            </a:solidFill>
+          </a:ln>
+          <a:effectLst/>
+        </p:spPr>
+        <p:style>
+          <a:lnRef idx="1">
+            <a:schemeClr val="accent1"/>
+          </a:lnRef>
+          <a:fillRef idx="3">
+            <a:schemeClr val="accent1"/>
+          </a:fillRef>
+          <a:effectRef idx="2">
+            <a:schemeClr val="accent1"/>
+          </a:effectRef>
+          <a:fontRef idx="minor">
+            <a:schemeClr val="lt1"/>
+          </a:fontRef>
+        </p:style>
+        <p:txBody>
+          <a:bodyPr rtlCol="0" anchor="ctr" wrap="square"/>
+          <a:lstStyle/>
+          <a:p>
+            <a:pPr algn="ctr" rtl="1"/>
+            <a:r>
+              <a:rPr sz="1600" b="1">
+                <a:solidFill>
+                  <a:srgbClr val="333333"/>
+                </a:solidFill>
+                <a:latin typeface="Arial"/>
+              </a:rPr>
+              <a:t>البيانات والتخزين</a:t>
+            </a:r>
+          </a:p>
+          <a:p>
+            <a:pPr algn="ctr" rtl="0"/>
+            <a:r>
+              <a:rPr sz="1200">
+                <a:solidFill>
+                  <a:srgbClr val="666666"/>
+                </a:solidFill>
+                <a:latin typeface="Calibri"/>
+              </a:rPr>
+              <a:t>Data &amp; storage</a:t>
+            </a:r>
+          </a:p>
+        </p:txBody>
+      </p:sp>
+      <p:sp>
+        <p:nvSpPr>
+          <p:cNvPr id="4" name="Rounded Rectangle 3"/>
+          <p:cNvSpPr/>
+          <p:nvPr/>
+        </p:nvSpPr>
+        <p:spPr>
+          <a:xfrm>
+            <a:off x="4343400" y="1234440"/>
+            <a:ext cx="3474720" cy="1097280"/>
+          </a:xfrm>
+          <a:prstGeom prst="roundRect">
+            <a:avLst/>
+          </a:prstGeom>
+          <a:solidFill>
+            <a:srgbClr val="E2EFDA"/>
+          </a:solidFill>
+          <a:ln w="12700">
+            <a:solidFill>
+              <a:srgbClr val="1F4E79"/>
+            </a:solidFill>
+          </a:ln>
+          <a:effectLst/>
+        </p:spPr>
+        <p:style>
+          <a:lnRef idx="1">
+            <a:schemeClr val="accent1"/>
+          </a:lnRef>
+          <a:fillRef idx="3">
+            <a:schemeClr val="accent1"/>
+          </a:fillRef>
+          <a:effectRef idx="2">
+            <a:schemeClr val="accent1"/>
+          </a:effectRef>
+          <a:fontRef idx="minor">
+            <a:schemeClr val="lt1"/>
+          </a:fontRef>
+        </p:style>
+        <p:txBody>
+          <a:bodyPr rtlCol="0" anchor="ctr" wrap="square"/>
+          <a:lstStyle/>
+          <a:p>
+            <a:pPr algn="ctr" rtl="1"/>
+            <a:r>
+              <a:rPr sz="1600" b="1">
+                <a:solidFill>
+                  <a:srgbClr val="333333"/>
+                </a:solidFill>
+                <a:latin typeface="Arial"/>
+              </a:rPr>
+              <a:t>الخصائص</a:t>
+            </a:r>
+          </a:p>
+          <a:p>
+            <a:pPr algn="ctr" rtl="0"/>
+            <a:r>
+              <a:rPr sz="1200">
+                <a:solidFill>
+                  <a:srgbClr val="666666"/>
+                </a:solidFill>
+                <a:latin typeface="Calibri"/>
+              </a:rPr>
+              <a:t>Features</a:t>
+            </a:r>
+          </a:p>
+        </p:txBody>
+      </p:sp>
+      <p:sp>
+        <p:nvSpPr>
+          <p:cNvPr id="5" name="Rounded Rectangle 4"/>
+          <p:cNvSpPr/>
+          <p:nvPr/>
+        </p:nvSpPr>
+        <p:spPr>
+          <a:xfrm>
+            <a:off x="7955279" y="1234440"/>
+            <a:ext cx="3474720" cy="1097280"/>
+          </a:xfrm>
+          <a:prstGeom prst="roundRect">
+            <a:avLst/>
+          </a:prstGeom>
+          <a:solidFill>
+            <a:srgbClr val="FDE9D9"/>
+          </a:solidFill>
+          <a:ln w="12700">
+            <a:solidFill>
+              <a:srgbClr val="1F4E79"/>
+            </a:solidFill>
+          </a:ln>
+          <a:effectLst/>
+        </p:spPr>
+        <p:style>
+          <a:lnRef idx="1">
+            <a:schemeClr val="accent1"/>
+          </a:lnRef>
+          <a:fillRef idx="3">
+            <a:schemeClr val="accent1"/>
+          </a:fillRef>
+          <a:effectRef idx="2">
+            <a:schemeClr val="accent1"/>
+          </a:effectRef>
+          <a:fontRef idx="minor">
+            <a:schemeClr val="lt1"/>
+          </a:fontRef>
+        </p:style>
+        <p:txBody>
+          <a:bodyPr rtlCol="0" anchor="ctr" wrap="square"/>
+          <a:lstStyle/>
+          <a:p>
+            <a:pPr algn="ctr" rtl="1"/>
+            <a:r>
+              <a:rPr sz="1600" b="1">
+                <a:solidFill>
+                  <a:srgbClr val="333333"/>
+                </a:solidFill>
+                <a:latin typeface="Arial"/>
+              </a:rPr>
+              <a:t>RAG والاسترجاع</a:t>
+            </a:r>
+          </a:p>
+          <a:p>
+            <a:pPr algn="ctr" rtl="0"/>
+            <a:r>
+              <a:rPr sz="1200">
+                <a:solidFill>
+                  <a:srgbClr val="666666"/>
+                </a:solidFill>
+                <a:latin typeface="Calibri"/>
+              </a:rPr>
+              <a:t>RAG &amp; retrieval</a:t>
+            </a:r>
+          </a:p>
+        </p:txBody>
+      </p:sp>
+      <p:sp>
+        <p:nvSpPr>
+          <p:cNvPr id="6" name="Rounded Rectangle 5"/>
+          <p:cNvSpPr/>
+          <p:nvPr/>
+        </p:nvSpPr>
+        <p:spPr>
+          <a:xfrm>
+            <a:off x="2514600" y="3429000"/>
+            <a:ext cx="3474720" cy="1097280"/>
+          </a:xfrm>
+          <a:prstGeom prst="roundRect">
+            <a:avLst/>
+          </a:prstGeom>
+          <a:solidFill>
+            <a:srgbClr val="EDEDED"/>
+          </a:solidFill>
+          <a:ln w="12700">
+            <a:solidFill>
+              <a:srgbClr val="1F4E79"/>
+            </a:solidFill>
+          </a:ln>
+          <a:effectLst/>
+        </p:spPr>
+        <p:style>
+          <a:lnRef idx="1">
+            <a:schemeClr val="accent1"/>
+          </a:lnRef>
+          <a:fillRef idx="3">
+            <a:schemeClr val="accent1"/>
+          </a:fillRef>
+          <a:effectRef idx="2">
+            <a:schemeClr val="accent1"/>
+          </a:effectRef>
+          <a:fontRef idx="minor">
+            <a:schemeClr val="lt1"/>
+          </a:fontRef>
+        </p:style>
+        <p:txBody>
+          <a:bodyPr rtlCol="0" anchor="ctr" wrap="square"/>
+          <a:lstStyle/>
+          <a:p>
+            <a:pPr algn="ctr" rtl="1"/>
+            <a:r>
+              <a:rPr sz="1600" b="1">
+                <a:solidFill>
+                  <a:srgbClr val="333333"/>
+                </a:solidFill>
+                <a:latin typeface="Arial"/>
+              </a:rPr>
+              <a:t>الحوكمة</a:t>
+            </a:r>
+          </a:p>
+          <a:p>
+            <a:pPr algn="ctr" rtl="0"/>
+            <a:r>
+              <a:rPr sz="1200">
+                <a:solidFill>
+                  <a:srgbClr val="666666"/>
+                </a:solidFill>
+                <a:latin typeface="Calibri"/>
+              </a:rPr>
+              <a:t>Governance</a:t>
+            </a:r>
+          </a:p>
+        </p:txBody>
+      </p:sp>
+      <p:sp>
+        <p:nvSpPr>
+          <p:cNvPr id="7" name="Rounded Rectangle 6"/>
+          <p:cNvSpPr/>
+          <p:nvPr/>
+        </p:nvSpPr>
+        <p:spPr>
+          <a:xfrm>
+            <a:off x="6126480" y="3429000"/>
+            <a:ext cx="3474720" cy="1097280"/>
+          </a:xfrm>
+          <a:prstGeom prst="roundRect">
+            <a:avLst/>
+          </a:prstGeom>
+          <a:solidFill>
+            <a:srgbClr val="DCE6F1"/>
+          </a:solidFill>
+          <a:ln w="12700">
+            <a:solidFill>
+              <a:srgbClr val="1F4E79"/>
+            </a:solidFill>
+          </a:ln>
+          <a:effectLst/>
+        </p:spPr>
+        <p:style>
+          <a:lnRef idx="1">
+            <a:schemeClr val="accent1"/>
+          </a:lnRef>
+          <a:fillRef idx="3">
+            <a:schemeClr val="accent1"/>
+          </a:fillRef>
+          <a:effectRef idx="2">
+            <a:schemeClr val="accent1"/>
+          </a:effectRef>
+          <a:fontRef idx="minor">
+            <a:schemeClr val="lt1"/>
+          </a:fontRef>
+        </p:style>
+        <p:txBody>
+          <a:bodyPr rtlCol="0" anchor="ctr" wrap="square"/>
+          <a:lstStyle/>
+          <a:p>
+            <a:pPr algn="ctr" rtl="1"/>
+            <a:r>
+              <a:rPr sz="1600" b="1">
+                <a:solidFill>
+                  <a:srgbClr val="333333"/>
+                </a:solidFill>
+                <a:latin typeface="Arial"/>
+              </a:rPr>
+              <a:t>MLOps</a:t>
+            </a:r>
+          </a:p>
+          <a:p>
+            <a:pPr algn="ctr" rtl="0"/>
+            <a:r>
+              <a:rPr sz="1200">
+                <a:solidFill>
+                  <a:srgbClr val="666666"/>
+                </a:solidFill>
+                <a:latin typeface="Calibri"/>
+              </a:rPr>
+              <a:t>MLOps</a:t>
+            </a:r>
+          </a:p>
+        </p:txBody>
+      </p:sp>
+      <p:sp>
+        <p:nvSpPr>
+          <p:cNvPr id="8" name="Rounded Rectangle 7"/>
+          <p:cNvSpPr/>
+          <p:nvPr/>
+        </p:nvSpPr>
+        <p:spPr>
+          <a:xfrm>
+            <a:off x="3840480" y="2331720"/>
+            <a:ext cx="4526280" cy="640080"/>
+          </a:xfrm>
+          <a:prstGeom prst="roundRect">
+            <a:avLst/>
+          </a:prstGeom>
+          <a:solidFill>
+            <a:srgbClr val="EDEDED"/>
+          </a:solidFill>
+          <a:ln w="12700">
+            <a:solidFill>
+              <a:srgbClr val="1F4E79"/>
+            </a:solidFill>
+          </a:ln>
+          <a:effectLst/>
+        </p:spPr>
+        <p:style>
+          <a:lnRef idx="1">
+            <a:schemeClr val="accent1"/>
+          </a:lnRef>
+          <a:fillRef idx="3">
+            <a:schemeClr val="accent1"/>
+          </a:fillRef>
+          <a:effectRef idx="2">
+            <a:schemeClr val="accent1"/>
+          </a:effectRef>
+          <a:fontRef idx="minor">
+            <a:schemeClr val="lt1"/>
+          </a:fontRef>
+        </p:style>
+        <p:txBody>
+          <a:bodyPr rtlCol="0" anchor="ctr" wrap="square"/>
+          <a:lstStyle/>
+          <a:p>
+            <a:pPr algn="ctr" rtl="1"/>
+            <a:r>
+              <a:rPr sz="1300" b="1">
+                <a:solidFill>
+                  <a:srgbClr val="333333"/>
+                </a:solidFill>
+                <a:latin typeface="Arial"/>
+              </a:rPr>
+              <a:t>تعلم المصطلحات كمجموعات مترابطة</a:t>
+            </a:r>
+          </a:p>
+          <a:p>
+            <a:pPr algn="ctr" rtl="0"/>
+            <a:r>
+              <a:rPr sz="1100">
+                <a:solidFill>
+                  <a:srgbClr val="666666"/>
+                </a:solidFill>
+                <a:latin typeface="Calibri"/>
+              </a:rPr>
+              <a:t>Learn terms as connected groups</a:t>
+            </a:r>
+          </a:p>
+        </p:txBody>
+      </p:sp>
+      <p:sp>
+        <p:nvSpPr>
+          <p:cNvPr id="9" name="TextBox 8"/>
+          <p:cNvSpPr txBox="1"/>
+          <p:nvPr/>
+        </p:nvSpPr>
+        <p:spPr>
+          <a:xfrm>
+            <a:off x="640080" y="6126480"/>
+            <a:ext cx="10972800" cy="548640"/>
+          </a:xfrm>
+          <a:prstGeom prst="rect">
+            <a:avLst/>
+          </a:prstGeom>
+          <a:noFill/>
+        </p:spPr>
+        <p:txBody>
+          <a:bodyPr wrap="square">
+            <a:spAutoFit/>
+          </a:bodyPr>
+          <a:lstStyle/>
+          <a:p>
+            <a:pPr algn="r" rtl="1"/>
+            <a:r>
+              <a:rPr sz="1400">
+                <a:solidFill>
+                  <a:srgbClr val="666666"/>
+                </a:solidFill>
+                <a:latin typeface="Arial"/>
+              </a:rPr>
+              <a:t>استخدم هذه الخريطة قبل الرجوع إلى التعريفات التفصيلية.</a:t>
+            </a:r>
+          </a:p>
+          <a:p>
+            <a:pPr algn="r" rtl="0"/>
+            <a:r>
+              <a:t>Use this map before returning to the detailed definitions.</a:t>
             </a:r>
           </a:p>
         </p:txBody>
